--- a/UKB-DRP_脑MRI影像分析报告.pptx
+++ b/UKB-DRP_脑MRI影像分析报告.pptx
@@ -18,6 +18,7 @@
     <p:sldId id="266" r:id="rId17"/>
     <p:sldId id="267" r:id="rId18"/>
     <p:sldId id="268" r:id="rId19"/>
+    <p:sldId id="269" r:id="rId20"/>
   </p:sldIdLst>
   <p:sldSz cx="12191695" cy="6858000" type="screen4x3"/>
   <p:notesSz cx="6858000" cy="9144000"/>
@@ -3365,7 +3366,7 @@
               </a:defRPr>
             </a:pPr>
             <a:r>
-              <a:t>1/13</a:t>
+              <a:t>1/14</a:t>
             </a:r>
           </a:p>
         </p:txBody>
@@ -3470,7 +3471,7 @@
               </a:defRPr>
             </a:pPr>
             <a:r>
-              <a:t>方法论要点</a:t>
+              <a:t>剩余差距分析</a:t>
             </a:r>
           </a:p>
         </p:txBody>
@@ -3506,56 +3507,894 @@
               </a:defRPr>
             </a:pPr>
             <a:r>
-              <a:t>关键技术选择与注意事项</a:t>
-            </a:r>
-          </a:p>
-        </p:txBody>
-      </p:sp>
-      <p:sp>
-        <p:nvSpPr>
-          <p:cNvPr id="5" name="Rounded Rectangle 4"/>
-          <p:cNvSpPr/>
-          <p:nvPr/>
-        </p:nvSpPr>
-        <p:spPr>
-          <a:xfrm>
-            <a:off x="731520" y="1554480"/>
-            <a:ext cx="3474720" cy="2011680"/>
-          </a:xfrm>
-          <a:prstGeom prst="roundRect">
-            <a:avLst/>
-          </a:prstGeom>
-          <a:solidFill>
-            <a:srgbClr val="E8F0FE"/>
-          </a:solidFill>
-          <a:ln w="6350">
-            <a:solidFill>
-              <a:srgbClr val="DDDDDD"/>
-            </a:solidFill>
-          </a:ln>
-        </p:spPr>
-        <p:style>
-          <a:lnRef idx="1">
-            <a:schemeClr val="accent1"/>
-          </a:lnRef>
-          <a:fillRef idx="3">
-            <a:schemeClr val="accent1"/>
-          </a:fillRef>
-          <a:effectRef idx="2">
-            <a:schemeClr val="accent1"/>
-          </a:effectRef>
-          <a:fontRef idx="minor">
-            <a:schemeClr val="lt1"/>
-          </a:fontRef>
-        </p:style>
-        <p:txBody>
-          <a:bodyPr rtlCol="0" anchor="ctr"/>
-          <a:lstStyle/>
-          <a:p>
-            <a:pPr algn="ctr"/>
-          </a:p>
-        </p:txBody>
-      </p:sp>
+              <a:t>加入脑 MRI 后与原论文仍存的差异及原因</a:t>
+            </a:r>
+          </a:p>
+        </p:txBody>
+      </p:sp>
+      <p:graphicFrame>
+        <p:nvGraphicFramePr>
+          <p:cNvPr id="5" name="Table 4"/>
+          <p:cNvGraphicFramePr>
+            <a:graphicFrameLocks noGrp="1"/>
+          </p:cNvGraphicFramePr>
+          <p:nvPr/>
+        </p:nvGraphicFramePr>
+        <p:xfrm>
+          <a:off x="731520" y="1554480"/>
+          <a:ext cx="11064240" cy="2240279"/>
+        </p:xfrm>
+        <a:graphic>
+          <a:graphicData uri="http://schemas.openxmlformats.org/drawingml/2006/table">
+            <a:tbl>
+              <a:tblPr firstRow="1" bandRow="1">
+                <a:tableStyleId>{5C22544A-7EE6-4342-B048-85BDC9FD1C3A}</a:tableStyleId>
+              </a:tblPr>
+              <a:tblGrid>
+                <a:gridCol w="1371600"/>
+                <a:gridCol w="1463040"/>
+                <a:gridCol w="1828800"/>
+                <a:gridCol w="3200400"/>
+                <a:gridCol w="3200400"/>
+              </a:tblGrid>
+              <a:tr h="320039">
+                <a:tc>
+                  <a:txBody>
+                    <a:bodyPr/>
+                    <a:lstStyle/>
+                    <a:p>
+                      <a:pPr algn="ctr">
+                        <a:defRPr sz="1000" b="1">
+                          <a:solidFill>
+                            <a:srgbClr val="FFFFFF"/>
+                          </a:solidFill>
+                          <a:latin typeface="Helvetica"/>
+                        </a:defRPr>
+                      </a:pPr>
+                      <a:r>
+                        <a:t>目标</a:t>
+                      </a:r>
+                    </a:p>
+                  </a:txBody>
+                  <a:tcPr>
+                    <a:solidFill>
+                      <a:srgbClr val="0066CC"/>
+                    </a:solidFill>
+                  </a:tcPr>
+                </a:tc>
+                <a:tc>
+                  <a:txBody>
+                    <a:bodyPr/>
+                    <a:lstStyle/>
+                    <a:p>
+                      <a:pPr algn="ctr">
+                        <a:defRPr sz="1000" b="1">
+                          <a:solidFill>
+                            <a:srgbClr val="FFFFFF"/>
+                          </a:solidFill>
+                          <a:latin typeface="Helvetica"/>
+                        </a:defRPr>
+                      </a:pPr>
+                      <a:r>
+                        <a:t>原论文 AUC</a:t>
+                      </a:r>
+                    </a:p>
+                  </a:txBody>
+                  <a:tcPr>
+                    <a:solidFill>
+                      <a:srgbClr val="0066CC"/>
+                    </a:solidFill>
+                  </a:tcPr>
+                </a:tc>
+                <a:tc>
+                  <a:txBody>
+                    <a:bodyPr/>
+                    <a:lstStyle/>
+                    <a:p>
+                      <a:pPr algn="ctr">
+                        <a:defRPr sz="1000" b="1">
+                          <a:solidFill>
+                            <a:srgbClr val="FFFFFF"/>
+                          </a:solidFill>
+                          <a:latin typeface="Helvetica"/>
+                        </a:defRPr>
+                      </a:pPr>
+                      <a:r>
+                        <a:t>+脑 MRI AUC</a:t>
+                      </a:r>
+                    </a:p>
+                  </a:txBody>
+                  <a:tcPr>
+                    <a:solidFill>
+                      <a:srgbClr val="0066CC"/>
+                    </a:solidFill>
+                  </a:tcPr>
+                </a:tc>
+                <a:tc>
+                  <a:txBody>
+                    <a:bodyPr/>
+                    <a:lstStyle/>
+                    <a:p>
+                      <a:pPr algn="ctr">
+                        <a:defRPr sz="1000" b="1">
+                          <a:solidFill>
+                            <a:srgbClr val="FFFFFF"/>
+                          </a:solidFill>
+                          <a:latin typeface="Helvetica"/>
+                        </a:defRPr>
+                      </a:pPr>
+                      <a:r>
+                        <a:t>剩余差距</a:t>
+                      </a:r>
+                    </a:p>
+                  </a:txBody>
+                  <a:tcPr>
+                    <a:solidFill>
+                      <a:srgbClr val="0066CC"/>
+                    </a:solidFill>
+                  </a:tcPr>
+                </a:tc>
+                <a:tc>
+                  <a:txBody>
+                    <a:bodyPr/>
+                    <a:lstStyle/>
+                    <a:p>
+                      <a:pPr algn="ctr">
+                        <a:defRPr sz="1000" b="1">
+                          <a:solidFill>
+                            <a:srgbClr val="FFFFFF"/>
+                          </a:solidFill>
+                          <a:latin typeface="Helvetica"/>
+                        </a:defRPr>
+                      </a:pPr>
+                      <a:r>
+                        <a:t>主要原因</a:t>
+                      </a:r>
+                    </a:p>
+                  </a:txBody>
+                  <a:tcPr>
+                    <a:solidFill>
+                      <a:srgbClr val="0066CC"/>
+                    </a:solidFill>
+                  </a:tcPr>
+                </a:tc>
+              </a:tr>
+              <a:tr h="320039">
+                <a:tc>
+                  <a:txBody>
+                    <a:bodyPr/>
+                    <a:lstStyle/>
+                    <a:p>
+                      <a:pPr algn="ctr">
+                        <a:defRPr sz="1000">
+                          <a:solidFill>
+                            <a:srgbClr val="1A1A2E"/>
+                          </a:solidFill>
+                          <a:latin typeface="Helvetica"/>
+                        </a:defRPr>
+                      </a:pPr>
+                      <a:r>
+                        <a:t>DM_full</a:t>
+                      </a:r>
+                    </a:p>
+                  </a:txBody>
+                  <a:tcPr>
+                    <a:solidFill>
+                      <a:srgbClr val="F5F5F5"/>
+                    </a:solidFill>
+                  </a:tcPr>
+                </a:tc>
+                <a:tc>
+                  <a:txBody>
+                    <a:bodyPr/>
+                    <a:lstStyle/>
+                    <a:p>
+                      <a:pPr algn="ctr">
+                        <a:defRPr sz="1000">
+                          <a:solidFill>
+                            <a:srgbClr val="1A1A2E"/>
+                          </a:solidFill>
+                          <a:latin typeface="Helvetica"/>
+                        </a:defRPr>
+                      </a:pPr>
+                      <a:r>
+                        <a:t>0.848</a:t>
+                      </a:r>
+                    </a:p>
+                  </a:txBody>
+                  <a:tcPr>
+                    <a:solidFill>
+                      <a:srgbClr val="F5F5F5"/>
+                    </a:solidFill>
+                  </a:tcPr>
+                </a:tc>
+                <a:tc>
+                  <a:txBody>
+                    <a:bodyPr/>
+                    <a:lstStyle/>
+                    <a:p>
+                      <a:pPr algn="ctr">
+                        <a:defRPr sz="1000">
+                          <a:solidFill>
+                            <a:srgbClr val="1A1A2E"/>
+                          </a:solidFill>
+                          <a:latin typeface="Helvetica"/>
+                        </a:defRPr>
+                      </a:pPr>
+                      <a:r>
+                        <a:t>0.837</a:t>
+                      </a:r>
+                    </a:p>
+                  </a:txBody>
+                  <a:tcPr>
+                    <a:solidFill>
+                      <a:srgbClr val="F5F5F5"/>
+                    </a:solidFill>
+                  </a:tcPr>
+                </a:tc>
+                <a:tc>
+                  <a:txBody>
+                    <a:bodyPr/>
+                    <a:lstStyle/>
+                    <a:p>
+                      <a:pPr algn="ctr">
+                        <a:defRPr sz="1000">
+                          <a:solidFill>
+                            <a:srgbClr val="1A1A2E"/>
+                          </a:solidFill>
+                          <a:latin typeface="Helvetica"/>
+                        </a:defRPr>
+                      </a:pPr>
+                      <a:r>
+                        <a:t>-0.011</a:t>
+                      </a:r>
+                    </a:p>
+                  </a:txBody>
+                  <a:tcPr>
+                    <a:solidFill>
+                      <a:srgbClr val="F5F5F5"/>
+                    </a:solidFill>
+                  </a:tcPr>
+                </a:tc>
+                <a:tc>
+                  <a:txBody>
+                    <a:bodyPr/>
+                    <a:lstStyle/>
+                    <a:p>
+                      <a:pPr algn="ctr">
+                        <a:defRPr sz="1000">
+                          <a:solidFill>
+                            <a:srgbClr val="1A1A2E"/>
+                          </a:solidFill>
+                          <a:latin typeface="Helvetica"/>
+                        </a:defRPr>
+                      </a:pPr>
+                      <a:r>
+                        <a:t>缺 ApoEε4 + PRS (Δ~0.01-0.02)</a:t>
+                      </a:r>
+                    </a:p>
+                  </a:txBody>
+                  <a:tcPr>
+                    <a:solidFill>
+                      <a:srgbClr val="F5F5F5"/>
+                    </a:solidFill>
+                  </a:tcPr>
+                </a:tc>
+              </a:tr>
+              <a:tr h="320039">
+                <a:tc>
+                  <a:txBody>
+                    <a:bodyPr/>
+                    <a:lstStyle/>
+                    <a:p>
+                      <a:pPr algn="ctr">
+                        <a:defRPr sz="1000">
+                          <a:solidFill>
+                            <a:srgbClr val="1A1A2E"/>
+                          </a:solidFill>
+                          <a:latin typeface="Helvetica"/>
+                        </a:defRPr>
+                      </a:pPr>
+                      <a:r>
+                        <a:t>DM_10yrs</a:t>
+                      </a:r>
+                    </a:p>
+                  </a:txBody>
+                  <a:tcPr>
+                    <a:solidFill>
+                      <a:srgbClr val="FFFFFF"/>
+                    </a:solidFill>
+                  </a:tcPr>
+                </a:tc>
+                <a:tc>
+                  <a:txBody>
+                    <a:bodyPr/>
+                    <a:lstStyle/>
+                    <a:p>
+                      <a:pPr algn="ctr">
+                        <a:defRPr sz="1000">
+                          <a:solidFill>
+                            <a:srgbClr val="1A1A2E"/>
+                          </a:solidFill>
+                          <a:latin typeface="Helvetica"/>
+                        </a:defRPr>
+                      </a:pPr>
+                      <a:r>
+                        <a:t>0.849</a:t>
+                      </a:r>
+                    </a:p>
+                  </a:txBody>
+                  <a:tcPr>
+                    <a:solidFill>
+                      <a:srgbClr val="FFFFFF"/>
+                    </a:solidFill>
+                  </a:tcPr>
+                </a:tc>
+                <a:tc>
+                  <a:txBody>
+                    <a:bodyPr/>
+                    <a:lstStyle/>
+                    <a:p>
+                      <a:pPr algn="ctr">
+                        <a:defRPr sz="1000">
+                          <a:solidFill>
+                            <a:srgbClr val="1A1A2E"/>
+                          </a:solidFill>
+                          <a:latin typeface="Helvetica"/>
+                        </a:defRPr>
+                      </a:pPr>
+                      <a:r>
+                        <a:t>0.841</a:t>
+                      </a:r>
+                    </a:p>
+                  </a:txBody>
+                  <a:tcPr>
+                    <a:solidFill>
+                      <a:srgbClr val="FFFFFF"/>
+                    </a:solidFill>
+                  </a:tcPr>
+                </a:tc>
+                <a:tc>
+                  <a:txBody>
+                    <a:bodyPr/>
+                    <a:lstStyle/>
+                    <a:p>
+                      <a:pPr algn="ctr">
+                        <a:defRPr sz="1000">
+                          <a:solidFill>
+                            <a:srgbClr val="1A1A2E"/>
+                          </a:solidFill>
+                          <a:latin typeface="Helvetica"/>
+                        </a:defRPr>
+                      </a:pPr>
+                      <a:r>
+                        <a:t>-0.008</a:t>
+                      </a:r>
+                    </a:p>
+                  </a:txBody>
+                  <a:tcPr>
+                    <a:solidFill>
+                      <a:srgbClr val="FFFFFF"/>
+                    </a:solidFill>
+                  </a:tcPr>
+                </a:tc>
+                <a:tc>
+                  <a:txBody>
+                    <a:bodyPr/>
+                    <a:lstStyle/>
+                    <a:p>
+                      <a:pPr algn="ctr">
+                        <a:defRPr sz="1000">
+                          <a:solidFill>
+                            <a:srgbClr val="1A1A2E"/>
+                          </a:solidFill>
+                          <a:latin typeface="Helvetica"/>
+                        </a:defRPr>
+                      </a:pPr>
+                      <a:r>
+                        <a:t>缺 ApoEε4 + PRS</a:t>
+                      </a:r>
+                    </a:p>
+                  </a:txBody>
+                  <a:tcPr>
+                    <a:solidFill>
+                      <a:srgbClr val="FFFFFF"/>
+                    </a:solidFill>
+                  </a:tcPr>
+                </a:tc>
+              </a:tr>
+              <a:tr h="320039">
+                <a:tc>
+                  <a:txBody>
+                    <a:bodyPr/>
+                    <a:lstStyle/>
+                    <a:p>
+                      <a:pPr algn="ctr">
+                        <a:defRPr sz="1000">
+                          <a:solidFill>
+                            <a:srgbClr val="1A1A2E"/>
+                          </a:solidFill>
+                          <a:latin typeface="Helvetica"/>
+                        </a:defRPr>
+                      </a:pPr>
+                      <a:r>
+                        <a:t>DM_5yrs</a:t>
+                      </a:r>
+                    </a:p>
+                  </a:txBody>
+                  <a:tcPr>
+                    <a:solidFill>
+                      <a:srgbClr val="F5F5F5"/>
+                    </a:solidFill>
+                  </a:tcPr>
+                </a:tc>
+                <a:tc>
+                  <a:txBody>
+                    <a:bodyPr/>
+                    <a:lstStyle/>
+                    <a:p>
+                      <a:pPr algn="ctr">
+                        <a:defRPr sz="1000">
+                          <a:solidFill>
+                            <a:srgbClr val="1A1A2E"/>
+                          </a:solidFill>
+                          <a:latin typeface="Helvetica"/>
+                        </a:defRPr>
+                      </a:pPr>
+                      <a:r>
+                        <a:t>0.847</a:t>
+                      </a:r>
+                    </a:p>
+                  </a:txBody>
+                  <a:tcPr>
+                    <a:solidFill>
+                      <a:srgbClr val="F5F5F5"/>
+                    </a:solidFill>
+                  </a:tcPr>
+                </a:tc>
+                <a:tc>
+                  <a:txBody>
+                    <a:bodyPr/>
+                    <a:lstStyle/>
+                    <a:p>
+                      <a:pPr algn="ctr">
+                        <a:defRPr sz="1000">
+                          <a:solidFill>
+                            <a:srgbClr val="1A1A2E"/>
+                          </a:solidFill>
+                          <a:latin typeface="Helvetica"/>
+                        </a:defRPr>
+                      </a:pPr>
+                      <a:r>
+                        <a:t>0.842</a:t>
+                      </a:r>
+                    </a:p>
+                  </a:txBody>
+                  <a:tcPr>
+                    <a:solidFill>
+                      <a:srgbClr val="F5F5F5"/>
+                    </a:solidFill>
+                  </a:tcPr>
+                </a:tc>
+                <a:tc>
+                  <a:txBody>
+                    <a:bodyPr/>
+                    <a:lstStyle/>
+                    <a:p>
+                      <a:pPr algn="ctr">
+                        <a:defRPr sz="1000">
+                          <a:solidFill>
+                            <a:srgbClr val="1A1A2E"/>
+                          </a:solidFill>
+                          <a:latin typeface="Helvetica"/>
+                        </a:defRPr>
+                      </a:pPr>
+                      <a:r>
+                        <a:t>-0.005</a:t>
+                      </a:r>
+                    </a:p>
+                  </a:txBody>
+                  <a:tcPr>
+                    <a:solidFill>
+                      <a:srgbClr val="F5F5F5"/>
+                    </a:solidFill>
+                  </a:tcPr>
+                </a:tc>
+                <a:tc>
+                  <a:txBody>
+                    <a:bodyPr/>
+                    <a:lstStyle/>
+                    <a:p>
+                      <a:pPr algn="ctr">
+                        <a:defRPr sz="1000">
+                          <a:solidFill>
+                            <a:srgbClr val="1A1A2E"/>
+                          </a:solidFill>
+                          <a:latin typeface="Helvetica"/>
+                        </a:defRPr>
+                      </a:pPr>
+                      <a:r>
+                        <a:t>基本追平，差距可接受</a:t>
+                      </a:r>
+                    </a:p>
+                  </a:txBody>
+                  <a:tcPr>
+                    <a:solidFill>
+                      <a:srgbClr val="F5F5F5"/>
+                    </a:solidFill>
+                  </a:tcPr>
+                </a:tc>
+              </a:tr>
+              <a:tr h="320039">
+                <a:tc>
+                  <a:txBody>
+                    <a:bodyPr/>
+                    <a:lstStyle/>
+                    <a:p>
+                      <a:pPr algn="ctr">
+                        <a:defRPr sz="1000">
+                          <a:solidFill>
+                            <a:srgbClr val="1A1A2E"/>
+                          </a:solidFill>
+                          <a:latin typeface="Helvetica"/>
+                        </a:defRPr>
+                      </a:pPr>
+                      <a:r>
+                        <a:t>AD_full</a:t>
+                      </a:r>
+                    </a:p>
+                  </a:txBody>
+                  <a:tcPr>
+                    <a:solidFill>
+                      <a:srgbClr val="FFFFFF"/>
+                    </a:solidFill>
+                  </a:tcPr>
+                </a:tc>
+                <a:tc>
+                  <a:txBody>
+                    <a:bodyPr/>
+                    <a:lstStyle/>
+                    <a:p>
+                      <a:pPr algn="ctr">
+                        <a:defRPr sz="1000">
+                          <a:solidFill>
+                            <a:srgbClr val="1A1A2E"/>
+                          </a:solidFill>
+                          <a:latin typeface="Helvetica"/>
+                        </a:defRPr>
+                      </a:pPr>
+                      <a:r>
+                        <a:t>0.862</a:t>
+                      </a:r>
+                    </a:p>
+                  </a:txBody>
+                  <a:tcPr>
+                    <a:solidFill>
+                      <a:srgbClr val="FFFFFF"/>
+                    </a:solidFill>
+                  </a:tcPr>
+                </a:tc>
+                <a:tc>
+                  <a:txBody>
+                    <a:bodyPr/>
+                    <a:lstStyle/>
+                    <a:p>
+                      <a:pPr algn="ctr">
+                        <a:defRPr sz="1000">
+                          <a:solidFill>
+                            <a:srgbClr val="1A1A2E"/>
+                          </a:solidFill>
+                          <a:latin typeface="Helvetica"/>
+                        </a:defRPr>
+                      </a:pPr>
+                      <a:r>
+                        <a:t>0.845</a:t>
+                      </a:r>
+                    </a:p>
+                  </a:txBody>
+                  <a:tcPr>
+                    <a:solidFill>
+                      <a:srgbClr val="FFFFFF"/>
+                    </a:solidFill>
+                  </a:tcPr>
+                </a:tc>
+                <a:tc>
+                  <a:txBody>
+                    <a:bodyPr/>
+                    <a:lstStyle/>
+                    <a:p>
+                      <a:pPr algn="ctr">
+                        <a:defRPr sz="1000">
+                          <a:solidFill>
+                            <a:srgbClr val="1A1A2E"/>
+                          </a:solidFill>
+                          <a:latin typeface="Helvetica"/>
+                        </a:defRPr>
+                      </a:pPr>
+                      <a:r>
+                        <a:t>-0.017</a:t>
+                      </a:r>
+                    </a:p>
+                  </a:txBody>
+                  <a:tcPr>
+                    <a:solidFill>
+                      <a:srgbClr val="FFFFFF"/>
+                    </a:solidFill>
+                  </a:tcPr>
+                </a:tc>
+                <a:tc>
+                  <a:txBody>
+                    <a:bodyPr/>
+                    <a:lstStyle/>
+                    <a:p>
+                      <a:pPr algn="ctr">
+                        <a:defRPr sz="1000">
+                          <a:solidFill>
+                            <a:srgbClr val="1A1A2E"/>
+                          </a:solidFill>
+                          <a:latin typeface="Helvetica"/>
+                        </a:defRPr>
+                      </a:pPr>
+                      <a:r>
+                        <a:t>AD 高度依赖 ApoEε4</a:t>
+                      </a:r>
+                    </a:p>
+                  </a:txBody>
+                  <a:tcPr>
+                    <a:solidFill>
+                      <a:srgbClr val="FFFFFF"/>
+                    </a:solidFill>
+                  </a:tcPr>
+                </a:tc>
+              </a:tr>
+              <a:tr h="320039">
+                <a:tc>
+                  <a:txBody>
+                    <a:bodyPr/>
+                    <a:lstStyle/>
+                    <a:p>
+                      <a:pPr algn="ctr">
+                        <a:defRPr sz="1000">
+                          <a:solidFill>
+                            <a:srgbClr val="1A1A2E"/>
+                          </a:solidFill>
+                          <a:latin typeface="Helvetica"/>
+                        </a:defRPr>
+                      </a:pPr>
+                      <a:r>
+                        <a:t>AD_10yrs</a:t>
+                      </a:r>
+                    </a:p>
+                  </a:txBody>
+                  <a:tcPr>
+                    <a:solidFill>
+                      <a:srgbClr val="F5F5F5"/>
+                    </a:solidFill>
+                  </a:tcPr>
+                </a:tc>
+                <a:tc>
+                  <a:txBody>
+                    <a:bodyPr/>
+                    <a:lstStyle/>
+                    <a:p>
+                      <a:pPr algn="ctr">
+                        <a:defRPr sz="1000">
+                          <a:solidFill>
+                            <a:srgbClr val="1A1A2E"/>
+                          </a:solidFill>
+                          <a:latin typeface="Helvetica"/>
+                        </a:defRPr>
+                      </a:pPr>
+                      <a:r>
+                        <a:t>0.866</a:t>
+                      </a:r>
+                    </a:p>
+                  </a:txBody>
+                  <a:tcPr>
+                    <a:solidFill>
+                      <a:srgbClr val="F5F5F5"/>
+                    </a:solidFill>
+                  </a:tcPr>
+                </a:tc>
+                <a:tc>
+                  <a:txBody>
+                    <a:bodyPr/>
+                    <a:lstStyle/>
+                    <a:p>
+                      <a:pPr algn="ctr">
+                        <a:defRPr sz="1000">
+                          <a:solidFill>
+                            <a:srgbClr val="1A1A2E"/>
+                          </a:solidFill>
+                          <a:latin typeface="Helvetica"/>
+                        </a:defRPr>
+                      </a:pPr>
+                      <a:r>
+                        <a:t>0.853</a:t>
+                      </a:r>
+                    </a:p>
+                  </a:txBody>
+                  <a:tcPr>
+                    <a:solidFill>
+                      <a:srgbClr val="F5F5F5"/>
+                    </a:solidFill>
+                  </a:tcPr>
+                </a:tc>
+                <a:tc>
+                  <a:txBody>
+                    <a:bodyPr/>
+                    <a:lstStyle/>
+                    <a:p>
+                      <a:pPr algn="ctr">
+                        <a:defRPr sz="1000">
+                          <a:solidFill>
+                            <a:srgbClr val="1A1A2E"/>
+                          </a:solidFill>
+                          <a:latin typeface="Helvetica"/>
+                        </a:defRPr>
+                      </a:pPr>
+                      <a:r>
+                        <a:t>-0.013</a:t>
+                      </a:r>
+                    </a:p>
+                  </a:txBody>
+                  <a:tcPr>
+                    <a:solidFill>
+                      <a:srgbClr val="F5F5F5"/>
+                    </a:solidFill>
+                  </a:tcPr>
+                </a:tc>
+                <a:tc>
+                  <a:txBody>
+                    <a:bodyPr/>
+                    <a:lstStyle/>
+                    <a:p>
+                      <a:pPr algn="ctr">
+                        <a:defRPr sz="1000">
+                          <a:solidFill>
+                            <a:srgbClr val="1A1A2E"/>
+                          </a:solidFill>
+                          <a:latin typeface="Helvetica"/>
+                        </a:defRPr>
+                      </a:pPr>
+                      <a:r>
+                        <a:t>ApoEε4 + PRS 缺失影响大</a:t>
+                      </a:r>
+                    </a:p>
+                  </a:txBody>
+                  <a:tcPr>
+                    <a:solidFill>
+                      <a:srgbClr val="F5F5F5"/>
+                    </a:solidFill>
+                  </a:tcPr>
+                </a:tc>
+              </a:tr>
+              <a:tr h="320045">
+                <a:tc>
+                  <a:txBody>
+                    <a:bodyPr/>
+                    <a:lstStyle/>
+                    <a:p>
+                      <a:pPr algn="ctr">
+                        <a:defRPr sz="1000">
+                          <a:solidFill>
+                            <a:srgbClr val="1A1A2E"/>
+                          </a:solidFill>
+                          <a:latin typeface="Helvetica"/>
+                        </a:defRPr>
+                      </a:pPr>
+                      <a:r>
+                        <a:t>AD_5yrs</a:t>
+                      </a:r>
+                    </a:p>
+                  </a:txBody>
+                  <a:tcPr>
+                    <a:solidFill>
+                      <a:srgbClr val="FFFFFF"/>
+                    </a:solidFill>
+                  </a:tcPr>
+                </a:tc>
+                <a:tc>
+                  <a:txBody>
+                    <a:bodyPr/>
+                    <a:lstStyle/>
+                    <a:p>
+                      <a:pPr algn="ctr">
+                        <a:defRPr sz="1000">
+                          <a:solidFill>
+                            <a:srgbClr val="1A1A2E"/>
+                          </a:solidFill>
+                          <a:latin typeface="Helvetica"/>
+                        </a:defRPr>
+                      </a:pPr>
+                      <a:r>
+                        <a:t>0.890</a:t>
+                      </a:r>
+                    </a:p>
+                  </a:txBody>
+                  <a:tcPr>
+                    <a:solidFill>
+                      <a:srgbClr val="FFFFFF"/>
+                    </a:solidFill>
+                  </a:tcPr>
+                </a:tc>
+                <a:tc>
+                  <a:txBody>
+                    <a:bodyPr/>
+                    <a:lstStyle/>
+                    <a:p>
+                      <a:pPr algn="ctr">
+                        <a:defRPr sz="1000">
+                          <a:solidFill>
+                            <a:srgbClr val="1A1A2E"/>
+                          </a:solidFill>
+                          <a:latin typeface="Helvetica"/>
+                        </a:defRPr>
+                      </a:pPr>
+                      <a:r>
+                        <a:t>0.851</a:t>
+                      </a:r>
+                    </a:p>
+                  </a:txBody>
+                  <a:tcPr>
+                    <a:solidFill>
+                      <a:srgbClr val="FFFFFF"/>
+                    </a:solidFill>
+                  </a:tcPr>
+                </a:tc>
+                <a:tc>
+                  <a:txBody>
+                    <a:bodyPr/>
+                    <a:lstStyle/>
+                    <a:p>
+                      <a:pPr algn="ctr">
+                        <a:defRPr sz="1000">
+                          <a:solidFill>
+                            <a:srgbClr val="1A1A2E"/>
+                          </a:solidFill>
+                          <a:latin typeface="Helvetica"/>
+                        </a:defRPr>
+                      </a:pPr>
+                      <a:r>
+                        <a:t>-0.039</a:t>
+                      </a:r>
+                    </a:p>
+                  </a:txBody>
+                  <a:tcPr>
+                    <a:solidFill>
+                      <a:srgbClr val="FFFFFF"/>
+                    </a:solidFill>
+                  </a:tcPr>
+                </a:tc>
+                <a:tc>
+                  <a:txBody>
+                    <a:bodyPr/>
+                    <a:lstStyle/>
+                    <a:p>
+                      <a:pPr algn="ctr">
+                        <a:defRPr sz="1000">
+                          <a:solidFill>
+                            <a:srgbClr val="1A1A2E"/>
+                          </a:solidFill>
+                          <a:latin typeface="Helvetica"/>
+                        </a:defRPr>
+                      </a:pPr>
+                      <a:r>
+                        <a:t>ApoEε4 + 极低样本量</a:t>
+                      </a:r>
+                    </a:p>
+                  </a:txBody>
+                  <a:tcPr>
+                    <a:solidFill>
+                      <a:srgbClr val="FFFFFF"/>
+                    </a:solidFill>
+                  </a:tcPr>
+                </a:tc>
+              </a:tr>
+            </a:tbl>
+          </a:graphicData>
+        </a:graphic>
+      </p:graphicFrame>
       <p:sp>
         <p:nvSpPr>
           <p:cNvPr id="6" name="TextBox 5"/>
@@ -3564,80 +4403,8 @@
         </p:nvSpPr>
         <p:spPr>
           <a:xfrm>
-            <a:off x="868680" y="1645920"/>
-            <a:ext cx="457200" cy="457200"/>
-          </a:xfrm>
-          <a:prstGeom prst="rect">
-            <a:avLst/>
-          </a:prstGeom>
-          <a:noFill/>
-        </p:spPr>
-        <p:txBody>
-          <a:bodyPr wrap="square">
-            <a:spAutoFit/>
-          </a:bodyPr>
-          <a:lstStyle/>
-          <a:p>
-            <a:pPr algn="l">
-              <a:defRPr sz="2800" b="1">
-                <a:solidFill>
-                  <a:srgbClr val="0066CC"/>
-                </a:solidFill>
-                <a:latin typeface="Helvetica"/>
-              </a:defRPr>
-            </a:pPr>
-            <a:r>
-              <a:t>1</a:t>
-            </a:r>
-          </a:p>
-        </p:txBody>
-      </p:sp>
-      <p:sp>
-        <p:nvSpPr>
-          <p:cNvPr id="7" name="TextBox 6"/>
-          <p:cNvSpPr txBox="1"/>
-          <p:nvPr/>
-        </p:nvSpPr>
-        <p:spPr>
-          <a:xfrm>
-            <a:off x="868680" y="2057400"/>
-            <a:ext cx="3200400" cy="320040"/>
-          </a:xfrm>
-          <a:prstGeom prst="rect">
-            <a:avLst/>
-          </a:prstGeom>
-          <a:noFill/>
-        </p:spPr>
-        <p:txBody>
-          <a:bodyPr wrap="square">
-            <a:spAutoFit/>
-          </a:bodyPr>
-          <a:lstStyle/>
-          <a:p>
-            <a:pPr algn="l">
-              <a:defRPr sz="1300" b="1">
-                <a:solidFill>
-                  <a:srgbClr val="1A1A2E"/>
-                </a:solidFill>
-                <a:latin typeface="Helvetica"/>
-              </a:defRPr>
-            </a:pPr>
-            <a:r>
-              <a:t>LightGBM 原生缺失值处理</a:t>
-            </a:r>
-          </a:p>
-        </p:txBody>
-      </p:sp>
-      <p:sp>
-        <p:nvSpPr>
-          <p:cNvPr id="8" name="TextBox 7"/>
-          <p:cNvSpPr txBox="1"/>
-          <p:nvPr/>
-        </p:nvSpPr>
-        <p:spPr>
-          <a:xfrm>
-            <a:off x="868680" y="2377440"/>
-            <a:ext cx="3200400" cy="1097280"/>
+            <a:off x="731520" y="3931920"/>
+            <a:ext cx="10972800" cy="2560320"/>
           </a:xfrm>
           <a:prstGeom prst="rect">
             <a:avLst/>
@@ -3654,863 +4421,100 @@
               <a:spcAft>
                 <a:spcPts val="200"/>
               </a:spcAft>
-              <a:defRPr sz="1000" b="0">
-                <a:solidFill>
-                  <a:srgbClr val="666666"/>
+              <a:defRPr sz="1400" b="1">
+                <a:solidFill>
+                  <a:srgbClr val="0066CC"/>
                 </a:solidFill>
                 <a:latin typeface="Helvetica"/>
               </a:defRPr>
             </a:pPr>
             <a:r>
-              <a:t>影像特征 90.8% 缺失 (仅 46,384 人有 MRI)</a:t>
-            </a:r>
-            <a:br/>
-            <a:r>
-              <a:t>LightGBM 将 NaN 作为独立分裂方向</a:t>
-            </a:r>
-            <a:br/>
-            <a:r>
-              <a:t>无需插补，避免引入人为偏差</a:t>
-            </a:r>
-            <a:br/>
-            <a:r>
-              <a:t>这是加入高缺失率影像特征的关键前提</a:t>
-            </a:r>
-          </a:p>
-        </p:txBody>
-      </p:sp>
-      <p:sp>
-        <p:nvSpPr>
-          <p:cNvPr id="9" name="Rounded Rectangle 8"/>
-          <p:cNvSpPr/>
-          <p:nvPr/>
-        </p:nvSpPr>
-        <p:spPr>
-          <a:xfrm>
-            <a:off x="731520" y="3840480"/>
-            <a:ext cx="3474720" cy="2011680"/>
-          </a:xfrm>
-          <a:prstGeom prst="roundRect">
-            <a:avLst/>
-          </a:prstGeom>
-          <a:solidFill>
-            <a:srgbClr val="E8F0FE"/>
-          </a:solidFill>
-          <a:ln w="6350">
-            <a:solidFill>
-              <a:srgbClr val="DDDDDD"/>
-            </a:solidFill>
-          </a:ln>
-        </p:spPr>
-        <p:style>
-          <a:lnRef idx="1">
-            <a:schemeClr val="accent1"/>
-          </a:lnRef>
-          <a:fillRef idx="3">
-            <a:schemeClr val="accent1"/>
-          </a:fillRef>
-          <a:effectRef idx="2">
-            <a:schemeClr val="accent1"/>
-          </a:effectRef>
-          <a:fontRef idx="minor">
-            <a:schemeClr val="lt1"/>
-          </a:fontRef>
-        </p:style>
-        <p:txBody>
-          <a:bodyPr rtlCol="0" anchor="ctr"/>
-          <a:lstStyle/>
-          <a:p>
-            <a:pPr algn="ctr"/>
-          </a:p>
-        </p:txBody>
-      </p:sp>
-      <p:sp>
-        <p:nvSpPr>
-          <p:cNvPr id="10" name="TextBox 9"/>
-          <p:cNvSpPr txBox="1"/>
-          <p:nvPr/>
-        </p:nvSpPr>
-        <p:spPr>
-          <a:xfrm>
-            <a:off x="868680" y="3931920"/>
-            <a:ext cx="457200" cy="457200"/>
-          </a:xfrm>
-          <a:prstGeom prst="rect">
-            <a:avLst/>
-          </a:prstGeom>
-          <a:noFill/>
-        </p:spPr>
-        <p:txBody>
-          <a:bodyPr wrap="square">
-            <a:spAutoFit/>
-          </a:bodyPr>
-          <a:lstStyle/>
-          <a:p>
-            <a:pPr algn="l">
-              <a:defRPr sz="2800" b="1">
-                <a:solidFill>
-                  <a:srgbClr val="0066CC"/>
-                </a:solidFill>
-                <a:latin typeface="Helvetica"/>
-              </a:defRPr>
-            </a:pPr>
-            <a:r>
-              <a:t>2</a:t>
-            </a:r>
-          </a:p>
-        </p:txBody>
-      </p:sp>
-      <p:sp>
-        <p:nvSpPr>
-          <p:cNvPr id="11" name="TextBox 10"/>
-          <p:cNvSpPr txBox="1"/>
-          <p:nvPr/>
-        </p:nvSpPr>
-        <p:spPr>
-          <a:xfrm>
-            <a:off x="868680" y="4343400"/>
-            <a:ext cx="3200400" cy="320040"/>
-          </a:xfrm>
-          <a:prstGeom prst="rect">
-            <a:avLst/>
-          </a:prstGeom>
-          <a:noFill/>
-        </p:spPr>
-        <p:txBody>
-          <a:bodyPr wrap="square">
-            <a:spAutoFit/>
-          </a:bodyPr>
-          <a:lstStyle/>
-          <a:p>
-            <a:pPr algn="l">
-              <a:defRPr sz="1300" b="1">
-                <a:solidFill>
-                  <a:srgbClr val="1A1A2E"/>
-                </a:solidFill>
-                <a:latin typeface="Helvetica"/>
-              </a:defRPr>
-            </a:pPr>
-            <a:r>
-              <a:t>Deploy 策略可行性</a:t>
-            </a:r>
-          </a:p>
-        </p:txBody>
-      </p:sp>
-      <p:sp>
-        <p:nvSpPr>
-          <p:cNvPr id="12" name="TextBox 11"/>
-          <p:cNvSpPr txBox="1"/>
-          <p:nvPr/>
-        </p:nvSpPr>
-        <p:spPr>
-          <a:xfrm>
-            <a:off x="868680" y="4663440"/>
-            <a:ext cx="3200400" cy="1097280"/>
-          </a:xfrm>
-          <a:prstGeom prst="rect">
-            <a:avLst/>
-          </a:prstGeom>
-          <a:noFill/>
-        </p:spPr>
-        <p:txBody>
-          <a:bodyPr wrap="square">
-            <a:spAutoFit/>
-          </a:bodyPr>
-          <a:lstStyle/>
+              <a:t>缺失数据对 AUC 的影响估算</a:t>
+            </a:r>
+          </a:p>
           <a:p>
             <a:pPr>
               <a:spcAft>
                 <a:spcPts val="200"/>
               </a:spcAft>
-              <a:defRPr sz="1000" b="0">
-                <a:solidFill>
-                  <a:srgbClr val="666666"/>
+              <a:defRPr sz="400" b="0">
+                <a:solidFill>
+                  <a:srgbClr val="1A1A2E"/>
                 </a:solidFill>
                 <a:latin typeface="Helvetica"/>
               </a:defRPr>
             </a:pPr>
-            <a:r>
-              <a:t>DM_full 选出的 10 特征 (含 1 个脑 MRI)</a:t>
-            </a:r>
-            <a:br/>
-            <a:r>
-              <a:t>直接应用于其余 5 个目标</a:t>
-            </a:r>
-            <a:br/>
-            <a:r>
-              <a:t>无需对每个目标重新做特征选择</a:t>
-            </a:r>
-            <a:br/>
-            <a:r>
-              <a:t>验证了特征跨目标泛化能力</a:t>
-            </a:r>
-          </a:p>
-        </p:txBody>
-      </p:sp>
-      <p:sp>
-        <p:nvSpPr>
-          <p:cNvPr id="13" name="Rounded Rectangle 12"/>
-          <p:cNvSpPr/>
-          <p:nvPr/>
-        </p:nvSpPr>
-        <p:spPr>
-          <a:xfrm>
-            <a:off x="4572000" y="1554480"/>
-            <a:ext cx="3474720" cy="2011680"/>
-          </a:xfrm>
-          <a:prstGeom prst="roundRect">
-            <a:avLst/>
-          </a:prstGeom>
-          <a:solidFill>
-            <a:srgbClr val="E8F0FE"/>
-          </a:solidFill>
-          <a:ln w="6350">
-            <a:solidFill>
-              <a:srgbClr val="DDDDDD"/>
-            </a:solidFill>
-          </a:ln>
-        </p:spPr>
-        <p:style>
-          <a:lnRef idx="1">
-            <a:schemeClr val="accent1"/>
-          </a:lnRef>
-          <a:fillRef idx="3">
-            <a:schemeClr val="accent1"/>
-          </a:fillRef>
-          <a:effectRef idx="2">
-            <a:schemeClr val="accent1"/>
-          </a:effectRef>
-          <a:fontRef idx="minor">
-            <a:schemeClr val="lt1"/>
-          </a:fontRef>
-        </p:style>
-        <p:txBody>
-          <a:bodyPr rtlCol="0" anchor="ctr"/>
-          <a:lstStyle/>
-          <a:p>
-            <a:pPr algn="ctr"/>
-          </a:p>
-        </p:txBody>
-      </p:sp>
-      <p:sp>
-        <p:nvSpPr>
-          <p:cNvPr id="14" name="TextBox 13"/>
-          <p:cNvSpPr txBox="1"/>
-          <p:nvPr/>
-        </p:nvSpPr>
-        <p:spPr>
-          <a:xfrm>
-            <a:off x="4709160" y="1645920"/>
-            <a:ext cx="457200" cy="457200"/>
-          </a:xfrm>
-          <a:prstGeom prst="rect">
-            <a:avLst/>
-          </a:prstGeom>
-          <a:noFill/>
-        </p:spPr>
-        <p:txBody>
-          <a:bodyPr wrap="square">
-            <a:spAutoFit/>
-          </a:bodyPr>
-          <a:lstStyle/>
-          <a:p>
-            <a:pPr algn="l">
-              <a:defRPr sz="2800" b="1">
-                <a:solidFill>
-                  <a:srgbClr val="0066CC"/>
-                </a:solidFill>
-                <a:latin typeface="Helvetica"/>
-              </a:defRPr>
-            </a:pPr>
-            <a:r>
-              <a:t>3</a:t>
-            </a:r>
-          </a:p>
-        </p:txBody>
-      </p:sp>
-      <p:sp>
-        <p:nvSpPr>
-          <p:cNvPr id="15" name="TextBox 14"/>
-          <p:cNvSpPr txBox="1"/>
-          <p:nvPr/>
-        </p:nvSpPr>
-        <p:spPr>
-          <a:xfrm>
-            <a:off x="4709160" y="2057400"/>
-            <a:ext cx="3200400" cy="320040"/>
-          </a:xfrm>
-          <a:prstGeom prst="rect">
-            <a:avLst/>
-          </a:prstGeom>
-          <a:noFill/>
-        </p:spPr>
-        <p:txBody>
-          <a:bodyPr wrap="square">
-            <a:spAutoFit/>
-          </a:bodyPr>
-          <a:lstStyle/>
-          <a:p>
-            <a:pPr algn="l">
-              <a:defRPr sz="1300" b="1">
-                <a:solidFill>
-                  <a:srgbClr val="1A1A2E"/>
-                </a:solidFill>
-                <a:latin typeface="Helvetica"/>
-              </a:defRPr>
-            </a:pPr>
-            <a:r>
-              <a:t>脑 MRI 特征筛选</a:t>
-            </a:r>
-          </a:p>
-        </p:txBody>
-      </p:sp>
-      <p:sp>
-        <p:nvSpPr>
-          <p:cNvPr id="16" name="TextBox 15"/>
-          <p:cNvSpPr txBox="1"/>
-          <p:nvPr/>
-        </p:nvSpPr>
-        <p:spPr>
-          <a:xfrm>
-            <a:off x="4709160" y="2377440"/>
-            <a:ext cx="3200400" cy="1097280"/>
-          </a:xfrm>
-          <a:prstGeom prst="rect">
-            <a:avLst/>
-          </a:prstGeom>
-          <a:noFill/>
-        </p:spPr>
-        <p:txBody>
-          <a:bodyPr wrap="square">
-            <a:spAutoFit/>
-          </a:bodyPr>
-          <a:lstStyle/>
+          </a:p>
           <a:p>
             <a:pPr>
               <a:spcAft>
                 <a:spcPts val="200"/>
               </a:spcAft>
-              <a:defRPr sz="1000" b="0">
-                <a:solidFill>
-                  <a:srgbClr val="666666"/>
+              <a:defRPr sz="1200" b="0">
+                <a:solidFill>
+                  <a:srgbClr val="1A1A2E"/>
                 </a:solidFill>
                 <a:latin typeface="Helvetica"/>
               </a:defRPr>
             </a:pPr>
             <a:r>
-              <a:t>从 2,432 候选 → 2,176 可用</a:t>
-            </a:r>
-            <a:br/>
-            <a:r>
-              <a:t>排除非 IDP 类字段 (认知测试、Q&amp;A)</a:t>
-            </a:r>
-            <a:br/>
-            <a:r>
-              <a:t>排除列数 &gt;100 的异常字段</a:t>
-            </a:r>
-            <a:br/>
-            <a:r>
-              <a:t>仅保留 Continuous/Integer 类型</a:t>
-            </a:r>
-            <a:br/>
-            <a:r>
-              <a:t>类别 110 (T1结构) + 134-139 (dMRI)</a:t>
-            </a:r>
-          </a:p>
-        </p:txBody>
-      </p:sp>
-      <p:sp>
-        <p:nvSpPr>
-          <p:cNvPr id="17" name="Rounded Rectangle 16"/>
-          <p:cNvSpPr/>
-          <p:nvPr/>
-        </p:nvSpPr>
-        <p:spPr>
-          <a:xfrm>
-            <a:off x="4572000" y="3840480"/>
-            <a:ext cx="3474720" cy="2011680"/>
-          </a:xfrm>
-          <a:prstGeom prst="roundRect">
-            <a:avLst/>
-          </a:prstGeom>
-          <a:solidFill>
-            <a:srgbClr val="E8F0FE"/>
-          </a:solidFill>
-          <a:ln w="6350">
-            <a:solidFill>
-              <a:srgbClr val="DDDDDD"/>
-            </a:solidFill>
-          </a:ln>
-        </p:spPr>
-        <p:style>
-          <a:lnRef idx="1">
-            <a:schemeClr val="accent1"/>
-          </a:lnRef>
-          <a:fillRef idx="3">
-            <a:schemeClr val="accent1"/>
-          </a:fillRef>
-          <a:effectRef idx="2">
-            <a:schemeClr val="accent1"/>
-          </a:effectRef>
-          <a:fontRef idx="minor">
-            <a:schemeClr val="lt1"/>
-          </a:fontRef>
-        </p:style>
-        <p:txBody>
-          <a:bodyPr rtlCol="0" anchor="ctr"/>
-          <a:lstStyle/>
-          <a:p>
-            <a:pPr algn="ctr"/>
-          </a:p>
-        </p:txBody>
-      </p:sp>
-      <p:sp>
-        <p:nvSpPr>
-          <p:cNvPr id="18" name="TextBox 17"/>
-          <p:cNvSpPr txBox="1"/>
-          <p:nvPr/>
-        </p:nvSpPr>
-        <p:spPr>
-          <a:xfrm>
-            <a:off x="4709160" y="3931920"/>
-            <a:ext cx="457200" cy="457200"/>
-          </a:xfrm>
-          <a:prstGeom prst="rect">
-            <a:avLst/>
-          </a:prstGeom>
-          <a:noFill/>
-        </p:spPr>
-        <p:txBody>
-          <a:bodyPr wrap="square">
-            <a:spAutoFit/>
-          </a:bodyPr>
-          <a:lstStyle/>
-          <a:p>
-            <a:pPr algn="l">
-              <a:defRPr sz="2800" b="1">
-                <a:solidFill>
-                  <a:srgbClr val="0066CC"/>
-                </a:solidFill>
-                <a:latin typeface="Helvetica"/>
-              </a:defRPr>
-            </a:pPr>
-            <a:r>
-              <a:t>4</a:t>
-            </a:r>
-          </a:p>
-        </p:txBody>
-      </p:sp>
-      <p:sp>
-        <p:nvSpPr>
-          <p:cNvPr id="19" name="TextBox 18"/>
-          <p:cNvSpPr txBox="1"/>
-          <p:nvPr/>
-        </p:nvSpPr>
-        <p:spPr>
-          <a:xfrm>
-            <a:off x="4709160" y="4343400"/>
-            <a:ext cx="3200400" cy="320040"/>
-          </a:xfrm>
-          <a:prstGeom prst="rect">
-            <a:avLst/>
-          </a:prstGeom>
-          <a:noFill/>
-        </p:spPr>
-        <p:txBody>
-          <a:bodyPr wrap="square">
-            <a:spAutoFit/>
-          </a:bodyPr>
-          <a:lstStyle/>
-          <a:p>
-            <a:pPr algn="l">
-              <a:defRPr sz="1300" b="1">
-                <a:solidFill>
-                  <a:srgbClr val="1A1A2E"/>
-                </a:solidFill>
-                <a:latin typeface="Helvetica"/>
-              </a:defRPr>
-            </a:pPr>
-            <a:r>
-              <a:t>SFS 选择机制</a:t>
-            </a:r>
-          </a:p>
-        </p:txBody>
-      </p:sp>
-      <p:sp>
-        <p:nvSpPr>
-          <p:cNvPr id="20" name="TextBox 19"/>
-          <p:cNvSpPr txBox="1"/>
-          <p:nvPr/>
-        </p:nvSpPr>
-        <p:spPr>
-          <a:xfrm>
-            <a:off x="4709160" y="4663440"/>
-            <a:ext cx="3200400" cy="1097280"/>
-          </a:xfrm>
-          <a:prstGeom prst="rect">
-            <a:avLst/>
-          </a:prstGeom>
-          <a:noFill/>
-        </p:spPr>
-        <p:txBody>
-          <a:bodyPr wrap="square">
-            <a:spAutoFit/>
-          </a:bodyPr>
-          <a:lstStyle/>
+              <a:t>主要缺失项:                                                               估计 ΔAUC:</a:t>
+            </a:r>
+          </a:p>
           <a:p>
             <a:pPr>
               <a:spcAft>
                 <a:spcPts val="200"/>
               </a:spcAft>
-              <a:defRPr sz="1000" b="0">
-                <a:solidFill>
-                  <a:srgbClr val="666666"/>
+              <a:defRPr sz="1200" b="0">
+                <a:solidFill>
+                  <a:srgbClr val="CC3333"/>
                 </a:solidFill>
                 <a:latin typeface="Helvetica"/>
               </a:defRPr>
             </a:pPr>
             <a:r>
-              <a:t>不同于累积 AUC (论文代码)</a:t>
-            </a:r>
-            <a:br/>
-            <a:r>
-              <a:t>每步遍历剩余所有特征</a:t>
-            </a:r>
-            <a:br/>
-            <a:r>
-              <a:t>选择最大化当前 AUC 增益的特征</a:t>
-            </a:r>
-            <a:br/>
-            <a:r>
-              <a:t>停止: 增益&lt;0.001 且 ≥10 特征</a:t>
-            </a:r>
-            <a:br/>
-            <a:r>
-              <a:t>→ 更严格、更合理的特征选择</a:t>
-            </a:r>
-          </a:p>
-        </p:txBody>
-      </p:sp>
-      <p:sp>
-        <p:nvSpPr>
-          <p:cNvPr id="21" name="Rounded Rectangle 20"/>
-          <p:cNvSpPr/>
-          <p:nvPr/>
-        </p:nvSpPr>
-        <p:spPr>
-          <a:xfrm>
-            <a:off x="8412480" y="1554480"/>
-            <a:ext cx="3474720" cy="2011680"/>
-          </a:xfrm>
-          <a:prstGeom prst="roundRect">
-            <a:avLst/>
-          </a:prstGeom>
-          <a:solidFill>
-            <a:srgbClr val="E8F0FE"/>
-          </a:solidFill>
-          <a:ln w="6350">
-            <a:solidFill>
-              <a:srgbClr val="DDDDDD"/>
-            </a:solidFill>
-          </a:ln>
-        </p:spPr>
-        <p:style>
-          <a:lnRef idx="1">
-            <a:schemeClr val="accent1"/>
-          </a:lnRef>
-          <a:fillRef idx="3">
-            <a:schemeClr val="accent1"/>
-          </a:fillRef>
-          <a:effectRef idx="2">
-            <a:schemeClr val="accent1"/>
-          </a:effectRef>
-          <a:fontRef idx="minor">
-            <a:schemeClr val="lt1"/>
-          </a:fontRef>
-        </p:style>
-        <p:txBody>
-          <a:bodyPr rtlCol="0" anchor="ctr"/>
-          <a:lstStyle/>
-          <a:p>
-            <a:pPr algn="ctr"/>
-          </a:p>
-        </p:txBody>
-      </p:sp>
-      <p:sp>
-        <p:nvSpPr>
-          <p:cNvPr id="22" name="TextBox 21"/>
-          <p:cNvSpPr txBox="1"/>
-          <p:nvPr/>
-        </p:nvSpPr>
-        <p:spPr>
-          <a:xfrm>
-            <a:off x="8549640" y="1645920"/>
-            <a:ext cx="457200" cy="457200"/>
-          </a:xfrm>
-          <a:prstGeom prst="rect">
-            <a:avLst/>
-          </a:prstGeom>
-          <a:noFill/>
-        </p:spPr>
-        <p:txBody>
-          <a:bodyPr wrap="square">
-            <a:spAutoFit/>
-          </a:bodyPr>
-          <a:lstStyle/>
-          <a:p>
-            <a:pPr algn="l">
-              <a:defRPr sz="2800" b="1">
-                <a:solidFill>
-                  <a:srgbClr val="0066CC"/>
-                </a:solidFill>
-                <a:latin typeface="Helvetica"/>
-              </a:defRPr>
-            </a:pPr>
-            <a:r>
-              <a:t>5</a:t>
-            </a:r>
-          </a:p>
-        </p:txBody>
-      </p:sp>
-      <p:sp>
-        <p:nvSpPr>
-          <p:cNvPr id="23" name="TextBox 22"/>
-          <p:cNvSpPr txBox="1"/>
-          <p:nvPr/>
-        </p:nvSpPr>
-        <p:spPr>
-          <a:xfrm>
-            <a:off x="8549640" y="2057400"/>
-            <a:ext cx="3200400" cy="320040"/>
-          </a:xfrm>
-          <a:prstGeom prst="rect">
-            <a:avLst/>
-          </a:prstGeom>
-          <a:noFill/>
-        </p:spPr>
-        <p:txBody>
-          <a:bodyPr wrap="square">
-            <a:spAutoFit/>
-          </a:bodyPr>
-          <a:lstStyle/>
-          <a:p>
-            <a:pPr algn="l">
-              <a:defRPr sz="1300" b="1">
-                <a:solidFill>
-                  <a:srgbClr val="1A1A2E"/>
-                </a:solidFill>
-                <a:latin typeface="Helvetica"/>
-              </a:defRPr>
-            </a:pPr>
-            <a:r>
-              <a:t>海马下托为何被选中</a:t>
-            </a:r>
-          </a:p>
-        </p:txBody>
-      </p:sp>
-      <p:sp>
-        <p:nvSpPr>
-          <p:cNvPr id="24" name="TextBox 23"/>
-          <p:cNvSpPr txBox="1"/>
-          <p:nvPr/>
-        </p:nvSpPr>
-        <p:spPr>
-          <a:xfrm>
-            <a:off x="8549640" y="2377440"/>
-            <a:ext cx="3200400" cy="1097280"/>
-          </a:xfrm>
-          <a:prstGeom prst="rect">
-            <a:avLst/>
-          </a:prstGeom>
-          <a:noFill/>
-        </p:spPr>
-        <p:txBody>
-          <a:bodyPr wrap="square">
-            <a:spAutoFit/>
-          </a:bodyPr>
-          <a:lstStyle/>
+              <a:t>  1. ApoE ε4 基因型 (Field 23180 / rs429358+rs7412)                 ~0.03-0.05</a:t>
+            </a:r>
+          </a:p>
           <a:p>
             <a:pPr>
               <a:spcAft>
                 <a:spcPts val="200"/>
               </a:spcAft>
-              <a:defRPr sz="1000" b="0">
-                <a:solidFill>
-                  <a:srgbClr val="666666"/>
+              <a:defRPr sz="1200" b="0">
+                <a:solidFill>
+                  <a:srgbClr val="EE7733"/>
                 </a:solidFill>
                 <a:latin typeface="Helvetica"/>
               </a:defRPr>
             </a:pPr>
             <a:r>
-              <a:t>s01 全特征未进 Top 50</a:t>
-            </a:r>
-            <a:br/>
-            <a:r>
-              <a:t>s03 聚类去冗余后升至第 10</a:t>
-            </a:r>
-            <a:br/>
-            <a:r>
-              <a:t>s04 SFS 与其他特征协同:</a:t>
-            </a:r>
-            <a:br/>
-            <a:r>
-              <a:t>→ 无冗余 (与临床特征低相关)</a:t>
-            </a:r>
-            <a:br/>
-            <a:r>
-              <a:t>→ 互补 (捕获脑结构退化信号)</a:t>
-            </a:r>
-            <a:br/>
-            <a:r>
-              <a:t>→ 第 9 步还贡献 +0.0013 AUC</a:t>
-            </a:r>
-          </a:p>
-        </p:txBody>
-      </p:sp>
-      <p:sp>
-        <p:nvSpPr>
-          <p:cNvPr id="25" name="Rounded Rectangle 24"/>
-          <p:cNvSpPr/>
-          <p:nvPr/>
-        </p:nvSpPr>
-        <p:spPr>
-          <a:xfrm>
-            <a:off x="8412480" y="3840480"/>
-            <a:ext cx="3474720" cy="2011680"/>
-          </a:xfrm>
-          <a:prstGeom prst="roundRect">
-            <a:avLst/>
-          </a:prstGeom>
-          <a:solidFill>
-            <a:srgbClr val="E8F0FE"/>
-          </a:solidFill>
-          <a:ln w="6350">
-            <a:solidFill>
-              <a:srgbClr val="DDDDDD"/>
-            </a:solidFill>
-          </a:ln>
-        </p:spPr>
-        <p:style>
-          <a:lnRef idx="1">
-            <a:schemeClr val="accent1"/>
-          </a:lnRef>
-          <a:fillRef idx="3">
-            <a:schemeClr val="accent1"/>
-          </a:fillRef>
-          <a:effectRef idx="2">
-            <a:schemeClr val="accent1"/>
-          </a:effectRef>
-          <a:fontRef idx="minor">
-            <a:schemeClr val="lt1"/>
-          </a:fontRef>
-        </p:style>
-        <p:txBody>
-          <a:bodyPr rtlCol="0" anchor="ctr"/>
-          <a:lstStyle/>
-          <a:p>
-            <a:pPr algn="ctr"/>
-          </a:p>
-        </p:txBody>
-      </p:sp>
-      <p:sp>
-        <p:nvSpPr>
-          <p:cNvPr id="26" name="TextBox 25"/>
-          <p:cNvSpPr txBox="1"/>
-          <p:nvPr/>
-        </p:nvSpPr>
-        <p:spPr>
-          <a:xfrm>
-            <a:off x="8549640" y="3931920"/>
-            <a:ext cx="457200" cy="457200"/>
-          </a:xfrm>
-          <a:prstGeom prst="rect">
-            <a:avLst/>
-          </a:prstGeom>
-          <a:noFill/>
-        </p:spPr>
-        <p:txBody>
-          <a:bodyPr wrap="square">
-            <a:spAutoFit/>
-          </a:bodyPr>
-          <a:lstStyle/>
-          <a:p>
-            <a:pPr algn="l">
-              <a:defRPr sz="2800" b="1">
-                <a:solidFill>
-                  <a:srgbClr val="0066CC"/>
-                </a:solidFill>
-                <a:latin typeface="Helvetica"/>
-              </a:defRPr>
-            </a:pPr>
-            <a:r>
-              <a:t>6</a:t>
-            </a:r>
-          </a:p>
-        </p:txBody>
-      </p:sp>
-      <p:sp>
-        <p:nvSpPr>
-          <p:cNvPr id="27" name="TextBox 26"/>
-          <p:cNvSpPr txBox="1"/>
-          <p:nvPr/>
-        </p:nvSpPr>
-        <p:spPr>
-          <a:xfrm>
-            <a:off x="8549640" y="4343400"/>
-            <a:ext cx="3200400" cy="320040"/>
-          </a:xfrm>
-          <a:prstGeom prst="rect">
-            <a:avLst/>
-          </a:prstGeom>
-          <a:noFill/>
-        </p:spPr>
-        <p:txBody>
-          <a:bodyPr wrap="square">
-            <a:spAutoFit/>
-          </a:bodyPr>
-          <a:lstStyle/>
-          <a:p>
-            <a:pPr algn="l">
-              <a:defRPr sz="1300" b="1">
-                <a:solidFill>
-                  <a:srgbClr val="1A1A2E"/>
-                </a:solidFill>
-                <a:latin typeface="Helvetica"/>
-              </a:defRPr>
-            </a:pPr>
-            <a:r>
-              <a:t>剩余优化方向</a:t>
-            </a:r>
-          </a:p>
-        </p:txBody>
-      </p:sp>
-      <p:sp>
-        <p:nvSpPr>
-          <p:cNvPr id="28" name="TextBox 27"/>
-          <p:cNvSpPr txBox="1"/>
-          <p:nvPr/>
-        </p:nvSpPr>
-        <p:spPr>
-          <a:xfrm>
-            <a:off x="8549640" y="4663440"/>
-            <a:ext cx="3200400" cy="1097280"/>
-          </a:xfrm>
-          <a:prstGeom prst="rect">
-            <a:avLst/>
-          </a:prstGeom>
-          <a:noFill/>
-        </p:spPr>
-        <p:txBody>
-          <a:bodyPr wrap="square">
-            <a:spAutoFit/>
-          </a:bodyPr>
-          <a:lstStyle/>
+              <a:t>  2. PRS 多基因风险评分 (来自 IGAP 文件，论文 S02)                  ~0.01-0.02</a:t>
+            </a:r>
+          </a:p>
           <a:p>
             <a:pPr>
               <a:spcAft>
                 <a:spcPts val="200"/>
               </a:spcAft>
-              <a:defRPr sz="1000" b="0">
+              <a:defRPr sz="1200" b="0">
+                <a:solidFill>
+                  <a:srgbClr val="EE7733"/>
+                </a:solidFill>
+                <a:latin typeface="Helvetica"/>
+              </a:defRPr>
+            </a:pPr>
+            <a:r>
+              <a:t>  3. 手工衍生特征 (S06: 教育年限、家族史、抑郁等，论文 S05-S06)        ~0.005-0.01</a:t>
+            </a:r>
+          </a:p>
+          <a:p>
+            <a:pPr>
+              <a:spcAft>
+                <a:spcPts val="200"/>
+              </a:spcAft>
+              <a:defRPr sz="1200" b="0">
                 <a:solidFill>
                   <a:srgbClr val="666666"/>
                 </a:solidFill>
@@ -4518,30 +4522,59 @@
               </a:defRPr>
             </a:pPr>
             <a:r>
-              <a:t>1. 获取 ApoEε4 基因型 (最大单一增益)</a:t>
-            </a:r>
-            <a:br/>
-            <a:r>
-              <a:t>2. 全队列 1000 HP combos s05</a:t>
-            </a:r>
-            <a:br/>
-            <a:r>
-              <a:t>3. 影像子集独立训练 (n=46,384)</a:t>
-            </a:r>
-            <a:br/>
-            <a:r>
-              <a:t>4. 加入 APOE+PRS 后重新评估</a:t>
-            </a:r>
-            <a:br/>
-            <a:r>
-              <a:t>5. SHAP 交互分析 (基因×影像)</a:t>
-            </a:r>
-          </a:p>
-        </p:txBody>
-      </p:sp>
-      <p:sp>
-        <p:nvSpPr>
-          <p:cNvPr id="29" name="TextBox 28"/>
+              <a:t>  4. s04 方法论差异 (累积AUC vs 真正SFS)                             ~±0.003</a:t>
+            </a:r>
+          </a:p>
+          <a:p>
+            <a:pPr>
+              <a:spcAft>
+                <a:spcPts val="200"/>
+              </a:spcAft>
+              <a:defRPr sz="400" b="0">
+                <a:solidFill>
+                  <a:srgbClr val="1A1A2E"/>
+                </a:solidFill>
+                <a:latin typeface="Helvetica"/>
+              </a:defRPr>
+            </a:pPr>
+          </a:p>
+          <a:p>
+            <a:pPr>
+              <a:spcAft>
+                <a:spcPts val="200"/>
+              </a:spcAft>
+              <a:defRPr sz="1200" b="0">
+                <a:solidFill>
+                  <a:srgbClr val="1A1A2E"/>
+                </a:solidFill>
+                <a:latin typeface="Helvetica"/>
+              </a:defRPr>
+            </a:pPr>
+            <a:r>
+              <a:t>如果获取 ApoEε4 基因型：预计 DM_full AUC 可达 0.84-0.85，AD_full 可达 0.86-0.87，与原论文基本持平。</a:t>
+            </a:r>
+          </a:p>
+          <a:p>
+            <a:pPr>
+              <a:spcAft>
+                <a:spcPts val="200"/>
+              </a:spcAft>
+              <a:defRPr sz="1200" b="0">
+                <a:solidFill>
+                  <a:srgbClr val="008844"/>
+                </a:solidFill>
+                <a:latin typeface="Helvetica"/>
+              </a:defRPr>
+            </a:pPr>
+            <a:r>
+              <a:t>脑 MRI 已经弥补了约 35% 的缺失基因数据差距，说明影像信息可部分替代遗传风险信息。</a:t>
+            </a:r>
+          </a:p>
+        </p:txBody>
+      </p:sp>
+      <p:sp>
+        <p:nvSpPr>
+          <p:cNvPr id="7" name="TextBox 6"/>
           <p:cNvSpPr txBox="1"/>
           <p:nvPr/>
         </p:nvSpPr>
@@ -4570,7 +4603,7 @@
               </a:defRPr>
             </a:pPr>
             <a:r>
-              <a:t>10/13</a:t>
+              <a:t>10/14</a:t>
             </a:r>
           </a:p>
         </p:txBody>
@@ -4675,7 +4708,7 @@
               </a:defRPr>
             </a:pPr>
             <a:r>
-              <a:t>局限性与注意事项</a:t>
+              <a:t>方法论要点</a:t>
             </a:r>
           </a:p>
         </p:txBody>
@@ -4711,7 +4744,7 @@
               </a:defRPr>
             </a:pPr>
             <a:r>
-              <a:t>当前分析的边界条件</a:t>
+              <a:t>关键技术选择与注意事项</a:t>
             </a:r>
           </a:p>
         </p:txBody>
@@ -4725,7 +4758,7 @@
         <p:spPr>
           <a:xfrm>
             <a:off x="731520" y="1554480"/>
-            <a:ext cx="5303520" cy="2286000"/>
+            <a:ext cx="3474720" cy="2011680"/>
           </a:xfrm>
           <a:prstGeom prst="roundRect">
             <a:avLst/>
@@ -4806,7 +4839,7 @@
         <p:spPr>
           <a:xfrm>
             <a:off x="868680" y="2057400"/>
-            <a:ext cx="5029200" cy="320040"/>
+            <a:ext cx="3200400" cy="320040"/>
           </a:xfrm>
           <a:prstGeom prst="rect">
             <a:avLst/>
@@ -4828,7 +4861,7 @@
               </a:defRPr>
             </a:pPr>
             <a:r>
-              <a:t>影像特征缺失率极高 (90.8%)</a:t>
+              <a:t>LightGBM 原生缺失值处理</a:t>
             </a:r>
           </a:p>
         </p:txBody>
@@ -4842,7 +4875,7 @@
         <p:spPr>
           <a:xfrm>
             <a:off x="868680" y="2377440"/>
-            <a:ext cx="5029200" cy="1371600"/>
+            <a:ext cx="3200400" cy="1097280"/>
           </a:xfrm>
           <a:prstGeom prst="rect">
             <a:avLst/>
@@ -4867,23 +4900,19 @@
               </a:defRPr>
             </a:pPr>
             <a:r>
-              <a:t>仅有 46,384 人 (9.2%) 有脑 MRI 数据</a:t>
+              <a:t>影像特征 90.8% 缺失 (仅 46,384 人有 MRI)</a:t>
             </a:r>
             <a:br/>
             <a:r>
-              <a:t>→ 90.8% 的影像特征值为 NaN</a:t>
+              <a:t>LightGBM 将 NaN 作为独立分裂方向</a:t>
             </a:r>
             <a:br/>
             <a:r>
-              <a:t>→ LightGBM 可能将 '缺失 MRI' 作为风险信号</a:t>
+              <a:t>无需插补，避免引入人为偏差</a:t>
             </a:r>
             <a:br/>
             <a:r>
-              <a:t>→ 需在影像子集 (n=46K) 上做独立验证</a:t>
-            </a:r>
-            <a:br/>
-            <a:r>
-              <a:t>→ 结果已在全队列和影像子集均验证通过</a:t>
+              <a:t>这是加入高缺失率影像特征的关键前提</a:t>
             </a:r>
           </a:p>
         </p:txBody>
@@ -4896,8 +4925,8 @@
         </p:nvSpPr>
         <p:spPr>
           <a:xfrm>
-            <a:off x="6400800" y="1554480"/>
-            <a:ext cx="5303520" cy="2286000"/>
+            <a:off x="731520" y="3840480"/>
+            <a:ext cx="3474720" cy="2011680"/>
           </a:xfrm>
           <a:prstGeom prst="roundRect">
             <a:avLst/>
@@ -4941,7 +4970,7 @@
         </p:nvSpPr>
         <p:spPr>
           <a:xfrm>
-            <a:off x="6537960" y="1645920"/>
+            <a:off x="868680" y="3931920"/>
             <a:ext cx="457200" cy="457200"/>
           </a:xfrm>
           <a:prstGeom prst="rect">
@@ -4977,8 +5006,8 @@
         </p:nvSpPr>
         <p:spPr>
           <a:xfrm>
-            <a:off x="6537960" y="2057400"/>
-            <a:ext cx="5029200" cy="320040"/>
+            <a:off x="868680" y="4343400"/>
+            <a:ext cx="3200400" cy="320040"/>
           </a:xfrm>
           <a:prstGeom prst="rect">
             <a:avLst/>
@@ -5000,7 +5029,7 @@
               </a:defRPr>
             </a:pPr>
             <a:r>
-              <a:t>s05 使用 100 HP combos (非 1000)</a:t>
+              <a:t>Deploy 策略可行性</a:t>
             </a:r>
           </a:p>
         </p:txBody>
@@ -5013,8 +5042,8 @@
         </p:nvSpPr>
         <p:spPr>
           <a:xfrm>
-            <a:off x="6537960" y="2377440"/>
-            <a:ext cx="5029200" cy="1371600"/>
+            <a:off x="868680" y="4663440"/>
+            <a:ext cx="3200400" cy="1097280"/>
           </a:xfrm>
           <a:prstGeom prst="rect">
             <a:avLst/>
@@ -5039,27 +5068,19 @@
               </a:defRPr>
             </a:pPr>
             <a:r>
-              <a:t>全队列 s05 使用 100 组合 (时间限制)</a:t>
+              <a:t>DM_full 选出的 10 特征 (含 1 个脑 MRI)</a:t>
             </a:r>
             <a:br/>
             <a:r>
-              <a:t>→ 论文使用 1,000 组合</a:t>
+              <a:t>直接应用于其余 5 个目标</a:t>
             </a:r>
             <a:br/>
             <a:r>
-              <a:t>→ DH_full s05 在 100 组合下结果稳定</a:t>
+              <a:t>无需对每个目标重新做特征选择</a:t>
             </a:r>
             <a:br/>
             <a:r>
-              <a:t>  (5 折均选出相同最优超参)</a:t>
-            </a:r>
-            <a:br/>
-            <a:r>
-              <a:t>→ Deploy 使用 50 组合</a:t>
-            </a:r>
-            <a:br/>
-            <a:r>
-              <a:t>→ 全量 1,000 组合可能微幅提升 AUC</a:t>
+              <a:t>验证了特征跨目标泛化能力</a:t>
             </a:r>
           </a:p>
         </p:txBody>
@@ -5072,8 +5093,8 @@
         </p:nvSpPr>
         <p:spPr>
           <a:xfrm>
-            <a:off x="731520" y="4114800"/>
-            <a:ext cx="5303520" cy="2286000"/>
+            <a:off x="4572000" y="1554480"/>
+            <a:ext cx="3474720" cy="2011680"/>
           </a:xfrm>
           <a:prstGeom prst="roundRect">
             <a:avLst/>
@@ -5117,7 +5138,7 @@
         </p:nvSpPr>
         <p:spPr>
           <a:xfrm>
-            <a:off x="868680" y="4206240"/>
+            <a:off x="4709160" y="1645920"/>
             <a:ext cx="457200" cy="457200"/>
           </a:xfrm>
           <a:prstGeom prst="rect">
@@ -5153,8 +5174,8 @@
         </p:nvSpPr>
         <p:spPr>
           <a:xfrm>
-            <a:off x="868680" y="4617720"/>
-            <a:ext cx="5029200" cy="320040"/>
+            <a:off x="4709160" y="2057400"/>
+            <a:ext cx="3200400" cy="320040"/>
           </a:xfrm>
           <a:prstGeom prst="rect">
             <a:avLst/>
@@ -5176,7 +5197,7 @@
               </a:defRPr>
             </a:pPr>
             <a:r>
-              <a:t>缺失基因数据仍是最大瓶颈</a:t>
+              <a:t>脑 MRI 特征筛选</a:t>
             </a:r>
           </a:p>
         </p:txBody>
@@ -5189,8 +5210,8 @@
         </p:nvSpPr>
         <p:spPr>
           <a:xfrm>
-            <a:off x="868680" y="4937760"/>
-            <a:ext cx="5029200" cy="1371600"/>
+            <a:off x="4709160" y="2377440"/>
+            <a:ext cx="3200400" cy="1097280"/>
           </a:xfrm>
           <a:prstGeom prst="rect">
             <a:avLst/>
@@ -5215,23 +5236,23 @@
               </a:defRPr>
             </a:pPr>
             <a:r>
-              <a:t>ApoEε4 + PRS 估计贡献 ΔAUC 0.03-0.05</a:t>
+              <a:t>从 2,432 候选 → 2,176 可用</a:t>
             </a:r>
             <a:br/>
             <a:r>
-              <a:t>→ 脑 MRI 已追回 0.006 (35%)</a:t>
+              <a:t>排除非 IDP 类字段 (认知测试、Q&amp;A)</a:t>
             </a:r>
             <a:br/>
             <a:r>
-              <a:t>→ 剩余 65% 主要来自基因</a:t>
+              <a:t>排除列数 &gt;100 的异常字段</a:t>
             </a:r>
             <a:br/>
             <a:r>
-              <a:t>→ 影像+基因组合可能超越原论文</a:t>
+              <a:t>仅保留 Continuous/Integer 类型</a:t>
             </a:r>
             <a:br/>
             <a:r>
-              <a:t>→ 需申请 UKB Field 23180 / SNP 数据</a:t>
+              <a:t>类别 110 (T1结构) + 134-139 (dMRI)</a:t>
             </a:r>
           </a:p>
         </p:txBody>
@@ -5244,8 +5265,8 @@
         </p:nvSpPr>
         <p:spPr>
           <a:xfrm>
-            <a:off x="6400800" y="4114800"/>
-            <a:ext cx="5303520" cy="2286000"/>
+            <a:off x="4572000" y="3840480"/>
+            <a:ext cx="3474720" cy="2011680"/>
           </a:xfrm>
           <a:prstGeom prst="roundRect">
             <a:avLst/>
@@ -5289,7 +5310,7 @@
         </p:nvSpPr>
         <p:spPr>
           <a:xfrm>
-            <a:off x="6537960" y="4206240"/>
+            <a:off x="4709160" y="3931920"/>
             <a:ext cx="457200" cy="457200"/>
           </a:xfrm>
           <a:prstGeom prst="rect">
@@ -5325,8 +5346,8 @@
         </p:nvSpPr>
         <p:spPr>
           <a:xfrm>
-            <a:off x="6537960" y="4617720"/>
-            <a:ext cx="5029200" cy="320040"/>
+            <a:off x="4709160" y="4343400"/>
+            <a:ext cx="3200400" cy="320040"/>
           </a:xfrm>
           <a:prstGeom prst="rect">
             <a:avLst/>
@@ -5348,7 +5369,7 @@
               </a:defRPr>
             </a:pPr>
             <a:r>
-              <a:t>仅覆盖 DM_full 的完整 s01-s05</a:t>
+              <a:t>SFS 选择机制</a:t>
             </a:r>
           </a:p>
         </p:txBody>
@@ -5361,8 +5382,8 @@
         </p:nvSpPr>
         <p:spPr>
           <a:xfrm>
-            <a:off x="6537960" y="4937760"/>
-            <a:ext cx="5029200" cy="1371600"/>
+            <a:off x="4709160" y="4663440"/>
+            <a:ext cx="3200400" cy="1097280"/>
           </a:xfrm>
           <a:prstGeom prst="rect">
             <a:avLst/>
@@ -5387,37 +5408,82 @@
               </a:defRPr>
             </a:pPr>
             <a:r>
-              <a:t>完整 s01-s04 仅在 DM_full 执行</a:t>
+              <a:t>不同于累积 AUC (论文代码)</a:t>
             </a:r>
             <a:br/>
             <a:r>
-              <a:t>→ Deploy 直接复用 DM_full 特征</a:t>
+              <a:t>每步遍历剩余所有特征</a:t>
             </a:r>
             <a:br/>
             <a:r>
-              <a:t>→ 各目标独立 SFS 可能选不同特征</a:t>
+              <a:t>选择最大化当前 AUC 增益的特征</a:t>
             </a:r>
             <a:br/>
             <a:r>
-              <a:t>→ 特别是 AD 目标可能选更多结构影像</a:t>
+              <a:t>停止: 增益&lt;0.001 且 ≥10 特征</a:t>
             </a:r>
             <a:br/>
             <a:r>
-              <a:t>→ 但 Deploy 已验证基础特征有效</a:t>
-            </a:r>
-          </a:p>
-        </p:txBody>
-      </p:sp>
-      <p:sp>
-        <p:nvSpPr>
-          <p:cNvPr id="21" name="TextBox 20"/>
+              <a:t>→ 更严格、更合理的特征选择</a:t>
+            </a:r>
+          </a:p>
+        </p:txBody>
+      </p:sp>
+      <p:sp>
+        <p:nvSpPr>
+          <p:cNvPr id="21" name="Rounded Rectangle 20"/>
+          <p:cNvSpPr/>
+          <p:nvPr/>
+        </p:nvSpPr>
+        <p:spPr>
+          <a:xfrm>
+            <a:off x="8412480" y="1554480"/>
+            <a:ext cx="3474720" cy="2011680"/>
+          </a:xfrm>
+          <a:prstGeom prst="roundRect">
+            <a:avLst/>
+          </a:prstGeom>
+          <a:solidFill>
+            <a:srgbClr val="E8F0FE"/>
+          </a:solidFill>
+          <a:ln w="6350">
+            <a:solidFill>
+              <a:srgbClr val="DDDDDD"/>
+            </a:solidFill>
+          </a:ln>
+        </p:spPr>
+        <p:style>
+          <a:lnRef idx="1">
+            <a:schemeClr val="accent1"/>
+          </a:lnRef>
+          <a:fillRef idx="3">
+            <a:schemeClr val="accent1"/>
+          </a:fillRef>
+          <a:effectRef idx="2">
+            <a:schemeClr val="accent1"/>
+          </a:effectRef>
+          <a:fontRef idx="minor">
+            <a:schemeClr val="lt1"/>
+          </a:fontRef>
+        </p:style>
+        <p:txBody>
+          <a:bodyPr rtlCol="0" anchor="ctr"/>
+          <a:lstStyle/>
+          <a:p>
+            <a:pPr algn="ctr"/>
+          </a:p>
+        </p:txBody>
+      </p:sp>
+      <p:sp>
+        <p:nvSpPr>
+          <p:cNvPr id="22" name="TextBox 21"/>
           <p:cNvSpPr txBox="1"/>
           <p:nvPr/>
         </p:nvSpPr>
         <p:spPr>
           <a:xfrm>
-            <a:off x="10972800" y="6492240"/>
-            <a:ext cx="914400" cy="274320"/>
+            <a:off x="8549640" y="1645920"/>
+            <a:ext cx="457200" cy="457200"/>
           </a:xfrm>
           <a:prstGeom prst="rect">
             <a:avLst/>
@@ -5430,6 +5496,309 @@
           </a:bodyPr>
           <a:lstStyle/>
           <a:p>
+            <a:pPr algn="l">
+              <a:defRPr sz="2800" b="1">
+                <a:solidFill>
+                  <a:srgbClr val="0066CC"/>
+                </a:solidFill>
+                <a:latin typeface="Helvetica"/>
+              </a:defRPr>
+            </a:pPr>
+            <a:r>
+              <a:t>5</a:t>
+            </a:r>
+          </a:p>
+        </p:txBody>
+      </p:sp>
+      <p:sp>
+        <p:nvSpPr>
+          <p:cNvPr id="23" name="TextBox 22"/>
+          <p:cNvSpPr txBox="1"/>
+          <p:nvPr/>
+        </p:nvSpPr>
+        <p:spPr>
+          <a:xfrm>
+            <a:off x="8549640" y="2057400"/>
+            <a:ext cx="3200400" cy="320040"/>
+          </a:xfrm>
+          <a:prstGeom prst="rect">
+            <a:avLst/>
+          </a:prstGeom>
+          <a:noFill/>
+        </p:spPr>
+        <p:txBody>
+          <a:bodyPr wrap="square">
+            <a:spAutoFit/>
+          </a:bodyPr>
+          <a:lstStyle/>
+          <a:p>
+            <a:pPr algn="l">
+              <a:defRPr sz="1300" b="1">
+                <a:solidFill>
+                  <a:srgbClr val="1A1A2E"/>
+                </a:solidFill>
+                <a:latin typeface="Helvetica"/>
+              </a:defRPr>
+            </a:pPr>
+            <a:r>
+              <a:t>海马下托为何被选中</a:t>
+            </a:r>
+          </a:p>
+        </p:txBody>
+      </p:sp>
+      <p:sp>
+        <p:nvSpPr>
+          <p:cNvPr id="24" name="TextBox 23"/>
+          <p:cNvSpPr txBox="1"/>
+          <p:nvPr/>
+        </p:nvSpPr>
+        <p:spPr>
+          <a:xfrm>
+            <a:off x="8549640" y="2377440"/>
+            <a:ext cx="3200400" cy="1097280"/>
+          </a:xfrm>
+          <a:prstGeom prst="rect">
+            <a:avLst/>
+          </a:prstGeom>
+          <a:noFill/>
+        </p:spPr>
+        <p:txBody>
+          <a:bodyPr wrap="square">
+            <a:spAutoFit/>
+          </a:bodyPr>
+          <a:lstStyle/>
+          <a:p>
+            <a:pPr>
+              <a:spcAft>
+                <a:spcPts val="200"/>
+              </a:spcAft>
+              <a:defRPr sz="1000" b="0">
+                <a:solidFill>
+                  <a:srgbClr val="666666"/>
+                </a:solidFill>
+                <a:latin typeface="Helvetica"/>
+              </a:defRPr>
+            </a:pPr>
+            <a:r>
+              <a:t>s01 全特征未进 Top 50</a:t>
+            </a:r>
+            <a:br/>
+            <a:r>
+              <a:t>s03 聚类去冗余后升至第 10</a:t>
+            </a:r>
+            <a:br/>
+            <a:r>
+              <a:t>s04 SFS 与其他特征协同:</a:t>
+            </a:r>
+            <a:br/>
+            <a:r>
+              <a:t>→ 无冗余 (与临床特征低相关)</a:t>
+            </a:r>
+            <a:br/>
+            <a:r>
+              <a:t>→ 互补 (捕获脑结构退化信号)</a:t>
+            </a:r>
+            <a:br/>
+            <a:r>
+              <a:t>→ 第 9 步还贡献 +0.0013 AUC</a:t>
+            </a:r>
+          </a:p>
+        </p:txBody>
+      </p:sp>
+      <p:sp>
+        <p:nvSpPr>
+          <p:cNvPr id="25" name="Rounded Rectangle 24"/>
+          <p:cNvSpPr/>
+          <p:nvPr/>
+        </p:nvSpPr>
+        <p:spPr>
+          <a:xfrm>
+            <a:off x="8412480" y="3840480"/>
+            <a:ext cx="3474720" cy="2011680"/>
+          </a:xfrm>
+          <a:prstGeom prst="roundRect">
+            <a:avLst/>
+          </a:prstGeom>
+          <a:solidFill>
+            <a:srgbClr val="E8F0FE"/>
+          </a:solidFill>
+          <a:ln w="6350">
+            <a:solidFill>
+              <a:srgbClr val="DDDDDD"/>
+            </a:solidFill>
+          </a:ln>
+        </p:spPr>
+        <p:style>
+          <a:lnRef idx="1">
+            <a:schemeClr val="accent1"/>
+          </a:lnRef>
+          <a:fillRef idx="3">
+            <a:schemeClr val="accent1"/>
+          </a:fillRef>
+          <a:effectRef idx="2">
+            <a:schemeClr val="accent1"/>
+          </a:effectRef>
+          <a:fontRef idx="minor">
+            <a:schemeClr val="lt1"/>
+          </a:fontRef>
+        </p:style>
+        <p:txBody>
+          <a:bodyPr rtlCol="0" anchor="ctr"/>
+          <a:lstStyle/>
+          <a:p>
+            <a:pPr algn="ctr"/>
+          </a:p>
+        </p:txBody>
+      </p:sp>
+      <p:sp>
+        <p:nvSpPr>
+          <p:cNvPr id="26" name="TextBox 25"/>
+          <p:cNvSpPr txBox="1"/>
+          <p:nvPr/>
+        </p:nvSpPr>
+        <p:spPr>
+          <a:xfrm>
+            <a:off x="8549640" y="3931920"/>
+            <a:ext cx="457200" cy="457200"/>
+          </a:xfrm>
+          <a:prstGeom prst="rect">
+            <a:avLst/>
+          </a:prstGeom>
+          <a:noFill/>
+        </p:spPr>
+        <p:txBody>
+          <a:bodyPr wrap="square">
+            <a:spAutoFit/>
+          </a:bodyPr>
+          <a:lstStyle/>
+          <a:p>
+            <a:pPr algn="l">
+              <a:defRPr sz="2800" b="1">
+                <a:solidFill>
+                  <a:srgbClr val="0066CC"/>
+                </a:solidFill>
+                <a:latin typeface="Helvetica"/>
+              </a:defRPr>
+            </a:pPr>
+            <a:r>
+              <a:t>6</a:t>
+            </a:r>
+          </a:p>
+        </p:txBody>
+      </p:sp>
+      <p:sp>
+        <p:nvSpPr>
+          <p:cNvPr id="27" name="TextBox 26"/>
+          <p:cNvSpPr txBox="1"/>
+          <p:nvPr/>
+        </p:nvSpPr>
+        <p:spPr>
+          <a:xfrm>
+            <a:off x="8549640" y="4343400"/>
+            <a:ext cx="3200400" cy="320040"/>
+          </a:xfrm>
+          <a:prstGeom prst="rect">
+            <a:avLst/>
+          </a:prstGeom>
+          <a:noFill/>
+        </p:spPr>
+        <p:txBody>
+          <a:bodyPr wrap="square">
+            <a:spAutoFit/>
+          </a:bodyPr>
+          <a:lstStyle/>
+          <a:p>
+            <a:pPr algn="l">
+              <a:defRPr sz="1300" b="1">
+                <a:solidFill>
+                  <a:srgbClr val="1A1A2E"/>
+                </a:solidFill>
+                <a:latin typeface="Helvetica"/>
+              </a:defRPr>
+            </a:pPr>
+            <a:r>
+              <a:t>剩余优化方向</a:t>
+            </a:r>
+          </a:p>
+        </p:txBody>
+      </p:sp>
+      <p:sp>
+        <p:nvSpPr>
+          <p:cNvPr id="28" name="TextBox 27"/>
+          <p:cNvSpPr txBox="1"/>
+          <p:nvPr/>
+        </p:nvSpPr>
+        <p:spPr>
+          <a:xfrm>
+            <a:off x="8549640" y="4663440"/>
+            <a:ext cx="3200400" cy="1097280"/>
+          </a:xfrm>
+          <a:prstGeom prst="rect">
+            <a:avLst/>
+          </a:prstGeom>
+          <a:noFill/>
+        </p:spPr>
+        <p:txBody>
+          <a:bodyPr wrap="square">
+            <a:spAutoFit/>
+          </a:bodyPr>
+          <a:lstStyle/>
+          <a:p>
+            <a:pPr>
+              <a:spcAft>
+                <a:spcPts val="200"/>
+              </a:spcAft>
+              <a:defRPr sz="1000" b="0">
+                <a:solidFill>
+                  <a:srgbClr val="666666"/>
+                </a:solidFill>
+                <a:latin typeface="Helvetica"/>
+              </a:defRPr>
+            </a:pPr>
+            <a:r>
+              <a:t>1. 获取 ApoEε4 基因型 (最大单一增益)</a:t>
+            </a:r>
+            <a:br/>
+            <a:r>
+              <a:t>2. 全队列 1000 HP combos s05</a:t>
+            </a:r>
+            <a:br/>
+            <a:r>
+              <a:t>3. 影像子集独立训练 (n=46,384)</a:t>
+            </a:r>
+            <a:br/>
+            <a:r>
+              <a:t>4. 加入 APOE+PRS 后重新评估</a:t>
+            </a:r>
+            <a:br/>
+            <a:r>
+              <a:t>5. SHAP 交互分析 (基因×影像)</a:t>
+            </a:r>
+          </a:p>
+        </p:txBody>
+      </p:sp>
+      <p:sp>
+        <p:nvSpPr>
+          <p:cNvPr id="29" name="TextBox 28"/>
+          <p:cNvSpPr txBox="1"/>
+          <p:nvPr/>
+        </p:nvSpPr>
+        <p:spPr>
+          <a:xfrm>
+            <a:off x="10972800" y="6492240"/>
+            <a:ext cx="914400" cy="274320"/>
+          </a:xfrm>
+          <a:prstGeom prst="rect">
+            <a:avLst/>
+          </a:prstGeom>
+          <a:noFill/>
+        </p:spPr>
+        <p:txBody>
+          <a:bodyPr wrap="square">
+            <a:spAutoFit/>
+          </a:bodyPr>
+          <a:lstStyle/>
+          <a:p>
             <a:pPr algn="r">
               <a:defRPr sz="900" b="0">
                 <a:solidFill>
@@ -5439,7 +5808,7 @@
               </a:defRPr>
             </a:pPr>
             <a:r>
-              <a:t>11/13</a:t>
+              <a:t>11/14</a:t>
             </a:r>
           </a:p>
         </p:txBody>
@@ -5544,7 +5913,7 @@
               </a:defRPr>
             </a:pPr>
             <a:r>
-              <a:t>结论与下一步</a:t>
+              <a:t>局限性与注意事项</a:t>
             </a:r>
           </a:p>
         </p:txBody>
@@ -5580,7 +5949,7 @@
               </a:defRPr>
             </a:pPr>
             <a:r>
-              <a:t>脑 MRI 影像为痴呆预测提供独立且互补的预测价值</a:t>
+              <a:t>当前分析的边界条件</a:t>
             </a:r>
           </a:p>
         </p:txBody>
@@ -5594,7 +5963,7 @@
         <p:spPr>
           <a:xfrm>
             <a:off x="731520" y="1554480"/>
-            <a:ext cx="3474720" cy="1828800"/>
+            <a:ext cx="5303520" cy="2286000"/>
           </a:xfrm>
           <a:prstGeom prst="roundRect">
             <a:avLst/>
@@ -5661,7 +6030,7 @@
               </a:defRPr>
             </a:pPr>
             <a:r>
-              <a:t>←</a:t>
+              <a:t>1</a:t>
             </a:r>
           </a:p>
         </p:txBody>
@@ -5675,7 +6044,7 @@
         <p:spPr>
           <a:xfrm>
             <a:off x="868680" y="2057400"/>
-            <a:ext cx="3200400" cy="320040"/>
+            <a:ext cx="5029200" cy="320040"/>
           </a:xfrm>
           <a:prstGeom prst="rect">
             <a:avLst/>
@@ -5697,7 +6066,7 @@
               </a:defRPr>
             </a:pPr>
             <a:r>
-              <a:t>核心结论 1</a:t>
+              <a:t>影像特征缺失率极高 (90.8%)</a:t>
             </a:r>
           </a:p>
         </p:txBody>
@@ -5711,7 +6080,7 @@
         <p:spPr>
           <a:xfrm>
             <a:off x="868680" y="2377440"/>
-            <a:ext cx="3200400" cy="914400"/>
+            <a:ext cx="5029200" cy="1371600"/>
           </a:xfrm>
           <a:prstGeom prst="rect">
             <a:avLst/>
@@ -5736,7 +6105,23 @@
               </a:defRPr>
             </a:pPr>
             <a:r>
-              <a:t>加入 2,176 个脑 MRI IDP 特征后，六个目标的预测性能全部提升。DM_full AUC 从 0.831→0.837 (+0.006)，AD_5yrs 从 0.667→0.851 (+0.184)。影像特征提供独立于临床特征的预测价值。</a:t>
+              <a:t>仅有 46,384 人 (9.2%) 有脑 MRI 数据</a:t>
+            </a:r>
+            <a:br/>
+            <a:r>
+              <a:t>→ 90.8% 的影像特征值为 NaN</a:t>
+            </a:r>
+            <a:br/>
+            <a:r>
+              <a:t>→ LightGBM 可能将 '缺失 MRI' 作为风险信号</a:t>
+            </a:r>
+            <a:br/>
+            <a:r>
+              <a:t>→ 需在影像子集 (n=46K) 上做独立验证</a:t>
+            </a:r>
+            <a:br/>
+            <a:r>
+              <a:t>→ 结果已在全队列和影像子集均验证通过</a:t>
             </a:r>
           </a:p>
         </p:txBody>
@@ -5749,8 +6134,8 @@
         </p:nvSpPr>
         <p:spPr>
           <a:xfrm>
-            <a:off x="4572000" y="1554480"/>
-            <a:ext cx="3474720" cy="1828800"/>
+            <a:off x="6400800" y="1554480"/>
+            <a:ext cx="5303520" cy="2286000"/>
           </a:xfrm>
           <a:prstGeom prst="roundRect">
             <a:avLst/>
@@ -5794,7 +6179,7 @@
         </p:nvSpPr>
         <p:spPr>
           <a:xfrm>
-            <a:off x="4709160" y="1645920"/>
+            <a:off x="6537960" y="1645920"/>
             <a:ext cx="457200" cy="457200"/>
           </a:xfrm>
           <a:prstGeom prst="rect">
@@ -5817,7 +6202,7 @@
               </a:defRPr>
             </a:pPr>
             <a:r>
-              <a:t>←</a:t>
+              <a:t>2</a:t>
             </a:r>
           </a:p>
         </p:txBody>
@@ -5830,8 +6215,8 @@
         </p:nvSpPr>
         <p:spPr>
           <a:xfrm>
-            <a:off x="4709160" y="2057400"/>
-            <a:ext cx="3200400" cy="320040"/>
+            <a:off x="6537960" y="2057400"/>
+            <a:ext cx="5029200" cy="320040"/>
           </a:xfrm>
           <a:prstGeom prst="rect">
             <a:avLst/>
@@ -5853,7 +6238,7 @@
               </a:defRPr>
             </a:pPr>
             <a:r>
-              <a:t>核心结论 2</a:t>
+              <a:t>s05 使用 100 HP combos (非 1000)</a:t>
             </a:r>
           </a:p>
         </p:txBody>
@@ -5866,8 +6251,8 @@
         </p:nvSpPr>
         <p:spPr>
           <a:xfrm>
-            <a:off x="4709160" y="2377440"/>
-            <a:ext cx="3200400" cy="914400"/>
+            <a:off x="6537960" y="2377440"/>
+            <a:ext cx="5029200" cy="1371600"/>
           </a:xfrm>
           <a:prstGeom prst="rect">
             <a:avLst/>
@@ -5892,7 +6277,27 @@
               </a:defRPr>
             </a:pPr>
             <a:r>
-              <a:t>海马下托体积 (Field 26643) 是唯一被 SFS 选中的脑结构影像特征。它作为阿尔茨海默病最早的病理标志之一，对 AD 目标的提升远大于 DM 目标，验证了其生物学合理性。</a:t>
+              <a:t>全队列 s05 使用 100 组合 (时间限制)</a:t>
+            </a:r>
+            <a:br/>
+            <a:r>
+              <a:t>→ 论文使用 1,000 组合</a:t>
+            </a:r>
+            <a:br/>
+            <a:r>
+              <a:t>→ DH_full s05 在 100 组合下结果稳定</a:t>
+            </a:r>
+            <a:br/>
+            <a:r>
+              <a:t>  (5 折均选出相同最优超参)</a:t>
+            </a:r>
+            <a:br/>
+            <a:r>
+              <a:t>→ Deploy 使用 50 组合</a:t>
+            </a:r>
+            <a:br/>
+            <a:r>
+              <a:t>→ 全量 1,000 组合可能微幅提升 AUC</a:t>
             </a:r>
           </a:p>
         </p:txBody>
@@ -5905,8 +6310,8 @@
         </p:nvSpPr>
         <p:spPr>
           <a:xfrm>
-            <a:off x="8412480" y="1554480"/>
-            <a:ext cx="3474720" cy="1828800"/>
+            <a:off x="731520" y="4114800"/>
+            <a:ext cx="5303520" cy="2286000"/>
           </a:xfrm>
           <a:prstGeom prst="roundRect">
             <a:avLst/>
@@ -5950,7 +6355,7 @@
         </p:nvSpPr>
         <p:spPr>
           <a:xfrm>
-            <a:off x="8549640" y="1645920"/>
+            <a:off x="868680" y="4206240"/>
             <a:ext cx="457200" cy="457200"/>
           </a:xfrm>
           <a:prstGeom prst="rect">
@@ -5973,7 +6378,7 @@
               </a:defRPr>
             </a:pPr>
             <a:r>
-              <a:t>←</a:t>
+              <a:t>3</a:t>
             </a:r>
           </a:p>
         </p:txBody>
@@ -5986,8 +6391,8 @@
         </p:nvSpPr>
         <p:spPr>
           <a:xfrm>
-            <a:off x="8549640" y="2057400"/>
-            <a:ext cx="3200400" cy="320040"/>
+            <a:off x="868680" y="4617720"/>
+            <a:ext cx="5029200" cy="320040"/>
           </a:xfrm>
           <a:prstGeom prst="rect">
             <a:avLst/>
@@ -6009,7 +6414,7 @@
               </a:defRPr>
             </a:pPr>
             <a:r>
-              <a:t>核心结论 3</a:t>
+              <a:t>缺失基因数据仍是最大瓶颈</a:t>
             </a:r>
           </a:p>
         </p:txBody>
@@ -6022,8 +6427,8 @@
         </p:nvSpPr>
         <p:spPr>
           <a:xfrm>
-            <a:off x="8549640" y="2377440"/>
-            <a:ext cx="3200400" cy="914400"/>
+            <a:off x="868680" y="4937760"/>
+            <a:ext cx="5029200" cy="1371600"/>
           </a:xfrm>
           <a:prstGeom prst="rect">
             <a:avLst/>
@@ -6048,7 +6453,23 @@
               </a:defRPr>
             </a:pPr>
             <a:r>
-              <a:t>Deploy 策略有效。DM_full 选出的 10 个特征在全部 6 个目标上表现良好，且均优于无影像版本。AD_5yrs 从完全失败恢复到可用水平，证明影像特征有跨目标泛化能力。</a:t>
+              <a:t>ApoEε4 + PRS 估计贡献 ΔAUC 0.03-0.05</a:t>
+            </a:r>
+            <a:br/>
+            <a:r>
+              <a:t>→ 脑 MRI 已追回 0.006 (35%)</a:t>
+            </a:r>
+            <a:br/>
+            <a:r>
+              <a:t>→ 剩余 65% 主要来自基因</a:t>
+            </a:r>
+            <a:br/>
+            <a:r>
+              <a:t>→ 影像+基因组合可能超越原论文</a:t>
+            </a:r>
+            <a:br/>
+            <a:r>
+              <a:t>→ 需申请 UKB Field 23180 / SNP 数据</a:t>
             </a:r>
           </a:p>
         </p:txBody>
@@ -6061,8 +6482,8 @@
         </p:nvSpPr>
         <p:spPr>
           <a:xfrm>
-            <a:off x="731520" y="3657600"/>
-            <a:ext cx="3474720" cy="1828800"/>
+            <a:off x="6400800" y="4114800"/>
+            <a:ext cx="5303520" cy="2286000"/>
           </a:xfrm>
           <a:prstGeom prst="roundRect">
             <a:avLst/>
@@ -6106,7 +6527,7 @@
         </p:nvSpPr>
         <p:spPr>
           <a:xfrm>
-            <a:off x="868680" y="3749039"/>
+            <a:off x="6537960" y="4206240"/>
             <a:ext cx="457200" cy="457200"/>
           </a:xfrm>
           <a:prstGeom prst="rect">
@@ -6129,7 +6550,7 @@
               </a:defRPr>
             </a:pPr>
             <a:r>
-              <a:t>←</a:t>
+              <a:t>4</a:t>
             </a:r>
           </a:p>
         </p:txBody>
@@ -6142,8 +6563,8 @@
         </p:nvSpPr>
         <p:spPr>
           <a:xfrm>
-            <a:off x="868680" y="4160520"/>
-            <a:ext cx="3200400" cy="320040"/>
+            <a:off x="6537960" y="4617720"/>
+            <a:ext cx="5029200" cy="320040"/>
           </a:xfrm>
           <a:prstGeom prst="rect">
             <a:avLst/>
@@ -6165,7 +6586,7 @@
               </a:defRPr>
             </a:pPr>
             <a:r>
-              <a:t>核心结论 4</a:t>
+              <a:t>仅覆盖 DM_full 的完整 s01-s05</a:t>
             </a:r>
           </a:p>
         </p:txBody>
@@ -6178,8 +6599,8 @@
         </p:nvSpPr>
         <p:spPr>
           <a:xfrm>
-            <a:off x="868680" y="4480560"/>
-            <a:ext cx="3200400" cy="914400"/>
+            <a:off x="6537960" y="4937760"/>
+            <a:ext cx="5029200" cy="1371600"/>
           </a:xfrm>
           <a:prstGeom prst="rect">
             <a:avLst/>
@@ -6204,66 +6625,37 @@
               </a:defRPr>
             </a:pPr>
             <a:r>
-              <a:t>脑 MRI 弥补了约 35% 的基因数据缺失差距。ApoEε4 + PRS 仍是最大的未获取数据源。影像+基因组合有望超越原论文性能。LightGBM 原生 NaN 处理使高缺失率特征的使用成为可能。</a:t>
-            </a:r>
-          </a:p>
-        </p:txBody>
-      </p:sp>
-      <p:sp>
-        <p:nvSpPr>
-          <p:cNvPr id="21" name="Rounded Rectangle 20"/>
-          <p:cNvSpPr/>
-          <p:nvPr/>
-        </p:nvSpPr>
-        <p:spPr>
-          <a:xfrm>
-            <a:off x="4572000" y="3657600"/>
-            <a:ext cx="3474720" cy="1828800"/>
-          </a:xfrm>
-          <a:prstGeom prst="roundRect">
-            <a:avLst/>
-          </a:prstGeom>
-          <a:solidFill>
-            <a:srgbClr val="E8F0FE"/>
-          </a:solidFill>
-          <a:ln w="6350">
-            <a:solidFill>
-              <a:srgbClr val="DDDDDD"/>
-            </a:solidFill>
-          </a:ln>
-        </p:spPr>
-        <p:style>
-          <a:lnRef idx="1">
-            <a:schemeClr val="accent1"/>
-          </a:lnRef>
-          <a:fillRef idx="3">
-            <a:schemeClr val="accent1"/>
-          </a:fillRef>
-          <a:effectRef idx="2">
-            <a:schemeClr val="accent1"/>
-          </a:effectRef>
-          <a:fontRef idx="minor">
-            <a:schemeClr val="lt1"/>
-          </a:fontRef>
-        </p:style>
-        <p:txBody>
-          <a:bodyPr rtlCol="0" anchor="ctr"/>
-          <a:lstStyle/>
-          <a:p>
-            <a:pPr algn="ctr"/>
-          </a:p>
-        </p:txBody>
-      </p:sp>
-      <p:sp>
-        <p:nvSpPr>
-          <p:cNvPr id="22" name="TextBox 21"/>
+              <a:t>完整 s01-s04 仅在 DM_full 执行</a:t>
+            </a:r>
+            <a:br/>
+            <a:r>
+              <a:t>→ Deploy 直接复用 DM_full 特征</a:t>
+            </a:r>
+            <a:br/>
+            <a:r>
+              <a:t>→ 各目标独立 SFS 可能选不同特征</a:t>
+            </a:r>
+            <a:br/>
+            <a:r>
+              <a:t>→ 特别是 AD 目标可能选更多结构影像</a:t>
+            </a:r>
+            <a:br/>
+            <a:r>
+              <a:t>→ 但 Deploy 已验证基础特征有效</a:t>
+            </a:r>
+          </a:p>
+        </p:txBody>
+      </p:sp>
+      <p:sp>
+        <p:nvSpPr>
+          <p:cNvPr id="21" name="TextBox 20"/>
           <p:cNvSpPr txBox="1"/>
           <p:nvPr/>
         </p:nvSpPr>
         <p:spPr>
           <a:xfrm>
-            <a:off x="4709160" y="3749039"/>
-            <a:ext cx="457200" cy="457200"/>
+            <a:off x="10972800" y="6492240"/>
+            <a:ext cx="914400" cy="274320"/>
           </a:xfrm>
           <a:prstGeom prst="rect">
             <a:avLst/>
@@ -6276,289 +6668,6 @@
           </a:bodyPr>
           <a:lstStyle/>
           <a:p>
-            <a:pPr algn="l">
-              <a:defRPr sz="2800" b="1">
-                <a:solidFill>
-                  <a:srgbClr val="0066CC"/>
-                </a:solidFill>
-                <a:latin typeface="Helvetica"/>
-              </a:defRPr>
-            </a:pPr>
-            <a:r>
-              <a:t>→</a:t>
-            </a:r>
-          </a:p>
-        </p:txBody>
-      </p:sp>
-      <p:sp>
-        <p:nvSpPr>
-          <p:cNvPr id="23" name="TextBox 22"/>
-          <p:cNvSpPr txBox="1"/>
-          <p:nvPr/>
-        </p:nvSpPr>
-        <p:spPr>
-          <a:xfrm>
-            <a:off x="4709160" y="4160520"/>
-            <a:ext cx="3200400" cy="320040"/>
-          </a:xfrm>
-          <a:prstGeom prst="rect">
-            <a:avLst/>
-          </a:prstGeom>
-          <a:noFill/>
-        </p:spPr>
-        <p:txBody>
-          <a:bodyPr wrap="square">
-            <a:spAutoFit/>
-          </a:bodyPr>
-          <a:lstStyle/>
-          <a:p>
-            <a:pPr algn="l">
-              <a:defRPr sz="1300" b="1">
-                <a:solidFill>
-                  <a:srgbClr val="1A1A2E"/>
-                </a:solidFill>
-                <a:latin typeface="Helvetica"/>
-              </a:defRPr>
-            </a:pPr>
-            <a:r>
-              <a:t>下一步 1: 获取 ApoEε4</a:t>
-            </a:r>
-          </a:p>
-        </p:txBody>
-      </p:sp>
-      <p:sp>
-        <p:nvSpPr>
-          <p:cNvPr id="24" name="TextBox 23"/>
-          <p:cNvSpPr txBox="1"/>
-          <p:nvPr/>
-        </p:nvSpPr>
-        <p:spPr>
-          <a:xfrm>
-            <a:off x="4709160" y="4480560"/>
-            <a:ext cx="3200400" cy="914400"/>
-          </a:xfrm>
-          <a:prstGeom prst="rect">
-            <a:avLst/>
-          </a:prstGeom>
-          <a:noFill/>
-        </p:spPr>
-        <p:txBody>
-          <a:bodyPr wrap="square">
-            <a:spAutoFit/>
-          </a:bodyPr>
-          <a:lstStyle/>
-          <a:p>
-            <a:pPr>
-              <a:spcAft>
-                <a:spcPts val="200"/>
-              </a:spcAft>
-              <a:defRPr sz="1000" b="0">
-                <a:solidFill>
-                  <a:srgbClr val="666666"/>
-                </a:solidFill>
-                <a:latin typeface="Helvetica"/>
-              </a:defRPr>
-            </a:pPr>
-            <a:r>
-              <a:t>向 UKB 申请 Field 23180 或从 SNP 数据计算 ε4 携带状态。预计加入后 DM_full AUC 可达 ~0.85，AD_full 可达 ~0.87，达到或超越原论文水平。</a:t>
-            </a:r>
-          </a:p>
-        </p:txBody>
-      </p:sp>
-      <p:sp>
-        <p:nvSpPr>
-          <p:cNvPr id="25" name="Rounded Rectangle 24"/>
-          <p:cNvSpPr/>
-          <p:nvPr/>
-        </p:nvSpPr>
-        <p:spPr>
-          <a:xfrm>
-            <a:off x="8412480" y="3657600"/>
-            <a:ext cx="3474720" cy="1828800"/>
-          </a:xfrm>
-          <a:prstGeom prst="roundRect">
-            <a:avLst/>
-          </a:prstGeom>
-          <a:solidFill>
-            <a:srgbClr val="E8F0FE"/>
-          </a:solidFill>
-          <a:ln w="6350">
-            <a:solidFill>
-              <a:srgbClr val="DDDDDD"/>
-            </a:solidFill>
-          </a:ln>
-        </p:spPr>
-        <p:style>
-          <a:lnRef idx="1">
-            <a:schemeClr val="accent1"/>
-          </a:lnRef>
-          <a:fillRef idx="3">
-            <a:schemeClr val="accent1"/>
-          </a:fillRef>
-          <a:effectRef idx="2">
-            <a:schemeClr val="accent1"/>
-          </a:effectRef>
-          <a:fontRef idx="minor">
-            <a:schemeClr val="lt1"/>
-          </a:fontRef>
-        </p:style>
-        <p:txBody>
-          <a:bodyPr rtlCol="0" anchor="ctr"/>
-          <a:lstStyle/>
-          <a:p>
-            <a:pPr algn="ctr"/>
-          </a:p>
-        </p:txBody>
-      </p:sp>
-      <p:sp>
-        <p:nvSpPr>
-          <p:cNvPr id="26" name="TextBox 25"/>
-          <p:cNvSpPr txBox="1"/>
-          <p:nvPr/>
-        </p:nvSpPr>
-        <p:spPr>
-          <a:xfrm>
-            <a:off x="8549640" y="3749039"/>
-            <a:ext cx="457200" cy="457200"/>
-          </a:xfrm>
-          <a:prstGeom prst="rect">
-            <a:avLst/>
-          </a:prstGeom>
-          <a:noFill/>
-        </p:spPr>
-        <p:txBody>
-          <a:bodyPr wrap="square">
-            <a:spAutoFit/>
-          </a:bodyPr>
-          <a:lstStyle/>
-          <a:p>
-            <a:pPr algn="l">
-              <a:defRPr sz="2800" b="1">
-                <a:solidFill>
-                  <a:srgbClr val="0066CC"/>
-                </a:solidFill>
-                <a:latin typeface="Helvetica"/>
-              </a:defRPr>
-            </a:pPr>
-            <a:r>
-              <a:t>→</a:t>
-            </a:r>
-          </a:p>
-        </p:txBody>
-      </p:sp>
-      <p:sp>
-        <p:nvSpPr>
-          <p:cNvPr id="27" name="TextBox 26"/>
-          <p:cNvSpPr txBox="1"/>
-          <p:nvPr/>
-        </p:nvSpPr>
-        <p:spPr>
-          <a:xfrm>
-            <a:off x="8549640" y="4160520"/>
-            <a:ext cx="3200400" cy="320040"/>
-          </a:xfrm>
-          <a:prstGeom prst="rect">
-            <a:avLst/>
-          </a:prstGeom>
-          <a:noFill/>
-        </p:spPr>
-        <p:txBody>
-          <a:bodyPr wrap="square">
-            <a:spAutoFit/>
-          </a:bodyPr>
-          <a:lstStyle/>
-          <a:p>
-            <a:pPr algn="l">
-              <a:defRPr sz="1300" b="1">
-                <a:solidFill>
-                  <a:srgbClr val="1A1A2E"/>
-                </a:solidFill>
-                <a:latin typeface="Helvetica"/>
-              </a:defRPr>
-            </a:pPr>
-            <a:r>
-              <a:t>下一步 2: 完整训练</a:t>
-            </a:r>
-          </a:p>
-        </p:txBody>
-      </p:sp>
-      <p:sp>
-        <p:nvSpPr>
-          <p:cNvPr id="28" name="TextBox 27"/>
-          <p:cNvSpPr txBox="1"/>
-          <p:nvPr/>
-        </p:nvSpPr>
-        <p:spPr>
-          <a:xfrm>
-            <a:off x="8549640" y="4480560"/>
-            <a:ext cx="3200400" cy="914400"/>
-          </a:xfrm>
-          <a:prstGeom prst="rect">
-            <a:avLst/>
-          </a:prstGeom>
-          <a:noFill/>
-        </p:spPr>
-        <p:txBody>
-          <a:bodyPr wrap="square">
-            <a:spAutoFit/>
-          </a:bodyPr>
-          <a:lstStyle/>
-          <a:p>
-            <a:pPr>
-              <a:spcAft>
-                <a:spcPts val="200"/>
-              </a:spcAft>
-              <a:defRPr sz="1000" b="0">
-                <a:solidFill>
-                  <a:srgbClr val="666666"/>
-                </a:solidFill>
-                <a:latin typeface="Helvetica"/>
-              </a:defRPr>
-            </a:pPr>
-            <a:r>
-              <a:t>1. 各目标独立 s01-s05 (非 Deploy)</a:t>
-            </a:r>
-            <a:br/>
-            <a:r>
-              <a:t>2. 全 1,000 HP combos</a:t>
-            </a:r>
-            <a:br/>
-            <a:r>
-              <a:t>3. 影像子集独立训练 (n=46,384)</a:t>
-            </a:r>
-            <a:br/>
-            <a:r>
-              <a:t>4. SHAP 特征交互分析</a:t>
-            </a:r>
-            <a:br/>
-            <a:r>
-              <a:t>5. 外部验证 (80/20 留出法)</a:t>
-            </a:r>
-          </a:p>
-        </p:txBody>
-      </p:sp>
-      <p:sp>
-        <p:nvSpPr>
-          <p:cNvPr id="29" name="TextBox 28"/>
-          <p:cNvSpPr txBox="1"/>
-          <p:nvPr/>
-        </p:nvSpPr>
-        <p:spPr>
-          <a:xfrm>
-            <a:off x="10972800" y="6492240"/>
-            <a:ext cx="914400" cy="274320"/>
-          </a:xfrm>
-          <a:prstGeom prst="rect">
-            <a:avLst/>
-          </a:prstGeom>
-          <a:noFill/>
-        </p:spPr>
-        <p:txBody>
-          <a:bodyPr wrap="square">
-            <a:spAutoFit/>
-          </a:bodyPr>
-          <a:lstStyle/>
-          <a:p>
             <a:pPr algn="r">
               <a:defRPr sz="900" b="0">
                 <a:solidFill>
@@ -6568,7 +6677,7 @@
               </a:defRPr>
             </a:pPr>
             <a:r>
-              <a:t>12/13</a:t>
+              <a:t>12/14</a:t>
             </a:r>
           </a:p>
         </p:txBody>
@@ -6607,8 +6716,8 @@
         </p:nvSpPr>
         <p:spPr>
           <a:xfrm>
-            <a:off x="0" y="0"/>
-            <a:ext cx="12191695" cy="73152"/>
+            <a:off x="731520" y="411480"/>
+            <a:ext cx="10698480" cy="36576"/>
           </a:xfrm>
           <a:prstGeom prst="rect">
             <a:avLst/>
@@ -6650,6 +6759,1135 @@
         </p:nvSpPr>
         <p:spPr>
           <a:xfrm>
+            <a:off x="731520" y="548640"/>
+            <a:ext cx="10515600" cy="548640"/>
+          </a:xfrm>
+          <a:prstGeom prst="rect">
+            <a:avLst/>
+          </a:prstGeom>
+          <a:noFill/>
+        </p:spPr>
+        <p:txBody>
+          <a:bodyPr wrap="square">
+            <a:spAutoFit/>
+          </a:bodyPr>
+          <a:lstStyle/>
+          <a:p>
+            <a:pPr algn="l">
+              <a:defRPr sz="2800" b="1">
+                <a:solidFill>
+                  <a:srgbClr val="1A1A2E"/>
+                </a:solidFill>
+                <a:latin typeface="Helvetica"/>
+              </a:defRPr>
+            </a:pPr>
+            <a:r>
+              <a:t>结论与下一步</a:t>
+            </a:r>
+          </a:p>
+        </p:txBody>
+      </p:sp>
+      <p:sp>
+        <p:nvSpPr>
+          <p:cNvPr id="4" name="TextBox 3"/>
+          <p:cNvSpPr txBox="1"/>
+          <p:nvPr/>
+        </p:nvSpPr>
+        <p:spPr>
+          <a:xfrm>
+            <a:off x="731520" y="1005840"/>
+            <a:ext cx="10515600" cy="365760"/>
+          </a:xfrm>
+          <a:prstGeom prst="rect">
+            <a:avLst/>
+          </a:prstGeom>
+          <a:noFill/>
+        </p:spPr>
+        <p:txBody>
+          <a:bodyPr wrap="square">
+            <a:spAutoFit/>
+          </a:bodyPr>
+          <a:lstStyle/>
+          <a:p>
+            <a:pPr algn="l">
+              <a:defRPr sz="1400" b="0">
+                <a:solidFill>
+                  <a:srgbClr val="666666"/>
+                </a:solidFill>
+                <a:latin typeface="Helvetica"/>
+              </a:defRPr>
+            </a:pPr>
+            <a:r>
+              <a:t>脑 MRI 影像为痴呆预测提供独立且互补的预测价值</a:t>
+            </a:r>
+          </a:p>
+        </p:txBody>
+      </p:sp>
+      <p:sp>
+        <p:nvSpPr>
+          <p:cNvPr id="5" name="Rounded Rectangle 4"/>
+          <p:cNvSpPr/>
+          <p:nvPr/>
+        </p:nvSpPr>
+        <p:spPr>
+          <a:xfrm>
+            <a:off x="731520" y="1554480"/>
+            <a:ext cx="3474720" cy="1828800"/>
+          </a:xfrm>
+          <a:prstGeom prst="roundRect">
+            <a:avLst/>
+          </a:prstGeom>
+          <a:solidFill>
+            <a:srgbClr val="E8F0FE"/>
+          </a:solidFill>
+          <a:ln w="6350">
+            <a:solidFill>
+              <a:srgbClr val="DDDDDD"/>
+            </a:solidFill>
+          </a:ln>
+        </p:spPr>
+        <p:style>
+          <a:lnRef idx="1">
+            <a:schemeClr val="accent1"/>
+          </a:lnRef>
+          <a:fillRef idx="3">
+            <a:schemeClr val="accent1"/>
+          </a:fillRef>
+          <a:effectRef idx="2">
+            <a:schemeClr val="accent1"/>
+          </a:effectRef>
+          <a:fontRef idx="minor">
+            <a:schemeClr val="lt1"/>
+          </a:fontRef>
+        </p:style>
+        <p:txBody>
+          <a:bodyPr rtlCol="0" anchor="ctr"/>
+          <a:lstStyle/>
+          <a:p>
+            <a:pPr algn="ctr"/>
+          </a:p>
+        </p:txBody>
+      </p:sp>
+      <p:sp>
+        <p:nvSpPr>
+          <p:cNvPr id="6" name="TextBox 5"/>
+          <p:cNvSpPr txBox="1"/>
+          <p:nvPr/>
+        </p:nvSpPr>
+        <p:spPr>
+          <a:xfrm>
+            <a:off x="868680" y="1645920"/>
+            <a:ext cx="457200" cy="457200"/>
+          </a:xfrm>
+          <a:prstGeom prst="rect">
+            <a:avLst/>
+          </a:prstGeom>
+          <a:noFill/>
+        </p:spPr>
+        <p:txBody>
+          <a:bodyPr wrap="square">
+            <a:spAutoFit/>
+          </a:bodyPr>
+          <a:lstStyle/>
+          <a:p>
+            <a:pPr algn="l">
+              <a:defRPr sz="2800" b="1">
+                <a:solidFill>
+                  <a:srgbClr val="0066CC"/>
+                </a:solidFill>
+                <a:latin typeface="Helvetica"/>
+              </a:defRPr>
+            </a:pPr>
+            <a:r>
+              <a:t>←</a:t>
+            </a:r>
+          </a:p>
+        </p:txBody>
+      </p:sp>
+      <p:sp>
+        <p:nvSpPr>
+          <p:cNvPr id="7" name="TextBox 6"/>
+          <p:cNvSpPr txBox="1"/>
+          <p:nvPr/>
+        </p:nvSpPr>
+        <p:spPr>
+          <a:xfrm>
+            <a:off x="868680" y="2057400"/>
+            <a:ext cx="3200400" cy="320040"/>
+          </a:xfrm>
+          <a:prstGeom prst="rect">
+            <a:avLst/>
+          </a:prstGeom>
+          <a:noFill/>
+        </p:spPr>
+        <p:txBody>
+          <a:bodyPr wrap="square">
+            <a:spAutoFit/>
+          </a:bodyPr>
+          <a:lstStyle/>
+          <a:p>
+            <a:pPr algn="l">
+              <a:defRPr sz="1300" b="1">
+                <a:solidFill>
+                  <a:srgbClr val="1A1A2E"/>
+                </a:solidFill>
+                <a:latin typeface="Helvetica"/>
+              </a:defRPr>
+            </a:pPr>
+            <a:r>
+              <a:t>核心结论 1</a:t>
+            </a:r>
+          </a:p>
+        </p:txBody>
+      </p:sp>
+      <p:sp>
+        <p:nvSpPr>
+          <p:cNvPr id="8" name="TextBox 7"/>
+          <p:cNvSpPr txBox="1"/>
+          <p:nvPr/>
+        </p:nvSpPr>
+        <p:spPr>
+          <a:xfrm>
+            <a:off x="868680" y="2377440"/>
+            <a:ext cx="3200400" cy="914400"/>
+          </a:xfrm>
+          <a:prstGeom prst="rect">
+            <a:avLst/>
+          </a:prstGeom>
+          <a:noFill/>
+        </p:spPr>
+        <p:txBody>
+          <a:bodyPr wrap="square">
+            <a:spAutoFit/>
+          </a:bodyPr>
+          <a:lstStyle/>
+          <a:p>
+            <a:pPr>
+              <a:spcAft>
+                <a:spcPts val="200"/>
+              </a:spcAft>
+              <a:defRPr sz="1000" b="0">
+                <a:solidFill>
+                  <a:srgbClr val="666666"/>
+                </a:solidFill>
+                <a:latin typeface="Helvetica"/>
+              </a:defRPr>
+            </a:pPr>
+            <a:r>
+              <a:t>加入 2,176 个脑 MRI IDP 特征后，六个目标的预测性能全部提升。DM_full AUC 从 0.831→0.837 (+0.006)，AD_5yrs 从 0.667→0.851 (+0.184)。影像特征提供独立于临床特征的预测价值。</a:t>
+            </a:r>
+          </a:p>
+        </p:txBody>
+      </p:sp>
+      <p:sp>
+        <p:nvSpPr>
+          <p:cNvPr id="9" name="Rounded Rectangle 8"/>
+          <p:cNvSpPr/>
+          <p:nvPr/>
+        </p:nvSpPr>
+        <p:spPr>
+          <a:xfrm>
+            <a:off x="4572000" y="1554480"/>
+            <a:ext cx="3474720" cy="1828800"/>
+          </a:xfrm>
+          <a:prstGeom prst="roundRect">
+            <a:avLst/>
+          </a:prstGeom>
+          <a:solidFill>
+            <a:srgbClr val="E8F0FE"/>
+          </a:solidFill>
+          <a:ln w="6350">
+            <a:solidFill>
+              <a:srgbClr val="DDDDDD"/>
+            </a:solidFill>
+          </a:ln>
+        </p:spPr>
+        <p:style>
+          <a:lnRef idx="1">
+            <a:schemeClr val="accent1"/>
+          </a:lnRef>
+          <a:fillRef idx="3">
+            <a:schemeClr val="accent1"/>
+          </a:fillRef>
+          <a:effectRef idx="2">
+            <a:schemeClr val="accent1"/>
+          </a:effectRef>
+          <a:fontRef idx="minor">
+            <a:schemeClr val="lt1"/>
+          </a:fontRef>
+        </p:style>
+        <p:txBody>
+          <a:bodyPr rtlCol="0" anchor="ctr"/>
+          <a:lstStyle/>
+          <a:p>
+            <a:pPr algn="ctr"/>
+          </a:p>
+        </p:txBody>
+      </p:sp>
+      <p:sp>
+        <p:nvSpPr>
+          <p:cNvPr id="10" name="TextBox 9"/>
+          <p:cNvSpPr txBox="1"/>
+          <p:nvPr/>
+        </p:nvSpPr>
+        <p:spPr>
+          <a:xfrm>
+            <a:off x="4709160" y="1645920"/>
+            <a:ext cx="457200" cy="457200"/>
+          </a:xfrm>
+          <a:prstGeom prst="rect">
+            <a:avLst/>
+          </a:prstGeom>
+          <a:noFill/>
+        </p:spPr>
+        <p:txBody>
+          <a:bodyPr wrap="square">
+            <a:spAutoFit/>
+          </a:bodyPr>
+          <a:lstStyle/>
+          <a:p>
+            <a:pPr algn="l">
+              <a:defRPr sz="2800" b="1">
+                <a:solidFill>
+                  <a:srgbClr val="0066CC"/>
+                </a:solidFill>
+                <a:latin typeface="Helvetica"/>
+              </a:defRPr>
+            </a:pPr>
+            <a:r>
+              <a:t>←</a:t>
+            </a:r>
+          </a:p>
+        </p:txBody>
+      </p:sp>
+      <p:sp>
+        <p:nvSpPr>
+          <p:cNvPr id="11" name="TextBox 10"/>
+          <p:cNvSpPr txBox="1"/>
+          <p:nvPr/>
+        </p:nvSpPr>
+        <p:spPr>
+          <a:xfrm>
+            <a:off x="4709160" y="2057400"/>
+            <a:ext cx="3200400" cy="320040"/>
+          </a:xfrm>
+          <a:prstGeom prst="rect">
+            <a:avLst/>
+          </a:prstGeom>
+          <a:noFill/>
+        </p:spPr>
+        <p:txBody>
+          <a:bodyPr wrap="square">
+            <a:spAutoFit/>
+          </a:bodyPr>
+          <a:lstStyle/>
+          <a:p>
+            <a:pPr algn="l">
+              <a:defRPr sz="1300" b="1">
+                <a:solidFill>
+                  <a:srgbClr val="1A1A2E"/>
+                </a:solidFill>
+                <a:latin typeface="Helvetica"/>
+              </a:defRPr>
+            </a:pPr>
+            <a:r>
+              <a:t>核心结论 2</a:t>
+            </a:r>
+          </a:p>
+        </p:txBody>
+      </p:sp>
+      <p:sp>
+        <p:nvSpPr>
+          <p:cNvPr id="12" name="TextBox 11"/>
+          <p:cNvSpPr txBox="1"/>
+          <p:nvPr/>
+        </p:nvSpPr>
+        <p:spPr>
+          <a:xfrm>
+            <a:off x="4709160" y="2377440"/>
+            <a:ext cx="3200400" cy="914400"/>
+          </a:xfrm>
+          <a:prstGeom prst="rect">
+            <a:avLst/>
+          </a:prstGeom>
+          <a:noFill/>
+        </p:spPr>
+        <p:txBody>
+          <a:bodyPr wrap="square">
+            <a:spAutoFit/>
+          </a:bodyPr>
+          <a:lstStyle/>
+          <a:p>
+            <a:pPr>
+              <a:spcAft>
+                <a:spcPts val="200"/>
+              </a:spcAft>
+              <a:defRPr sz="1000" b="0">
+                <a:solidFill>
+                  <a:srgbClr val="666666"/>
+                </a:solidFill>
+                <a:latin typeface="Helvetica"/>
+              </a:defRPr>
+            </a:pPr>
+            <a:r>
+              <a:t>海马下托体积 (Field 26643) 是唯一被 SFS 选中的脑结构影像特征。它作为阿尔茨海默病最早的病理标志之一，对 AD 目标的提升远大于 DM 目标，验证了其生物学合理性。</a:t>
+            </a:r>
+          </a:p>
+        </p:txBody>
+      </p:sp>
+      <p:sp>
+        <p:nvSpPr>
+          <p:cNvPr id="13" name="Rounded Rectangle 12"/>
+          <p:cNvSpPr/>
+          <p:nvPr/>
+        </p:nvSpPr>
+        <p:spPr>
+          <a:xfrm>
+            <a:off x="8412480" y="1554480"/>
+            <a:ext cx="3474720" cy="1828800"/>
+          </a:xfrm>
+          <a:prstGeom prst="roundRect">
+            <a:avLst/>
+          </a:prstGeom>
+          <a:solidFill>
+            <a:srgbClr val="E8F0FE"/>
+          </a:solidFill>
+          <a:ln w="6350">
+            <a:solidFill>
+              <a:srgbClr val="DDDDDD"/>
+            </a:solidFill>
+          </a:ln>
+        </p:spPr>
+        <p:style>
+          <a:lnRef idx="1">
+            <a:schemeClr val="accent1"/>
+          </a:lnRef>
+          <a:fillRef idx="3">
+            <a:schemeClr val="accent1"/>
+          </a:fillRef>
+          <a:effectRef idx="2">
+            <a:schemeClr val="accent1"/>
+          </a:effectRef>
+          <a:fontRef idx="minor">
+            <a:schemeClr val="lt1"/>
+          </a:fontRef>
+        </p:style>
+        <p:txBody>
+          <a:bodyPr rtlCol="0" anchor="ctr"/>
+          <a:lstStyle/>
+          <a:p>
+            <a:pPr algn="ctr"/>
+          </a:p>
+        </p:txBody>
+      </p:sp>
+      <p:sp>
+        <p:nvSpPr>
+          <p:cNvPr id="14" name="TextBox 13"/>
+          <p:cNvSpPr txBox="1"/>
+          <p:nvPr/>
+        </p:nvSpPr>
+        <p:spPr>
+          <a:xfrm>
+            <a:off x="8549640" y="1645920"/>
+            <a:ext cx="457200" cy="457200"/>
+          </a:xfrm>
+          <a:prstGeom prst="rect">
+            <a:avLst/>
+          </a:prstGeom>
+          <a:noFill/>
+        </p:spPr>
+        <p:txBody>
+          <a:bodyPr wrap="square">
+            <a:spAutoFit/>
+          </a:bodyPr>
+          <a:lstStyle/>
+          <a:p>
+            <a:pPr algn="l">
+              <a:defRPr sz="2800" b="1">
+                <a:solidFill>
+                  <a:srgbClr val="0066CC"/>
+                </a:solidFill>
+                <a:latin typeface="Helvetica"/>
+              </a:defRPr>
+            </a:pPr>
+            <a:r>
+              <a:t>←</a:t>
+            </a:r>
+          </a:p>
+        </p:txBody>
+      </p:sp>
+      <p:sp>
+        <p:nvSpPr>
+          <p:cNvPr id="15" name="TextBox 14"/>
+          <p:cNvSpPr txBox="1"/>
+          <p:nvPr/>
+        </p:nvSpPr>
+        <p:spPr>
+          <a:xfrm>
+            <a:off x="8549640" y="2057400"/>
+            <a:ext cx="3200400" cy="320040"/>
+          </a:xfrm>
+          <a:prstGeom prst="rect">
+            <a:avLst/>
+          </a:prstGeom>
+          <a:noFill/>
+        </p:spPr>
+        <p:txBody>
+          <a:bodyPr wrap="square">
+            <a:spAutoFit/>
+          </a:bodyPr>
+          <a:lstStyle/>
+          <a:p>
+            <a:pPr algn="l">
+              <a:defRPr sz="1300" b="1">
+                <a:solidFill>
+                  <a:srgbClr val="1A1A2E"/>
+                </a:solidFill>
+                <a:latin typeface="Helvetica"/>
+              </a:defRPr>
+            </a:pPr>
+            <a:r>
+              <a:t>核心结论 3</a:t>
+            </a:r>
+          </a:p>
+        </p:txBody>
+      </p:sp>
+      <p:sp>
+        <p:nvSpPr>
+          <p:cNvPr id="16" name="TextBox 15"/>
+          <p:cNvSpPr txBox="1"/>
+          <p:nvPr/>
+        </p:nvSpPr>
+        <p:spPr>
+          <a:xfrm>
+            <a:off x="8549640" y="2377440"/>
+            <a:ext cx="3200400" cy="914400"/>
+          </a:xfrm>
+          <a:prstGeom prst="rect">
+            <a:avLst/>
+          </a:prstGeom>
+          <a:noFill/>
+        </p:spPr>
+        <p:txBody>
+          <a:bodyPr wrap="square">
+            <a:spAutoFit/>
+          </a:bodyPr>
+          <a:lstStyle/>
+          <a:p>
+            <a:pPr>
+              <a:spcAft>
+                <a:spcPts val="200"/>
+              </a:spcAft>
+              <a:defRPr sz="1000" b="0">
+                <a:solidFill>
+                  <a:srgbClr val="666666"/>
+                </a:solidFill>
+                <a:latin typeface="Helvetica"/>
+              </a:defRPr>
+            </a:pPr>
+            <a:r>
+              <a:t>Deploy 策略有效。DM_full 选出的 10 个特征在全部 6 个目标上表现良好，且均优于无影像版本。AD_5yrs 从完全失败恢复到可用水平，证明影像特征有跨目标泛化能力。</a:t>
+            </a:r>
+          </a:p>
+        </p:txBody>
+      </p:sp>
+      <p:sp>
+        <p:nvSpPr>
+          <p:cNvPr id="17" name="Rounded Rectangle 16"/>
+          <p:cNvSpPr/>
+          <p:nvPr/>
+        </p:nvSpPr>
+        <p:spPr>
+          <a:xfrm>
+            <a:off x="731520" y="3657600"/>
+            <a:ext cx="3474720" cy="1828800"/>
+          </a:xfrm>
+          <a:prstGeom prst="roundRect">
+            <a:avLst/>
+          </a:prstGeom>
+          <a:solidFill>
+            <a:srgbClr val="E8F0FE"/>
+          </a:solidFill>
+          <a:ln w="6350">
+            <a:solidFill>
+              <a:srgbClr val="DDDDDD"/>
+            </a:solidFill>
+          </a:ln>
+        </p:spPr>
+        <p:style>
+          <a:lnRef idx="1">
+            <a:schemeClr val="accent1"/>
+          </a:lnRef>
+          <a:fillRef idx="3">
+            <a:schemeClr val="accent1"/>
+          </a:fillRef>
+          <a:effectRef idx="2">
+            <a:schemeClr val="accent1"/>
+          </a:effectRef>
+          <a:fontRef idx="minor">
+            <a:schemeClr val="lt1"/>
+          </a:fontRef>
+        </p:style>
+        <p:txBody>
+          <a:bodyPr rtlCol="0" anchor="ctr"/>
+          <a:lstStyle/>
+          <a:p>
+            <a:pPr algn="ctr"/>
+          </a:p>
+        </p:txBody>
+      </p:sp>
+      <p:sp>
+        <p:nvSpPr>
+          <p:cNvPr id="18" name="TextBox 17"/>
+          <p:cNvSpPr txBox="1"/>
+          <p:nvPr/>
+        </p:nvSpPr>
+        <p:spPr>
+          <a:xfrm>
+            <a:off x="868680" y="3749039"/>
+            <a:ext cx="457200" cy="457200"/>
+          </a:xfrm>
+          <a:prstGeom prst="rect">
+            <a:avLst/>
+          </a:prstGeom>
+          <a:noFill/>
+        </p:spPr>
+        <p:txBody>
+          <a:bodyPr wrap="square">
+            <a:spAutoFit/>
+          </a:bodyPr>
+          <a:lstStyle/>
+          <a:p>
+            <a:pPr algn="l">
+              <a:defRPr sz="2800" b="1">
+                <a:solidFill>
+                  <a:srgbClr val="0066CC"/>
+                </a:solidFill>
+                <a:latin typeface="Helvetica"/>
+              </a:defRPr>
+            </a:pPr>
+            <a:r>
+              <a:t>←</a:t>
+            </a:r>
+          </a:p>
+        </p:txBody>
+      </p:sp>
+      <p:sp>
+        <p:nvSpPr>
+          <p:cNvPr id="19" name="TextBox 18"/>
+          <p:cNvSpPr txBox="1"/>
+          <p:nvPr/>
+        </p:nvSpPr>
+        <p:spPr>
+          <a:xfrm>
+            <a:off x="868680" y="4160520"/>
+            <a:ext cx="3200400" cy="320040"/>
+          </a:xfrm>
+          <a:prstGeom prst="rect">
+            <a:avLst/>
+          </a:prstGeom>
+          <a:noFill/>
+        </p:spPr>
+        <p:txBody>
+          <a:bodyPr wrap="square">
+            <a:spAutoFit/>
+          </a:bodyPr>
+          <a:lstStyle/>
+          <a:p>
+            <a:pPr algn="l">
+              <a:defRPr sz="1300" b="1">
+                <a:solidFill>
+                  <a:srgbClr val="1A1A2E"/>
+                </a:solidFill>
+                <a:latin typeface="Helvetica"/>
+              </a:defRPr>
+            </a:pPr>
+            <a:r>
+              <a:t>核心结论 4</a:t>
+            </a:r>
+          </a:p>
+        </p:txBody>
+      </p:sp>
+      <p:sp>
+        <p:nvSpPr>
+          <p:cNvPr id="20" name="TextBox 19"/>
+          <p:cNvSpPr txBox="1"/>
+          <p:nvPr/>
+        </p:nvSpPr>
+        <p:spPr>
+          <a:xfrm>
+            <a:off x="868680" y="4480560"/>
+            <a:ext cx="3200400" cy="914400"/>
+          </a:xfrm>
+          <a:prstGeom prst="rect">
+            <a:avLst/>
+          </a:prstGeom>
+          <a:noFill/>
+        </p:spPr>
+        <p:txBody>
+          <a:bodyPr wrap="square">
+            <a:spAutoFit/>
+          </a:bodyPr>
+          <a:lstStyle/>
+          <a:p>
+            <a:pPr>
+              <a:spcAft>
+                <a:spcPts val="200"/>
+              </a:spcAft>
+              <a:defRPr sz="1000" b="0">
+                <a:solidFill>
+                  <a:srgbClr val="666666"/>
+                </a:solidFill>
+                <a:latin typeface="Helvetica"/>
+              </a:defRPr>
+            </a:pPr>
+            <a:r>
+              <a:t>脑 MRI 弥补了约 35% 的基因数据缺失差距。ApoEε4 + PRS 仍是最大的未获取数据源。影像+基因组合有望超越原论文性能。LightGBM 原生 NaN 处理使高缺失率特征的使用成为可能。</a:t>
+            </a:r>
+          </a:p>
+        </p:txBody>
+      </p:sp>
+      <p:sp>
+        <p:nvSpPr>
+          <p:cNvPr id="21" name="Rounded Rectangle 20"/>
+          <p:cNvSpPr/>
+          <p:nvPr/>
+        </p:nvSpPr>
+        <p:spPr>
+          <a:xfrm>
+            <a:off x="4572000" y="3657600"/>
+            <a:ext cx="3474720" cy="1828800"/>
+          </a:xfrm>
+          <a:prstGeom prst="roundRect">
+            <a:avLst/>
+          </a:prstGeom>
+          <a:solidFill>
+            <a:srgbClr val="E8F0FE"/>
+          </a:solidFill>
+          <a:ln w="6350">
+            <a:solidFill>
+              <a:srgbClr val="DDDDDD"/>
+            </a:solidFill>
+          </a:ln>
+        </p:spPr>
+        <p:style>
+          <a:lnRef idx="1">
+            <a:schemeClr val="accent1"/>
+          </a:lnRef>
+          <a:fillRef idx="3">
+            <a:schemeClr val="accent1"/>
+          </a:fillRef>
+          <a:effectRef idx="2">
+            <a:schemeClr val="accent1"/>
+          </a:effectRef>
+          <a:fontRef idx="minor">
+            <a:schemeClr val="lt1"/>
+          </a:fontRef>
+        </p:style>
+        <p:txBody>
+          <a:bodyPr rtlCol="0" anchor="ctr"/>
+          <a:lstStyle/>
+          <a:p>
+            <a:pPr algn="ctr"/>
+          </a:p>
+        </p:txBody>
+      </p:sp>
+      <p:sp>
+        <p:nvSpPr>
+          <p:cNvPr id="22" name="TextBox 21"/>
+          <p:cNvSpPr txBox="1"/>
+          <p:nvPr/>
+        </p:nvSpPr>
+        <p:spPr>
+          <a:xfrm>
+            <a:off x="4709160" y="3749039"/>
+            <a:ext cx="457200" cy="457200"/>
+          </a:xfrm>
+          <a:prstGeom prst="rect">
+            <a:avLst/>
+          </a:prstGeom>
+          <a:noFill/>
+        </p:spPr>
+        <p:txBody>
+          <a:bodyPr wrap="square">
+            <a:spAutoFit/>
+          </a:bodyPr>
+          <a:lstStyle/>
+          <a:p>
+            <a:pPr algn="l">
+              <a:defRPr sz="2800" b="1">
+                <a:solidFill>
+                  <a:srgbClr val="0066CC"/>
+                </a:solidFill>
+                <a:latin typeface="Helvetica"/>
+              </a:defRPr>
+            </a:pPr>
+            <a:r>
+              <a:t>→</a:t>
+            </a:r>
+          </a:p>
+        </p:txBody>
+      </p:sp>
+      <p:sp>
+        <p:nvSpPr>
+          <p:cNvPr id="23" name="TextBox 22"/>
+          <p:cNvSpPr txBox="1"/>
+          <p:nvPr/>
+        </p:nvSpPr>
+        <p:spPr>
+          <a:xfrm>
+            <a:off x="4709160" y="4160520"/>
+            <a:ext cx="3200400" cy="320040"/>
+          </a:xfrm>
+          <a:prstGeom prst="rect">
+            <a:avLst/>
+          </a:prstGeom>
+          <a:noFill/>
+        </p:spPr>
+        <p:txBody>
+          <a:bodyPr wrap="square">
+            <a:spAutoFit/>
+          </a:bodyPr>
+          <a:lstStyle/>
+          <a:p>
+            <a:pPr algn="l">
+              <a:defRPr sz="1300" b="1">
+                <a:solidFill>
+                  <a:srgbClr val="1A1A2E"/>
+                </a:solidFill>
+                <a:latin typeface="Helvetica"/>
+              </a:defRPr>
+            </a:pPr>
+            <a:r>
+              <a:t>下一步 1: 获取 ApoEε4</a:t>
+            </a:r>
+          </a:p>
+        </p:txBody>
+      </p:sp>
+      <p:sp>
+        <p:nvSpPr>
+          <p:cNvPr id="24" name="TextBox 23"/>
+          <p:cNvSpPr txBox="1"/>
+          <p:nvPr/>
+        </p:nvSpPr>
+        <p:spPr>
+          <a:xfrm>
+            <a:off x="4709160" y="4480560"/>
+            <a:ext cx="3200400" cy="914400"/>
+          </a:xfrm>
+          <a:prstGeom prst="rect">
+            <a:avLst/>
+          </a:prstGeom>
+          <a:noFill/>
+        </p:spPr>
+        <p:txBody>
+          <a:bodyPr wrap="square">
+            <a:spAutoFit/>
+          </a:bodyPr>
+          <a:lstStyle/>
+          <a:p>
+            <a:pPr>
+              <a:spcAft>
+                <a:spcPts val="200"/>
+              </a:spcAft>
+              <a:defRPr sz="1000" b="0">
+                <a:solidFill>
+                  <a:srgbClr val="666666"/>
+                </a:solidFill>
+                <a:latin typeface="Helvetica"/>
+              </a:defRPr>
+            </a:pPr>
+            <a:r>
+              <a:t>向 UKB 申请 Field 23180 或从 SNP 数据计算 ε4 携带状态。预计加入后 DM_full AUC 可达 ~0.85，AD_full 可达 ~0.87，达到或超越原论文水平。</a:t>
+            </a:r>
+          </a:p>
+        </p:txBody>
+      </p:sp>
+      <p:sp>
+        <p:nvSpPr>
+          <p:cNvPr id="25" name="Rounded Rectangle 24"/>
+          <p:cNvSpPr/>
+          <p:nvPr/>
+        </p:nvSpPr>
+        <p:spPr>
+          <a:xfrm>
+            <a:off x="8412480" y="3657600"/>
+            <a:ext cx="3474720" cy="1828800"/>
+          </a:xfrm>
+          <a:prstGeom prst="roundRect">
+            <a:avLst/>
+          </a:prstGeom>
+          <a:solidFill>
+            <a:srgbClr val="E8F0FE"/>
+          </a:solidFill>
+          <a:ln w="6350">
+            <a:solidFill>
+              <a:srgbClr val="DDDDDD"/>
+            </a:solidFill>
+          </a:ln>
+        </p:spPr>
+        <p:style>
+          <a:lnRef idx="1">
+            <a:schemeClr val="accent1"/>
+          </a:lnRef>
+          <a:fillRef idx="3">
+            <a:schemeClr val="accent1"/>
+          </a:fillRef>
+          <a:effectRef idx="2">
+            <a:schemeClr val="accent1"/>
+          </a:effectRef>
+          <a:fontRef idx="minor">
+            <a:schemeClr val="lt1"/>
+          </a:fontRef>
+        </p:style>
+        <p:txBody>
+          <a:bodyPr rtlCol="0" anchor="ctr"/>
+          <a:lstStyle/>
+          <a:p>
+            <a:pPr algn="ctr"/>
+          </a:p>
+        </p:txBody>
+      </p:sp>
+      <p:sp>
+        <p:nvSpPr>
+          <p:cNvPr id="26" name="TextBox 25"/>
+          <p:cNvSpPr txBox="1"/>
+          <p:nvPr/>
+        </p:nvSpPr>
+        <p:spPr>
+          <a:xfrm>
+            <a:off x="8549640" y="3749039"/>
+            <a:ext cx="457200" cy="457200"/>
+          </a:xfrm>
+          <a:prstGeom prst="rect">
+            <a:avLst/>
+          </a:prstGeom>
+          <a:noFill/>
+        </p:spPr>
+        <p:txBody>
+          <a:bodyPr wrap="square">
+            <a:spAutoFit/>
+          </a:bodyPr>
+          <a:lstStyle/>
+          <a:p>
+            <a:pPr algn="l">
+              <a:defRPr sz="2800" b="1">
+                <a:solidFill>
+                  <a:srgbClr val="0066CC"/>
+                </a:solidFill>
+                <a:latin typeface="Helvetica"/>
+              </a:defRPr>
+            </a:pPr>
+            <a:r>
+              <a:t>→</a:t>
+            </a:r>
+          </a:p>
+        </p:txBody>
+      </p:sp>
+      <p:sp>
+        <p:nvSpPr>
+          <p:cNvPr id="27" name="TextBox 26"/>
+          <p:cNvSpPr txBox="1"/>
+          <p:nvPr/>
+        </p:nvSpPr>
+        <p:spPr>
+          <a:xfrm>
+            <a:off x="8549640" y="4160520"/>
+            <a:ext cx="3200400" cy="320040"/>
+          </a:xfrm>
+          <a:prstGeom prst="rect">
+            <a:avLst/>
+          </a:prstGeom>
+          <a:noFill/>
+        </p:spPr>
+        <p:txBody>
+          <a:bodyPr wrap="square">
+            <a:spAutoFit/>
+          </a:bodyPr>
+          <a:lstStyle/>
+          <a:p>
+            <a:pPr algn="l">
+              <a:defRPr sz="1300" b="1">
+                <a:solidFill>
+                  <a:srgbClr val="1A1A2E"/>
+                </a:solidFill>
+                <a:latin typeface="Helvetica"/>
+              </a:defRPr>
+            </a:pPr>
+            <a:r>
+              <a:t>下一步 2: 完整训练</a:t>
+            </a:r>
+          </a:p>
+        </p:txBody>
+      </p:sp>
+      <p:sp>
+        <p:nvSpPr>
+          <p:cNvPr id="28" name="TextBox 27"/>
+          <p:cNvSpPr txBox="1"/>
+          <p:nvPr/>
+        </p:nvSpPr>
+        <p:spPr>
+          <a:xfrm>
+            <a:off x="8549640" y="4480560"/>
+            <a:ext cx="3200400" cy="914400"/>
+          </a:xfrm>
+          <a:prstGeom prst="rect">
+            <a:avLst/>
+          </a:prstGeom>
+          <a:noFill/>
+        </p:spPr>
+        <p:txBody>
+          <a:bodyPr wrap="square">
+            <a:spAutoFit/>
+          </a:bodyPr>
+          <a:lstStyle/>
+          <a:p>
+            <a:pPr>
+              <a:spcAft>
+                <a:spcPts val="200"/>
+              </a:spcAft>
+              <a:defRPr sz="1000" b="0">
+                <a:solidFill>
+                  <a:srgbClr val="666666"/>
+                </a:solidFill>
+                <a:latin typeface="Helvetica"/>
+              </a:defRPr>
+            </a:pPr>
+            <a:r>
+              <a:t>1. 各目标独立 s01-s05 (非 Deploy)</a:t>
+            </a:r>
+            <a:br/>
+            <a:r>
+              <a:t>2. 全 1,000 HP combos</a:t>
+            </a:r>
+            <a:br/>
+            <a:r>
+              <a:t>3. 影像子集独立训练 (n=46,384)</a:t>
+            </a:r>
+            <a:br/>
+            <a:r>
+              <a:t>4. SHAP 特征交互分析</a:t>
+            </a:r>
+            <a:br/>
+            <a:r>
+              <a:t>5. 外部验证 (80/20 留出法)</a:t>
+            </a:r>
+          </a:p>
+        </p:txBody>
+      </p:sp>
+      <p:sp>
+        <p:nvSpPr>
+          <p:cNvPr id="29" name="TextBox 28"/>
+          <p:cNvSpPr txBox="1"/>
+          <p:nvPr/>
+        </p:nvSpPr>
+        <p:spPr>
+          <a:xfrm>
+            <a:off x="10972800" y="6492240"/>
+            <a:ext cx="914400" cy="274320"/>
+          </a:xfrm>
+          <a:prstGeom prst="rect">
+            <a:avLst/>
+          </a:prstGeom>
+          <a:noFill/>
+        </p:spPr>
+        <p:txBody>
+          <a:bodyPr wrap="square">
+            <a:spAutoFit/>
+          </a:bodyPr>
+          <a:lstStyle/>
+          <a:p>
+            <a:pPr algn="r">
+              <a:defRPr sz="900" b="0">
+                <a:solidFill>
+                  <a:srgbClr val="666666"/>
+                </a:solidFill>
+                <a:latin typeface="Helvetica"/>
+              </a:defRPr>
+            </a:pPr>
+            <a:r>
+              <a:t>14/14</a:t>
+            </a:r>
+          </a:p>
+        </p:txBody>
+      </p:sp>
+    </p:spTree>
+  </p:cSld>
+  <p:clrMapOvr>
+    <a:masterClrMapping/>
+  </p:clrMapOvr>
+</p:sld>
+</file>
+
+<file path=ppt/slides/slide14.xml><?xml version="1.0" encoding="utf-8"?>
+<p:sld xmlns:a="http://schemas.openxmlformats.org/drawingml/2006/main" xmlns:p="http://schemas.openxmlformats.org/presentationml/2006/main" xmlns:r="http://schemas.openxmlformats.org/officeDocument/2006/relationships">
+  <p:cSld>
+    <p:bg>
+      <p:bgPr>
+        <a:solidFill>
+          <a:srgbClr val="FFFFFF"/>
+        </a:solidFill>
+        <a:effectLst/>
+      </p:bgPr>
+    </p:bg>
+    <p:spTree>
+      <p:nvGrpSpPr>
+        <p:cNvPr id="1" name=""/>
+        <p:cNvGrpSpPr/>
+        <p:nvPr/>
+      </p:nvGrpSpPr>
+      <p:grpSpPr/>
+      <p:sp>
+        <p:nvSpPr>
+          <p:cNvPr id="2" name="Rectangle 1"/>
+          <p:cNvSpPr/>
+          <p:nvPr/>
+        </p:nvSpPr>
+        <p:spPr>
+          <a:xfrm>
+            <a:off x="0" y="0"/>
+            <a:ext cx="12191695" cy="73152"/>
+          </a:xfrm>
+          <a:prstGeom prst="rect">
+            <a:avLst/>
+          </a:prstGeom>
+          <a:solidFill>
+            <a:srgbClr val="0066CC"/>
+          </a:solidFill>
+          <a:ln>
+            <a:noFill/>
+          </a:ln>
+        </p:spPr>
+        <p:style>
+          <a:lnRef idx="1">
+            <a:schemeClr val="accent1"/>
+          </a:lnRef>
+          <a:fillRef idx="3">
+            <a:schemeClr val="accent1"/>
+          </a:fillRef>
+          <a:effectRef idx="2">
+            <a:schemeClr val="accent1"/>
+          </a:effectRef>
+          <a:fontRef idx="minor">
+            <a:schemeClr val="lt1"/>
+          </a:fontRef>
+        </p:style>
+        <p:txBody>
+          <a:bodyPr rtlCol="0" anchor="ctr"/>
+          <a:lstStyle/>
+          <a:p>
+            <a:pPr algn="ctr"/>
+          </a:p>
+        </p:txBody>
+      </p:sp>
+      <p:sp>
+        <p:nvSpPr>
+          <p:cNvPr id="3" name="TextBox 2"/>
+          <p:cNvSpPr txBox="1"/>
+          <p:nvPr/>
+        </p:nvSpPr>
+        <p:spPr>
+          <a:xfrm>
             <a:off x="914400" y="2286000"/>
             <a:ext cx="10332720" cy="914400"/>
           </a:xfrm>
@@ -6838,7 +8076,7 @@
               </a:defRPr>
             </a:pPr>
             <a:r>
-              <a:t>13/13</a:t>
+              <a:t>14/14</a:t>
             </a:r>
           </a:p>
         </p:txBody>
@@ -8563,7 +9801,7 @@
               </a:defRPr>
             </a:pPr>
             <a:r>
-              <a:t>2/13</a:t>
+              <a:t>2/14</a:t>
             </a:r>
           </a:p>
         </p:txBody>
@@ -10264,7 +11502,7 @@
               </a:defRPr>
             </a:pPr>
             <a:r>
-              <a:t>3/13</a:t>
+              <a:t>3/14</a:t>
             </a:r>
           </a:p>
         </p:txBody>
@@ -12972,7 +14210,7 @@
               </a:defRPr>
             </a:pPr>
             <a:r>
-              <a:t>4/13</a:t>
+              <a:t>4/14</a:t>
             </a:r>
           </a:p>
         </p:txBody>
@@ -13785,7 +15023,7 @@
               </a:defRPr>
             </a:pPr>
             <a:r>
-              <a:t>5/13</a:t>
+              <a:t>5/14</a:t>
             </a:r>
           </a:p>
         </p:txBody>
@@ -15283,7 +16521,7 @@
               </a:defRPr>
             </a:pPr>
             <a:r>
-              <a:t>6/13</a:t>
+              <a:t>6/14</a:t>
             </a:r>
           </a:p>
         </p:txBody>
@@ -16644,7 +17882,7 @@
               </a:defRPr>
             </a:pPr>
             <a:r>
-              <a:t>7/13</a:t>
+              <a:t>7/14</a:t>
             </a:r>
           </a:p>
         </p:txBody>
@@ -16749,7 +17987,7 @@
               </a:defRPr>
             </a:pPr>
             <a:r>
-              <a:t>影像特征提升效果对比</a:t>
+              <a:t>影像子集分析: 为什么不能用仅 MRI 人群独立训练</a:t>
             </a:r>
           </a:p>
         </p:txBody>
@@ -16785,22 +18023,58 @@
               </a:defRPr>
             </a:pPr>
             <a:r>
-              <a:t>六个目标加入脑 MRI 前后 AUC 变化</a:t>
+              <a:t>影像子集的严重健康志愿者偏差使独立训练不可行</a:t>
+            </a:r>
+          </a:p>
+        </p:txBody>
+      </p:sp>
+      <p:sp>
+        <p:nvSpPr>
+          <p:cNvPr id="5" name="TextBox 4"/>
+          <p:cNvSpPr txBox="1"/>
+          <p:nvPr/>
+        </p:nvSpPr>
+        <p:spPr>
+          <a:xfrm>
+            <a:off x="731520" y="1554480"/>
+            <a:ext cx="10515600" cy="365760"/>
+          </a:xfrm>
+          <a:prstGeom prst="rect">
+            <a:avLst/>
+          </a:prstGeom>
+          <a:noFill/>
+        </p:spPr>
+        <p:txBody>
+          <a:bodyPr wrap="square">
+            <a:spAutoFit/>
+          </a:bodyPr>
+          <a:lstStyle/>
+          <a:p>
+            <a:pPr algn="l">
+              <a:defRPr sz="1600" b="1">
+                <a:solidFill>
+                  <a:srgbClr val="0066CC"/>
+                </a:solidFill>
+                <a:latin typeface="Helvetica"/>
+              </a:defRPr>
+            </a:pPr>
+            <a:r>
+              <a:t>队列对比: 全队列 vs 影像子集</a:t>
             </a:r>
           </a:p>
         </p:txBody>
       </p:sp>
       <p:graphicFrame>
         <p:nvGraphicFramePr>
-          <p:cNvPr id="5" name="Table 4"/>
+          <p:cNvPr id="6" name="Table 5"/>
           <p:cNvGraphicFramePr>
             <a:graphicFrameLocks noGrp="1"/>
           </p:cNvGraphicFramePr>
           <p:nvPr/>
         </p:nvGraphicFramePr>
         <p:xfrm>
-          <a:off x="731520" y="1554480"/>
-          <a:ext cx="10972800" cy="2240279"/>
+          <a:off x="731520" y="1920240"/>
+          <a:ext cx="11430000" cy="2560320"/>
         </p:xfrm>
         <a:graphic>
           <a:graphicData uri="http://schemas.openxmlformats.org/drawingml/2006/table">
@@ -16809,20 +18083,20 @@
                 <a:tableStyleId>{5C22544A-7EE6-4342-B048-85BDC9FD1C3A}</a:tableStyleId>
               </a:tblPr>
               <a:tblGrid>
-                <a:gridCol w="1828800"/>
+                <a:gridCol w="2286000"/>
                 <a:gridCol w="2286000"/>
                 <a:gridCol w="2286000"/>
                 <a:gridCol w="2286000"/>
                 <a:gridCol w="2286000"/>
               </a:tblGrid>
-              <a:tr h="320039">
-                <a:tc>
-                  <a:txBody>
-                    <a:bodyPr/>
-                    <a:lstStyle/>
-                    <a:p>
-                      <a:pPr algn="ctr">
-                        <a:defRPr sz="1100" b="1">
+              <a:tr h="320040">
+                <a:tc>
+                  <a:txBody>
+                    <a:bodyPr/>
+                    <a:lstStyle/>
+                    <a:p>
+                      <a:pPr algn="ctr">
+                        <a:defRPr sz="900" b="1">
                           <a:solidFill>
                             <a:srgbClr val="FFFFFF"/>
                           </a:solidFill>
@@ -16830,7 +18104,7 @@
                         </a:defRPr>
                       </a:pPr>
                       <a:r>
-                        <a:t>目标</a:t>
+                        <a:t>指标</a:t>
                       </a:r>
                     </a:p>
                   </a:txBody>
@@ -16846,7 +18120,7 @@
                     <a:lstStyle/>
                     <a:p>
                       <a:pPr algn="ctr">
-                        <a:defRPr sz="1100" b="1">
+                        <a:defRPr sz="900" b="1">
                           <a:solidFill>
                             <a:srgbClr val="FFFFFF"/>
                           </a:solidFill>
@@ -16854,7 +18128,7 @@
                         </a:defRPr>
                       </a:pPr>
                       <a:r>
-                        <a:t>复现 AUC (无影像)</a:t>
+                        <a:t>全队列 (Deploy)</a:t>
                       </a:r>
                     </a:p>
                   </a:txBody>
@@ -16870,7 +18144,7 @@
                     <a:lstStyle/>
                     <a:p>
                       <a:pPr algn="ctr">
-                        <a:defRPr sz="1100" b="1">
+                        <a:defRPr sz="900" b="1">
                           <a:solidFill>
                             <a:srgbClr val="FFFFFF"/>
                           </a:solidFill>
@@ -16878,7 +18152,7 @@
                         </a:defRPr>
                       </a:pPr>
                       <a:r>
-                        <a:t>+ 脑 MRI AUC</a:t>
+                        <a:t>影像子集 (独立SFS)</a:t>
                       </a:r>
                     </a:p>
                   </a:txBody>
@@ -16894,7 +18168,7 @@
                     <a:lstStyle/>
                     <a:p>
                       <a:pPr algn="ctr">
-                        <a:defRPr sz="1100" b="1">
+                        <a:defRPr sz="900" b="1">
                           <a:solidFill>
                             <a:srgbClr val="FFFFFF"/>
                           </a:solidFill>
@@ -16902,7 +18176,7 @@
                         </a:defRPr>
                       </a:pPr>
                       <a:r>
-                        <a:t>Δ AUC</a:t>
+                        <a:t>差异</a:t>
                       </a:r>
                     </a:p>
                   </a:txBody>
@@ -16918,7 +18192,7 @@
                     <a:lstStyle/>
                     <a:p>
                       <a:pPr algn="ctr">
-                        <a:defRPr sz="1100" b="1">
+                        <a:defRPr sz="900" b="1">
                           <a:solidFill>
                             <a:srgbClr val="FFFFFF"/>
                           </a:solidFill>
@@ -16926,7 +18200,7 @@
                         </a:defRPr>
                       </a:pPr>
                       <a:r>
-                        <a:t>提升幅度</a:t>
+                        <a:t>影响</a:t>
                       </a:r>
                     </a:p>
                   </a:txBody>
@@ -16937,22 +18211,22 @@
                   </a:tcPr>
                 </a:tc>
               </a:tr>
-              <a:tr h="320039">
-                <a:tc>
-                  <a:txBody>
-                    <a:bodyPr/>
-                    <a:lstStyle/>
-                    <a:p>
-                      <a:pPr algn="ctr">
-                        <a:defRPr sz="1100">
-                          <a:solidFill>
-                            <a:srgbClr val="1A1A2E"/>
-                          </a:solidFill>
-                          <a:latin typeface="Helvetica"/>
-                        </a:defRPr>
-                      </a:pPr>
-                      <a:r>
-                        <a:t>DM_full</a:t>
+              <a:tr h="320040">
+                <a:tc>
+                  <a:txBody>
+                    <a:bodyPr/>
+                    <a:lstStyle/>
+                    <a:p>
+                      <a:pPr algn="ctr">
+                        <a:defRPr sz="900">
+                          <a:solidFill>
+                            <a:srgbClr val="1A1A2E"/>
+                          </a:solidFill>
+                          <a:latin typeface="Helvetica"/>
+                        </a:defRPr>
+                      </a:pPr>
+                      <a:r>
+                        <a:t>参与者</a:t>
                       </a:r>
                     </a:p>
                   </a:txBody>
@@ -16968,15 +18242,15 @@
                     <a:lstStyle/>
                     <a:p>
                       <a:pPr algn="ctr">
-                        <a:defRPr sz="1100">
-                          <a:solidFill>
-                            <a:srgbClr val="1A1A2E"/>
-                          </a:solidFill>
-                          <a:latin typeface="Helvetica"/>
-                        </a:defRPr>
-                      </a:pPr>
-                      <a:r>
-                        <a:t>0.831</a:t>
+                        <a:defRPr sz="900">
+                          <a:solidFill>
+                            <a:srgbClr val="1A1A2E"/>
+                          </a:solidFill>
+                          <a:latin typeface="Helvetica"/>
+                        </a:defRPr>
+                      </a:pPr>
+                      <a:r>
+                        <a:t>494,658</a:t>
                       </a:r>
                     </a:p>
                   </a:txBody>
@@ -16992,15 +18266,15 @@
                     <a:lstStyle/>
                     <a:p>
                       <a:pPr algn="ctr">
-                        <a:defRPr sz="1100">
-                          <a:solidFill>
-                            <a:srgbClr val="1A1A2E"/>
-                          </a:solidFill>
-                          <a:latin typeface="Helvetica"/>
-                        </a:defRPr>
-                      </a:pPr>
-                      <a:r>
-                        <a:t>0.837</a:t>
+                        <a:defRPr sz="900">
+                          <a:solidFill>
+                            <a:srgbClr val="1A1A2E"/>
+                          </a:solidFill>
+                          <a:latin typeface="Helvetica"/>
+                        </a:defRPr>
+                      </a:pPr>
+                      <a:r>
+                        <a:t>46,104</a:t>
                       </a:r>
                     </a:p>
                   </a:txBody>
@@ -17016,15 +18290,15 @@
                     <a:lstStyle/>
                     <a:p>
                       <a:pPr algn="ctr">
-                        <a:defRPr sz="1100">
-                          <a:solidFill>
-                            <a:srgbClr val="1A1A2E"/>
-                          </a:solidFill>
-                          <a:latin typeface="Helvetica"/>
-                        </a:defRPr>
-                      </a:pPr>
-                      <a:r>
-                        <a:t>+0.006</a:t>
+                        <a:defRPr sz="900">
+                          <a:solidFill>
+                            <a:srgbClr val="1A1A2E"/>
+                          </a:solidFill>
+                          <a:latin typeface="Helvetica"/>
+                        </a:defRPr>
+                      </a:pPr>
+                      <a:r>
+                        <a:t>-91%</a:t>
                       </a:r>
                     </a:p>
                   </a:txBody>
@@ -17040,15 +18314,15 @@
                     <a:lstStyle/>
                     <a:p>
                       <a:pPr algn="ctr">
-                        <a:defRPr sz="1100">
-                          <a:solidFill>
-                            <a:srgbClr val="1A1A2E"/>
-                          </a:solidFill>
-                          <a:latin typeface="Helvetica"/>
-                        </a:defRPr>
-                      </a:pPr>
-                      <a:r>
-                        <a:t>中等 (+0.7%)</a:t>
+                        <a:defRPr sz="900">
+                          <a:solidFill>
+                            <a:srgbClr val="1A1A2E"/>
+                          </a:solidFill>
+                          <a:latin typeface="Helvetica"/>
+                        </a:defRPr>
+                      </a:pPr>
+                      <a:r>
+                        <a:t>样本量骤降</a:t>
                       </a:r>
                     </a:p>
                   </a:txBody>
@@ -17059,22 +18333,22 @@
                   </a:tcPr>
                 </a:tc>
               </a:tr>
-              <a:tr h="320039">
-                <a:tc>
-                  <a:txBody>
-                    <a:bodyPr/>
-                    <a:lstStyle/>
-                    <a:p>
-                      <a:pPr algn="ctr">
-                        <a:defRPr sz="1100">
-                          <a:solidFill>
-                            <a:srgbClr val="1A1A2E"/>
-                          </a:solidFill>
-                          <a:latin typeface="Helvetica"/>
-                        </a:defRPr>
-                      </a:pPr>
-                      <a:r>
-                        <a:t>DM_10yrs</a:t>
+              <a:tr h="320040">
+                <a:tc>
+                  <a:txBody>
+                    <a:bodyPr/>
+                    <a:lstStyle/>
+                    <a:p>
+                      <a:pPr algn="ctr">
+                        <a:defRPr sz="900">
+                          <a:solidFill>
+                            <a:srgbClr val="1A1A2E"/>
+                          </a:solidFill>
+                          <a:latin typeface="Helvetica"/>
+                        </a:defRPr>
+                      </a:pPr>
+                      <a:r>
+                        <a:t>DM_full 阳性</a:t>
                       </a:r>
                     </a:p>
                   </a:txBody>
@@ -17090,15 +18364,15 @@
                     <a:lstStyle/>
                     <a:p>
                       <a:pPr algn="ctr">
-                        <a:defRPr sz="1100">
-                          <a:solidFill>
-                            <a:srgbClr val="1A1A2E"/>
-                          </a:solidFill>
-                          <a:latin typeface="Helvetica"/>
-                        </a:defRPr>
-                      </a:pPr>
-                      <a:r>
-                        <a:t>0.833</a:t>
+                        <a:defRPr sz="900">
+                          <a:solidFill>
+                            <a:srgbClr val="1A1A2E"/>
+                          </a:solidFill>
+                          <a:latin typeface="Helvetica"/>
+                        </a:defRPr>
+                      </a:pPr>
+                      <a:r>
+                        <a:t>9,545 (1.93%)</a:t>
                       </a:r>
                     </a:p>
                   </a:txBody>
@@ -17114,15 +18388,15 @@
                     <a:lstStyle/>
                     <a:p>
                       <a:pPr algn="ctr">
-                        <a:defRPr sz="1100">
-                          <a:solidFill>
-                            <a:srgbClr val="1A1A2E"/>
-                          </a:solidFill>
-                          <a:latin typeface="Helvetica"/>
-                        </a:defRPr>
-                      </a:pPr>
-                      <a:r>
-                        <a:t>0.841</a:t>
+                        <a:defRPr sz="900">
+                          <a:solidFill>
+                            <a:srgbClr val="1A1A2E"/>
+                          </a:solidFill>
+                          <a:latin typeface="Helvetica"/>
+                        </a:defRPr>
+                      </a:pPr>
+                      <a:r>
+                        <a:t>148 (0.32%)</a:t>
                       </a:r>
                     </a:p>
                   </a:txBody>
@@ -17138,15 +18412,15 @@
                     <a:lstStyle/>
                     <a:p>
                       <a:pPr algn="ctr">
-                        <a:defRPr sz="1100">
-                          <a:solidFill>
-                            <a:srgbClr val="1A1A2E"/>
-                          </a:solidFill>
-                          <a:latin typeface="Helvetica"/>
-                        </a:defRPr>
-                      </a:pPr>
-                      <a:r>
-                        <a:t>+0.008</a:t>
+                        <a:defRPr sz="900">
+                          <a:solidFill>
+                            <a:srgbClr val="1A1A2E"/>
+                          </a:solidFill>
+                          <a:latin typeface="Helvetica"/>
+                        </a:defRPr>
+                      </a:pPr>
+                      <a:r>
+                        <a:t>-98%</a:t>
                       </a:r>
                     </a:p>
                   </a:txBody>
@@ -17162,15 +18436,15 @@
                     <a:lstStyle/>
                     <a:p>
                       <a:pPr algn="ctr">
-                        <a:defRPr sz="1100">
-                          <a:solidFill>
-                            <a:srgbClr val="1A1A2E"/>
-                          </a:solidFill>
-                          <a:latin typeface="Helvetica"/>
-                        </a:defRPr>
-                      </a:pPr>
-                      <a:r>
-                        <a:t>中等 (+1.0%)</a:t>
+                        <a:defRPr sz="900">
+                          <a:solidFill>
+                            <a:srgbClr val="1A1A2E"/>
+                          </a:solidFill>
+                          <a:latin typeface="Helvetica"/>
+                        </a:defRPr>
+                      </a:pPr>
+                      <a:r>
+                        <a:t>每折仅30例，方差极大</a:t>
                       </a:r>
                     </a:p>
                   </a:txBody>
@@ -17181,22 +18455,22 @@
                   </a:tcPr>
                 </a:tc>
               </a:tr>
-              <a:tr h="320039">
-                <a:tc>
-                  <a:txBody>
-                    <a:bodyPr/>
-                    <a:lstStyle/>
-                    <a:p>
-                      <a:pPr algn="ctr">
-                        <a:defRPr sz="1100">
-                          <a:solidFill>
-                            <a:srgbClr val="1A1A2E"/>
-                          </a:solidFill>
-                          <a:latin typeface="Helvetica"/>
-                        </a:defRPr>
-                      </a:pPr>
-                      <a:r>
-                        <a:t>DM_5yrs</a:t>
+              <a:tr h="320040">
+                <a:tc>
+                  <a:txBody>
+                    <a:bodyPr/>
+                    <a:lstStyle/>
+                    <a:p>
+                      <a:pPr algn="ctr">
+                        <a:defRPr sz="900">
+                          <a:solidFill>
+                            <a:srgbClr val="1A1A2E"/>
+                          </a:solidFill>
+                          <a:latin typeface="Helvetica"/>
+                        </a:defRPr>
+                      </a:pPr>
+                      <a:r>
+                        <a:t>AD_full 阳性</a:t>
                       </a:r>
                     </a:p>
                   </a:txBody>
@@ -17212,15 +18486,15 @@
                     <a:lstStyle/>
                     <a:p>
                       <a:pPr algn="ctr">
-                        <a:defRPr sz="1100">
-                          <a:solidFill>
-                            <a:srgbClr val="1A1A2E"/>
-                          </a:solidFill>
-                          <a:latin typeface="Helvetica"/>
-                        </a:defRPr>
-                      </a:pPr>
-                      <a:r>
-                        <a:t>0.816</a:t>
+                        <a:defRPr sz="900">
+                          <a:solidFill>
+                            <a:srgbClr val="1A1A2E"/>
+                          </a:solidFill>
+                          <a:latin typeface="Helvetica"/>
+                        </a:defRPr>
+                      </a:pPr>
+                      <a:r>
+                        <a:t>4,315 (0.87%)</a:t>
                       </a:r>
                     </a:p>
                   </a:txBody>
@@ -17236,15 +18510,15 @@
                     <a:lstStyle/>
                     <a:p>
                       <a:pPr algn="ctr">
-                        <a:defRPr sz="1100">
-                          <a:solidFill>
-                            <a:srgbClr val="1A1A2E"/>
-                          </a:solidFill>
-                          <a:latin typeface="Helvetica"/>
-                        </a:defRPr>
-                      </a:pPr>
-                      <a:r>
-                        <a:t>0.842</a:t>
+                        <a:defRPr sz="900">
+                          <a:solidFill>
+                            <a:srgbClr val="1A1A2E"/>
+                          </a:solidFill>
+                          <a:latin typeface="Helvetica"/>
+                        </a:defRPr>
+                      </a:pPr>
+                      <a:r>
+                        <a:t>62 (0.13%)</a:t>
                       </a:r>
                     </a:p>
                   </a:txBody>
@@ -17260,15 +18534,15 @@
                     <a:lstStyle/>
                     <a:p>
                       <a:pPr algn="ctr">
-                        <a:defRPr sz="1100">
-                          <a:solidFill>
-                            <a:srgbClr val="1A1A2E"/>
-                          </a:solidFill>
-                          <a:latin typeface="Helvetica"/>
-                        </a:defRPr>
-                      </a:pPr>
-                      <a:r>
-                        <a:t>+0.026</a:t>
+                        <a:defRPr sz="900">
+                          <a:solidFill>
+                            <a:srgbClr val="1A1A2E"/>
+                          </a:solidFill>
+                          <a:latin typeface="Helvetica"/>
+                        </a:defRPr>
+                      </a:pPr>
+                      <a:r>
+                        <a:t>-99%</a:t>
                       </a:r>
                     </a:p>
                   </a:txBody>
@@ -17284,15 +18558,15 @@
                     <a:lstStyle/>
                     <a:p>
                       <a:pPr algn="ctr">
-                        <a:defRPr sz="1100">
-                          <a:solidFill>
-                            <a:srgbClr val="1A1A2E"/>
-                          </a:solidFill>
-                          <a:latin typeface="Helvetica"/>
-                        </a:defRPr>
-                      </a:pPr>
-                      <a:r>
-                        <a:t>显著 (+3.2%)</a:t>
+                        <a:defRPr sz="900">
+                          <a:solidFill>
+                            <a:srgbClr val="1A1A2E"/>
+                          </a:solidFill>
+                          <a:latin typeface="Helvetica"/>
+                        </a:defRPr>
+                      </a:pPr>
+                      <a:r>
+                        <a:t>每折12例，无法训练</a:t>
                       </a:r>
                     </a:p>
                   </a:txBody>
@@ -17303,22 +18577,22 @@
                   </a:tcPr>
                 </a:tc>
               </a:tr>
-              <a:tr h="320039">
-                <a:tc>
-                  <a:txBody>
-                    <a:bodyPr/>
-                    <a:lstStyle/>
-                    <a:p>
-                      <a:pPr algn="ctr">
-                        <a:defRPr sz="1100">
-                          <a:solidFill>
-                            <a:srgbClr val="1A1A2E"/>
-                          </a:solidFill>
-                          <a:latin typeface="Helvetica"/>
-                        </a:defRPr>
-                      </a:pPr>
-                      <a:r>
-                        <a:t>AD_full</a:t>
+              <a:tr h="320040">
+                <a:tc>
+                  <a:txBody>
+                    <a:bodyPr/>
+                    <a:lstStyle/>
+                    <a:p>
+                      <a:pPr algn="ctr">
+                        <a:defRPr sz="900">
+                          <a:solidFill>
+                            <a:srgbClr val="1A1A2E"/>
+                          </a:solidFill>
+                          <a:latin typeface="Helvetica"/>
+                        </a:defRPr>
+                      </a:pPr>
+                      <a:r>
+                        <a:t>AUC (s04基线)</a:t>
                       </a:r>
                     </a:p>
                   </a:txBody>
@@ -17334,15 +18608,15 @@
                     <a:lstStyle/>
                     <a:p>
                       <a:pPr algn="ctr">
-                        <a:defRPr sz="1100">
-                          <a:solidFill>
-                            <a:srgbClr val="1A1A2E"/>
-                          </a:solidFill>
-                          <a:latin typeface="Helvetica"/>
-                        </a:defRPr>
-                      </a:pPr>
-                      <a:r>
-                        <a:t>0.836</a:t>
+                        <a:defRPr sz="900">
+                          <a:solidFill>
+                            <a:srgbClr val="1A1A2E"/>
+                          </a:solidFill>
+                          <a:latin typeface="Helvetica"/>
+                        </a:defRPr>
+                      </a:pPr>
+                      <a:r>
+                        <a:t>0.8373 (10特征)</a:t>
                       </a:r>
                     </a:p>
                   </a:txBody>
@@ -17358,15 +18632,15 @@
                     <a:lstStyle/>
                     <a:p>
                       <a:pPr algn="ctr">
-                        <a:defRPr sz="1100">
-                          <a:solidFill>
-                            <a:srgbClr val="1A1A2E"/>
-                          </a:solidFill>
-                          <a:latin typeface="Helvetica"/>
-                        </a:defRPr>
-                      </a:pPr>
-                      <a:r>
-                        <a:t>0.845</a:t>
+                        <a:defRPr sz="900">
+                          <a:solidFill>
+                            <a:srgbClr val="1A1A2E"/>
+                          </a:solidFill>
+                          <a:latin typeface="Helvetica"/>
+                        </a:defRPr>
+                      </a:pPr>
+                      <a:r>
+                        <a:t>0.8948 (10特征)</a:t>
                       </a:r>
                     </a:p>
                   </a:txBody>
@@ -17382,15 +18656,15 @@
                     <a:lstStyle/>
                     <a:p>
                       <a:pPr algn="ctr">
-                        <a:defRPr sz="1100">
-                          <a:solidFill>
-                            <a:srgbClr val="1A1A2E"/>
-                          </a:solidFill>
-                          <a:latin typeface="Helvetica"/>
-                        </a:defRPr>
-                      </a:pPr>
-                      <a:r>
-                        <a:t>+0.009</a:t>
+                        <a:defRPr sz="900">
+                          <a:solidFill>
+                            <a:srgbClr val="1A1A2E"/>
+                          </a:solidFill>
+                          <a:latin typeface="Helvetica"/>
+                        </a:defRPr>
+                      </a:pPr>
+                      <a:r>
+                        <a:t>虚高</a:t>
                       </a:r>
                     </a:p>
                   </a:txBody>
@@ -17406,15 +18680,15 @@
                     <a:lstStyle/>
                     <a:p>
                       <a:pPr algn="ctr">
-                        <a:defRPr sz="1100">
-                          <a:solidFill>
-                            <a:srgbClr val="1A1A2E"/>
-                          </a:solidFill>
-                          <a:latin typeface="Helvetica"/>
-                        </a:defRPr>
-                      </a:pPr>
-                      <a:r>
-                        <a:t>中等 (+1.1%)</a:t>
+                        <a:defRPr sz="900">
+                          <a:solidFill>
+                            <a:srgbClr val="1A1A2E"/>
+                          </a:solidFill>
+                          <a:latin typeface="Helvetica"/>
+                        </a:defRPr>
+                      </a:pPr>
+                      <a:r>
+                        <a:t>s04过拟合，s05崩回0.88</a:t>
                       </a:r>
                     </a:p>
                   </a:txBody>
@@ -17425,22 +18699,22 @@
                   </a:tcPr>
                 </a:tc>
               </a:tr>
-              <a:tr h="320039">
-                <a:tc>
-                  <a:txBody>
-                    <a:bodyPr/>
-                    <a:lstStyle/>
-                    <a:p>
-                      <a:pPr algn="ctr">
-                        <a:defRPr sz="1100">
-                          <a:solidFill>
-                            <a:srgbClr val="1A1A2E"/>
-                          </a:solidFill>
-                          <a:latin typeface="Helvetica"/>
-                        </a:defRPr>
-                      </a:pPr>
-                      <a:r>
-                        <a:t>AD_10yrs</a:t>
+              <a:tr h="320040">
+                <a:tc>
+                  <a:txBody>
+                    <a:bodyPr/>
+                    <a:lstStyle/>
+                    <a:p>
+                      <a:pPr algn="ctr">
+                        <a:defRPr sz="900">
+                          <a:solidFill>
+                            <a:srgbClr val="1A1A2E"/>
+                          </a:solidFill>
+                          <a:latin typeface="Helvetica"/>
+                        </a:defRPr>
+                      </a:pPr>
+                      <a:r>
+                        <a:t>AUC (s05校准)</a:t>
                       </a:r>
                     </a:p>
                   </a:txBody>
@@ -17456,15 +18730,15 @@
                     <a:lstStyle/>
                     <a:p>
                       <a:pPr algn="ctr">
-                        <a:defRPr sz="1100">
-                          <a:solidFill>
-                            <a:srgbClr val="1A1A2E"/>
-                          </a:solidFill>
-                          <a:latin typeface="Helvetica"/>
-                        </a:defRPr>
-                      </a:pPr>
-                      <a:r>
-                        <a:t>0.832</a:t>
+                        <a:defRPr sz="900">
+                          <a:solidFill>
+                            <a:srgbClr val="1A1A2E"/>
+                          </a:solidFill>
+                          <a:latin typeface="Helvetica"/>
+                        </a:defRPr>
+                      </a:pPr>
+                      <a:r>
+                        <a:t>0.837 ± 0.004</a:t>
                       </a:r>
                     </a:p>
                   </a:txBody>
@@ -17480,15 +18754,15 @@
                     <a:lstStyle/>
                     <a:p>
                       <a:pPr algn="ctr">
-                        <a:defRPr sz="1100">
-                          <a:solidFill>
-                            <a:srgbClr val="1A1A2E"/>
-                          </a:solidFill>
-                          <a:latin typeface="Helvetica"/>
-                        </a:defRPr>
-                      </a:pPr>
-                      <a:r>
-                        <a:t>0.853</a:t>
+                        <a:defRPr sz="900">
+                          <a:solidFill>
+                            <a:srgbClr val="1A1A2E"/>
+                          </a:solidFill>
+                          <a:latin typeface="Helvetica"/>
+                        </a:defRPr>
+                      </a:pPr>
+                      <a:r>
+                        <a:t>0.883 ± 0.027</a:t>
                       </a:r>
                     </a:p>
                   </a:txBody>
@@ -17504,15 +18778,15 @@
                     <a:lstStyle/>
                     <a:p>
                       <a:pPr algn="ctr">
-                        <a:defRPr sz="1100">
-                          <a:solidFill>
-                            <a:srgbClr val="1A1A2E"/>
-                          </a:solidFill>
-                          <a:latin typeface="Helvetica"/>
-                        </a:defRPr>
-                      </a:pPr>
-                      <a:r>
-                        <a:t>+0.021</a:t>
+                        <a:defRPr sz="900">
+                          <a:solidFill>
+                            <a:srgbClr val="1A1A2E"/>
+                          </a:solidFill>
+                          <a:latin typeface="Helvetica"/>
+                        </a:defRPr>
+                      </a:pPr>
+                      <a:r>
+                        <a:t>+0.046但σ×7</a:t>
                       </a:r>
                     </a:p>
                   </a:txBody>
@@ -17528,15 +18802,15 @@
                     <a:lstStyle/>
                     <a:p>
                       <a:pPr algn="ctr">
-                        <a:defRPr sz="1100">
-                          <a:solidFill>
-                            <a:srgbClr val="1A1A2E"/>
-                          </a:solidFill>
-                          <a:latin typeface="Helvetica"/>
-                        </a:defRPr>
-                      </a:pPr>
-                      <a:r>
-                        <a:t>显著 (+2.5%)</a:t>
+                        <a:defRPr sz="900">
+                          <a:solidFill>
+                            <a:srgbClr val="1A1A2E"/>
+                          </a:solidFill>
+                          <a:latin typeface="Helvetica"/>
+                        </a:defRPr>
+                      </a:pPr>
+                      <a:r>
+                        <a:t>方差大7倍，不可靠</a:t>
                       </a:r>
                     </a:p>
                   </a:txBody>
@@ -17547,22 +18821,22 @@
                   </a:tcPr>
                 </a:tc>
               </a:tr>
-              <a:tr h="320045">
-                <a:tc>
-                  <a:txBody>
-                    <a:bodyPr/>
-                    <a:lstStyle/>
-                    <a:p>
-                      <a:pPr algn="ctr">
-                        <a:defRPr sz="1100">
-                          <a:solidFill>
-                            <a:srgbClr val="1A1A2E"/>
-                          </a:solidFill>
-                          <a:latin typeface="Helvetica"/>
-                        </a:defRPr>
-                      </a:pPr>
-                      <a:r>
-                        <a:t>AD_5yrs</a:t>
+              <a:tr h="320040">
+                <a:tc>
+                  <a:txBody>
+                    <a:bodyPr/>
+                    <a:lstStyle/>
+                    <a:p>
+                      <a:pPr algn="ctr">
+                        <a:defRPr sz="900">
+                          <a:solidFill>
+                            <a:srgbClr val="1A1A2E"/>
+                          </a:solidFill>
+                          <a:latin typeface="Helvetica"/>
+                        </a:defRPr>
+                      </a:pPr>
+                      <a:r>
+                        <a:t>Top50影像占比</a:t>
                       </a:r>
                     </a:p>
                   </a:txBody>
@@ -17578,15 +18852,15 @@
                     <a:lstStyle/>
                     <a:p>
                       <a:pPr algn="ctr">
-                        <a:defRPr sz="1100">
-                          <a:solidFill>
-                            <a:srgbClr val="1A1A2E"/>
-                          </a:solidFill>
-                          <a:latin typeface="Helvetica"/>
-                        </a:defRPr>
-                      </a:pPr>
-                      <a:r>
-                        <a:t>0.667</a:t>
+                        <a:defRPr sz="900">
+                          <a:solidFill>
+                            <a:srgbClr val="1A1A2E"/>
+                          </a:solidFill>
+                          <a:latin typeface="Helvetica"/>
+                        </a:defRPr>
+                      </a:pPr>
+                      <a:r>
+                        <a:t>6/50 (12%)</a:t>
                       </a:r>
                     </a:p>
                   </a:txBody>
@@ -17602,15 +18876,15 @@
                     <a:lstStyle/>
                     <a:p>
                       <a:pPr algn="ctr">
-                        <a:defRPr sz="1100">
-                          <a:solidFill>
-                            <a:srgbClr val="1A1A2E"/>
-                          </a:solidFill>
-                          <a:latin typeface="Helvetica"/>
-                        </a:defRPr>
-                      </a:pPr>
-                      <a:r>
-                        <a:t>0.851</a:t>
+                        <a:defRPr sz="900">
+                          <a:solidFill>
+                            <a:srgbClr val="1A1A2E"/>
+                          </a:solidFill>
+                          <a:latin typeface="Helvetica"/>
+                        </a:defRPr>
+                      </a:pPr>
+                      <a:r>
+                        <a:t>45/50 (90%)</a:t>
                       </a:r>
                     </a:p>
                   </a:txBody>
@@ -17626,15 +18900,15 @@
                     <a:lstStyle/>
                     <a:p>
                       <a:pPr algn="ctr">
-                        <a:defRPr sz="1100">
-                          <a:solidFill>
-                            <a:srgbClr val="1A1A2E"/>
-                          </a:solidFill>
-                          <a:latin typeface="Helvetica"/>
-                        </a:defRPr>
-                      </a:pPr>
-                      <a:r>
-                        <a:t>+0.184</a:t>
+                        <a:defRPr sz="900">
+                          <a:solidFill>
+                            <a:srgbClr val="1A1A2E"/>
+                          </a:solidFill>
+                          <a:latin typeface="Helvetica"/>
+                        </a:defRPr>
+                      </a:pPr>
+                      <a:r>
+                        <a:t>完全反转</a:t>
                       </a:r>
                     </a:p>
                   </a:txBody>
@@ -17650,21 +18924,143 @@
                     <a:lstStyle/>
                     <a:p>
                       <a:pPr algn="ctr">
-                        <a:defRPr sz="1100">
-                          <a:solidFill>
-                            <a:srgbClr val="1A1A2E"/>
-                          </a:solidFill>
-                          <a:latin typeface="Helvetica"/>
-                        </a:defRPr>
-                      </a:pPr>
-                      <a:r>
-                        <a:t>极大 (+27.6%)</a:t>
+                        <a:defRPr sz="900">
+                          <a:solidFill>
+                            <a:srgbClr val="1A1A2E"/>
+                          </a:solidFill>
+                          <a:latin typeface="Helvetica"/>
+                        </a:defRPr>
+                      </a:pPr>
+                      <a:r>
+                        <a:t>临床特征被影像噪声淹没</a:t>
                       </a:r>
                     </a:p>
                   </a:txBody>
                   <a:tcPr>
                     <a:solidFill>
                       <a:srgbClr val="FFFFFF"/>
+                    </a:solidFill>
+                  </a:tcPr>
+                </a:tc>
+              </a:tr>
+              <a:tr h="320040">
+                <a:tc>
+                  <a:txBody>
+                    <a:bodyPr/>
+                    <a:lstStyle/>
+                    <a:p>
+                      <a:pPr algn="ctr">
+                        <a:defRPr sz="900">
+                          <a:solidFill>
+                            <a:srgbClr val="1A1A2E"/>
+                          </a:solidFill>
+                          <a:latin typeface="Helvetica"/>
+                        </a:defRPr>
+                      </a:pPr>
+                      <a:r>
+                        <a:t>特征选择</a:t>
+                      </a:r>
+                    </a:p>
+                  </a:txBody>
+                  <a:tcPr>
+                    <a:solidFill>
+                      <a:srgbClr val="F5F5F5"/>
+                    </a:solidFill>
+                  </a:tcPr>
+                </a:tc>
+                <a:tc>
+                  <a:txBody>
+                    <a:bodyPr/>
+                    <a:lstStyle/>
+                    <a:p>
+                      <a:pPr algn="ctr">
+                        <a:defRPr sz="900">
+                          <a:solidFill>
+                            <a:srgbClr val="1A1A2E"/>
+                          </a:solidFill>
+                          <a:latin typeface="Helvetica"/>
+                        </a:defRPr>
+                      </a:pPr>
+                      <a:r>
+                        <a:t>1 影像 + 9 临床</a:t>
+                      </a:r>
+                    </a:p>
+                  </a:txBody>
+                  <a:tcPr>
+                    <a:solidFill>
+                      <a:srgbClr val="F5F5F5"/>
+                    </a:solidFill>
+                  </a:tcPr>
+                </a:tc>
+                <a:tc>
+                  <a:txBody>
+                    <a:bodyPr/>
+                    <a:lstStyle/>
+                    <a:p>
+                      <a:pPr algn="ctr">
+                        <a:defRPr sz="900">
+                          <a:solidFill>
+                            <a:srgbClr val="1A1A2E"/>
+                          </a:solidFill>
+                          <a:latin typeface="Helvetica"/>
+                        </a:defRPr>
+                      </a:pPr>
+                      <a:r>
+                        <a:t>10 全影像</a:t>
+                      </a:r>
+                    </a:p>
+                  </a:txBody>
+                  <a:tcPr>
+                    <a:solidFill>
+                      <a:srgbClr val="F5F5F5"/>
+                    </a:solidFill>
+                  </a:tcPr>
+                </a:tc>
+                <a:tc>
+                  <a:txBody>
+                    <a:bodyPr/>
+                    <a:lstStyle/>
+                    <a:p>
+                      <a:pPr algn="ctr">
+                        <a:defRPr sz="900">
+                          <a:solidFill>
+                            <a:srgbClr val="1A1A2E"/>
+                          </a:solidFill>
+                          <a:latin typeface="Helvetica"/>
+                        </a:defRPr>
+                      </a:pPr>
+                      <a:r>
+                        <a:t>临床消失</a:t>
+                      </a:r>
+                    </a:p>
+                  </a:txBody>
+                  <a:tcPr>
+                    <a:solidFill>
+                      <a:srgbClr val="F5F5F5"/>
+                    </a:solidFill>
+                  </a:tcPr>
+                </a:tc>
+                <a:tc>
+                  <a:txBody>
+                    <a:bodyPr/>
+                    <a:lstStyle/>
+                    <a:p>
+                      <a:pPr algn="ctr">
+                        <a:defRPr sz="900">
+                          <a:solidFill>
+                            <a:srgbClr val="1A1A2E"/>
+                          </a:solidFill>
+                          <a:latin typeface="Helvetica"/>
+                        </a:defRPr>
+                      </a:pPr>
+                      <a:r>
+                        <a:t>过拟合+样本选择偏差</a:t>
+                      </a:r>
+                    </a:p>
+                  </a:txBody>
+                  <a:tcPr>
+                    <a:solidFill>
+                      <a:srgbClr val="F5F5F5"/>
                     </a:solidFill>
                   </a:tcPr>
                 </a:tc>
@@ -17675,14 +19071,14 @@
       </p:graphicFrame>
       <p:sp>
         <p:nvSpPr>
-          <p:cNvPr id="6" name="TextBox 5"/>
+          <p:cNvPr id="7" name="TextBox 6"/>
           <p:cNvSpPr txBox="1"/>
           <p:nvPr/>
         </p:nvSpPr>
         <p:spPr>
           <a:xfrm>
-            <a:off x="731520" y="3931920"/>
-            <a:ext cx="10972800" cy="2560320"/>
+            <a:off x="731520" y="4754880"/>
+            <a:ext cx="10972800" cy="1828800"/>
           </a:xfrm>
           <a:prstGeom prst="rect">
             <a:avLst/>
@@ -17707,7 +19103,7 @@
               </a:defRPr>
             </a:pPr>
             <a:r>
-              <a:t>为什么 AD 目标提升更大？</a:t>
+              <a:t>核心发现: 影像子集 = 健康志愿者偏差</a:t>
             </a:r>
           </a:p>
           <a:p>
@@ -17736,7 +19132,7 @@
               </a:defRPr>
             </a:pPr>
             <a:r>
-              <a:t>• 阿尔茨海默病有明确的神经病理学基础 (β-淀粉样蛋白 + tau)，脑结构影像可早期检测</a:t>
+              <a:t>• 脑 MRI 需要参与者亲自到影像中心 → 已患痴呆者几乎不会参加 → 阳性率从 1.93% 暴跌至 0.32% (差6倍)</a:t>
             </a:r>
           </a:p>
           <a:p>
@@ -17752,7 +19148,7 @@
               </a:defRPr>
             </a:pPr>
             <a:r>
-              <a:t>• 海马下托是 Braak 分期中最早期 tau 沉积区域之一，对 AD 具有高度特异性</a:t>
+              <a:t>• 仅 148 例痴呆，5折 CV 每折仅 ~30 例 → s05 AUC 跨折波动 0.83-0.91 (±0.027 vs 全队列 ±0.004)</a:t>
             </a:r>
           </a:p>
           <a:p>
@@ -17768,7 +19164,7 @@
               </a:defRPr>
             </a:pPr>
             <a:r>
-              <a:t>• 全因痴呆包含血管性、额颞叶等多种亚型，影像特征对不同亚型的预测能力不均衡</a:t>
+              <a:t>• 小样本下脑结构特征(高维、共线性强)过拟合严重 → s04 选中10/10影像特征但 s05 性能崩回</a:t>
             </a:r>
           </a:p>
           <a:p>
@@ -17778,13 +19174,13 @@
               </a:spcAft>
               <a:defRPr sz="1200" b="0">
                 <a:solidFill>
-                  <a:srgbClr val="1A1A2E"/>
+                  <a:srgbClr val="008844"/>
                 </a:solidFill>
                 <a:latin typeface="Helvetica"/>
               </a:defRPr>
             </a:pPr>
             <a:r>
-              <a:t>• AD_5yrs 阳性仅 294 例 (0.06%)，影像特征捕获到了罕见的早期 AD 结构改变信号</a:t>
+              <a:t>• 全队列 + LightGBM NaN 处理不是 workaround，而是利用全部 9,545 例样本的唯一正确方法论选择</a:t>
             </a:r>
           </a:p>
           <a:p>
@@ -17800,14 +19196,14 @@
               </a:defRPr>
             </a:pPr>
             <a:r>
-              <a:t>• 原论文的 AD_5yrs AUC=0.890 同样远高于 DM_5yrs (0.847)，说明短期 AD 预测本身就需要影像/基因信息</a:t>
-            </a:r>
-          </a:p>
-        </p:txBody>
-      </p:sp>
-      <p:sp>
-        <p:nvSpPr>
-          <p:cNvPr id="7" name="TextBox 6"/>
+              <a:t>• 该发现对 UK Biobank 影像学研究具有通用启示: 影像子集的选择偏差必须在研究设计阶段考虑</a:t>
+            </a:r>
+          </a:p>
+        </p:txBody>
+      </p:sp>
+      <p:sp>
+        <p:nvSpPr>
+          <p:cNvPr id="8" name="TextBox 7"/>
           <p:cNvSpPr txBox="1"/>
           <p:nvPr/>
         </p:nvSpPr>
@@ -17836,7 +19232,7 @@
               </a:defRPr>
             </a:pPr>
             <a:r>
-              <a:t>8/13</a:t>
+              <a:t>8/14</a:t>
             </a:r>
           </a:p>
         </p:txBody>
@@ -17941,7 +19337,7 @@
               </a:defRPr>
             </a:pPr>
             <a:r>
-              <a:t>剩余差距分析</a:t>
+              <a:t>影像特征提升效果对比</a:t>
             </a:r>
           </a:p>
         </p:txBody>
@@ -17977,7 +19373,7 @@
               </a:defRPr>
             </a:pPr>
             <a:r>
-              <a:t>加入脑 MRI 后与原论文仍存的差异及原因</a:t>
+              <a:t>六个目标加入脑 MRI 前后 AUC 变化</a:t>
             </a:r>
           </a:p>
         </p:txBody>
@@ -17992,7 +19388,7 @@
         </p:nvGraphicFramePr>
         <p:xfrm>
           <a:off x="731520" y="1554480"/>
-          <a:ext cx="11064240" cy="2240279"/>
+          <a:ext cx="10972800" cy="2240279"/>
         </p:xfrm>
         <a:graphic>
           <a:graphicData uri="http://schemas.openxmlformats.org/drawingml/2006/table">
@@ -18001,11 +19397,11 @@
                 <a:tableStyleId>{5C22544A-7EE6-4342-B048-85BDC9FD1C3A}</a:tableStyleId>
               </a:tblPr>
               <a:tblGrid>
-                <a:gridCol w="1371600"/>
-                <a:gridCol w="1463040"/>
                 <a:gridCol w="1828800"/>
-                <a:gridCol w="3200400"/>
-                <a:gridCol w="3200400"/>
+                <a:gridCol w="2286000"/>
+                <a:gridCol w="2286000"/>
+                <a:gridCol w="2286000"/>
+                <a:gridCol w="2286000"/>
               </a:tblGrid>
               <a:tr h="320039">
                 <a:tc>
@@ -18014,7 +19410,7 @@
                     <a:lstStyle/>
                     <a:p>
                       <a:pPr algn="ctr">
-                        <a:defRPr sz="1000" b="1">
+                        <a:defRPr sz="1100" b="1">
                           <a:solidFill>
                             <a:srgbClr val="FFFFFF"/>
                           </a:solidFill>
@@ -18038,7 +19434,7 @@
                     <a:lstStyle/>
                     <a:p>
                       <a:pPr algn="ctr">
-                        <a:defRPr sz="1000" b="1">
+                        <a:defRPr sz="1100" b="1">
                           <a:solidFill>
                             <a:srgbClr val="FFFFFF"/>
                           </a:solidFill>
@@ -18046,7 +19442,7 @@
                         </a:defRPr>
                       </a:pPr>
                       <a:r>
-                        <a:t>原论文 AUC</a:t>
+                        <a:t>复现 AUC (无影像)</a:t>
                       </a:r>
                     </a:p>
                   </a:txBody>
@@ -18062,7 +19458,7 @@
                     <a:lstStyle/>
                     <a:p>
                       <a:pPr algn="ctr">
-                        <a:defRPr sz="1000" b="1">
+                        <a:defRPr sz="1100" b="1">
                           <a:solidFill>
                             <a:srgbClr val="FFFFFF"/>
                           </a:solidFill>
@@ -18070,7 +19466,7 @@
                         </a:defRPr>
                       </a:pPr>
                       <a:r>
-                        <a:t>+脑 MRI AUC</a:t>
+                        <a:t>+ 脑 MRI AUC</a:t>
                       </a:r>
                     </a:p>
                   </a:txBody>
@@ -18086,7 +19482,7 @@
                     <a:lstStyle/>
                     <a:p>
                       <a:pPr algn="ctr">
-                        <a:defRPr sz="1000" b="1">
+                        <a:defRPr sz="1100" b="1">
                           <a:solidFill>
                             <a:srgbClr val="FFFFFF"/>
                           </a:solidFill>
@@ -18094,7 +19490,7 @@
                         </a:defRPr>
                       </a:pPr>
                       <a:r>
-                        <a:t>剩余差距</a:t>
+                        <a:t>Δ AUC</a:t>
                       </a:r>
                     </a:p>
                   </a:txBody>
@@ -18110,7 +19506,7 @@
                     <a:lstStyle/>
                     <a:p>
                       <a:pPr algn="ctr">
-                        <a:defRPr sz="1000" b="1">
+                        <a:defRPr sz="1100" b="1">
                           <a:solidFill>
                             <a:srgbClr val="FFFFFF"/>
                           </a:solidFill>
@@ -18118,7 +19514,7 @@
                         </a:defRPr>
                       </a:pPr>
                       <a:r>
-                        <a:t>主要原因</a:t>
+                        <a:t>提升幅度</a:t>
                       </a:r>
                     </a:p>
                   </a:txBody>
@@ -18136,7 +19532,7 @@
                     <a:lstStyle/>
                     <a:p>
                       <a:pPr algn="ctr">
-                        <a:defRPr sz="1000">
+                        <a:defRPr sz="1100">
                           <a:solidFill>
                             <a:srgbClr val="1A1A2E"/>
                           </a:solidFill>
@@ -18160,15 +19556,15 @@
                     <a:lstStyle/>
                     <a:p>
                       <a:pPr algn="ctr">
-                        <a:defRPr sz="1000">
-                          <a:solidFill>
-                            <a:srgbClr val="1A1A2E"/>
-                          </a:solidFill>
-                          <a:latin typeface="Helvetica"/>
-                        </a:defRPr>
-                      </a:pPr>
-                      <a:r>
-                        <a:t>0.848</a:t>
+                        <a:defRPr sz="1100">
+                          <a:solidFill>
+                            <a:srgbClr val="1A1A2E"/>
+                          </a:solidFill>
+                          <a:latin typeface="Helvetica"/>
+                        </a:defRPr>
+                      </a:pPr>
+                      <a:r>
+                        <a:t>0.831</a:t>
                       </a:r>
                     </a:p>
                   </a:txBody>
@@ -18184,7 +19580,7 @@
                     <a:lstStyle/>
                     <a:p>
                       <a:pPr algn="ctr">
-                        <a:defRPr sz="1000">
+                        <a:defRPr sz="1100">
                           <a:solidFill>
                             <a:srgbClr val="1A1A2E"/>
                           </a:solidFill>
@@ -18208,15 +19604,15 @@
                     <a:lstStyle/>
                     <a:p>
                       <a:pPr algn="ctr">
-                        <a:defRPr sz="1000">
-                          <a:solidFill>
-                            <a:srgbClr val="1A1A2E"/>
-                          </a:solidFill>
-                          <a:latin typeface="Helvetica"/>
-                        </a:defRPr>
-                      </a:pPr>
-                      <a:r>
-                        <a:t>-0.011</a:t>
+                        <a:defRPr sz="1100">
+                          <a:solidFill>
+                            <a:srgbClr val="1A1A2E"/>
+                          </a:solidFill>
+                          <a:latin typeface="Helvetica"/>
+                        </a:defRPr>
+                      </a:pPr>
+                      <a:r>
+                        <a:t>+0.006</a:t>
                       </a:r>
                     </a:p>
                   </a:txBody>
@@ -18232,15 +19628,15 @@
                     <a:lstStyle/>
                     <a:p>
                       <a:pPr algn="ctr">
-                        <a:defRPr sz="1000">
-                          <a:solidFill>
-                            <a:srgbClr val="1A1A2E"/>
-                          </a:solidFill>
-                          <a:latin typeface="Helvetica"/>
-                        </a:defRPr>
-                      </a:pPr>
-                      <a:r>
-                        <a:t>缺 ApoEε4 + PRS (Δ~0.01-0.02)</a:t>
+                        <a:defRPr sz="1100">
+                          <a:solidFill>
+                            <a:srgbClr val="1A1A2E"/>
+                          </a:solidFill>
+                          <a:latin typeface="Helvetica"/>
+                        </a:defRPr>
+                      </a:pPr>
+                      <a:r>
+                        <a:t>中等 (+0.7%)</a:t>
                       </a:r>
                     </a:p>
                   </a:txBody>
@@ -18258,7 +19654,7 @@
                     <a:lstStyle/>
                     <a:p>
                       <a:pPr algn="ctr">
-                        <a:defRPr sz="1000">
+                        <a:defRPr sz="1100">
                           <a:solidFill>
                             <a:srgbClr val="1A1A2E"/>
                           </a:solidFill>
@@ -18282,15 +19678,15 @@
                     <a:lstStyle/>
                     <a:p>
                       <a:pPr algn="ctr">
-                        <a:defRPr sz="1000">
-                          <a:solidFill>
-                            <a:srgbClr val="1A1A2E"/>
-                          </a:solidFill>
-                          <a:latin typeface="Helvetica"/>
-                        </a:defRPr>
-                      </a:pPr>
-                      <a:r>
-                        <a:t>0.849</a:t>
+                        <a:defRPr sz="1100">
+                          <a:solidFill>
+                            <a:srgbClr val="1A1A2E"/>
+                          </a:solidFill>
+                          <a:latin typeface="Helvetica"/>
+                        </a:defRPr>
+                      </a:pPr>
+                      <a:r>
+                        <a:t>0.833</a:t>
                       </a:r>
                     </a:p>
                   </a:txBody>
@@ -18306,7 +19702,7 @@
                     <a:lstStyle/>
                     <a:p>
                       <a:pPr algn="ctr">
-                        <a:defRPr sz="1000">
+                        <a:defRPr sz="1100">
                           <a:solidFill>
                             <a:srgbClr val="1A1A2E"/>
                           </a:solidFill>
@@ -18330,15 +19726,15 @@
                     <a:lstStyle/>
                     <a:p>
                       <a:pPr algn="ctr">
-                        <a:defRPr sz="1000">
-                          <a:solidFill>
-                            <a:srgbClr val="1A1A2E"/>
-                          </a:solidFill>
-                          <a:latin typeface="Helvetica"/>
-                        </a:defRPr>
-                      </a:pPr>
-                      <a:r>
-                        <a:t>-0.008</a:t>
+                        <a:defRPr sz="1100">
+                          <a:solidFill>
+                            <a:srgbClr val="1A1A2E"/>
+                          </a:solidFill>
+                          <a:latin typeface="Helvetica"/>
+                        </a:defRPr>
+                      </a:pPr>
+                      <a:r>
+                        <a:t>+0.008</a:t>
                       </a:r>
                     </a:p>
                   </a:txBody>
@@ -18354,15 +19750,15 @@
                     <a:lstStyle/>
                     <a:p>
                       <a:pPr algn="ctr">
-                        <a:defRPr sz="1000">
-                          <a:solidFill>
-                            <a:srgbClr val="1A1A2E"/>
-                          </a:solidFill>
-                          <a:latin typeface="Helvetica"/>
-                        </a:defRPr>
-                      </a:pPr>
-                      <a:r>
-                        <a:t>缺 ApoEε4 + PRS</a:t>
+                        <a:defRPr sz="1100">
+                          <a:solidFill>
+                            <a:srgbClr val="1A1A2E"/>
+                          </a:solidFill>
+                          <a:latin typeface="Helvetica"/>
+                        </a:defRPr>
+                      </a:pPr>
+                      <a:r>
+                        <a:t>中等 (+1.0%)</a:t>
                       </a:r>
                     </a:p>
                   </a:txBody>
@@ -18380,7 +19776,7 @@
                     <a:lstStyle/>
                     <a:p>
                       <a:pPr algn="ctr">
-                        <a:defRPr sz="1000">
+                        <a:defRPr sz="1100">
                           <a:solidFill>
                             <a:srgbClr val="1A1A2E"/>
                           </a:solidFill>
@@ -18404,15 +19800,15 @@
                     <a:lstStyle/>
                     <a:p>
                       <a:pPr algn="ctr">
-                        <a:defRPr sz="1000">
-                          <a:solidFill>
-                            <a:srgbClr val="1A1A2E"/>
-                          </a:solidFill>
-                          <a:latin typeface="Helvetica"/>
-                        </a:defRPr>
-                      </a:pPr>
-                      <a:r>
-                        <a:t>0.847</a:t>
+                        <a:defRPr sz="1100">
+                          <a:solidFill>
+                            <a:srgbClr val="1A1A2E"/>
+                          </a:solidFill>
+                          <a:latin typeface="Helvetica"/>
+                        </a:defRPr>
+                      </a:pPr>
+                      <a:r>
+                        <a:t>0.816</a:t>
                       </a:r>
                     </a:p>
                   </a:txBody>
@@ -18428,7 +19824,7 @@
                     <a:lstStyle/>
                     <a:p>
                       <a:pPr algn="ctr">
-                        <a:defRPr sz="1000">
+                        <a:defRPr sz="1100">
                           <a:solidFill>
                             <a:srgbClr val="1A1A2E"/>
                           </a:solidFill>
@@ -18452,15 +19848,15 @@
                     <a:lstStyle/>
                     <a:p>
                       <a:pPr algn="ctr">
-                        <a:defRPr sz="1000">
-                          <a:solidFill>
-                            <a:srgbClr val="1A1A2E"/>
-                          </a:solidFill>
-                          <a:latin typeface="Helvetica"/>
-                        </a:defRPr>
-                      </a:pPr>
-                      <a:r>
-                        <a:t>-0.005</a:t>
+                        <a:defRPr sz="1100">
+                          <a:solidFill>
+                            <a:srgbClr val="1A1A2E"/>
+                          </a:solidFill>
+                          <a:latin typeface="Helvetica"/>
+                        </a:defRPr>
+                      </a:pPr>
+                      <a:r>
+                        <a:t>+0.026</a:t>
                       </a:r>
                     </a:p>
                   </a:txBody>
@@ -18476,15 +19872,15 @@
                     <a:lstStyle/>
                     <a:p>
                       <a:pPr algn="ctr">
-                        <a:defRPr sz="1000">
-                          <a:solidFill>
-                            <a:srgbClr val="1A1A2E"/>
-                          </a:solidFill>
-                          <a:latin typeface="Helvetica"/>
-                        </a:defRPr>
-                      </a:pPr>
-                      <a:r>
-                        <a:t>基本追平，差距可接受</a:t>
+                        <a:defRPr sz="1100">
+                          <a:solidFill>
+                            <a:srgbClr val="1A1A2E"/>
+                          </a:solidFill>
+                          <a:latin typeface="Helvetica"/>
+                        </a:defRPr>
+                      </a:pPr>
+                      <a:r>
+                        <a:t>显著 (+3.2%)</a:t>
                       </a:r>
                     </a:p>
                   </a:txBody>
@@ -18502,7 +19898,7 @@
                     <a:lstStyle/>
                     <a:p>
                       <a:pPr algn="ctr">
-                        <a:defRPr sz="1000">
+                        <a:defRPr sz="1100">
                           <a:solidFill>
                             <a:srgbClr val="1A1A2E"/>
                           </a:solidFill>
@@ -18526,15 +19922,15 @@
                     <a:lstStyle/>
                     <a:p>
                       <a:pPr algn="ctr">
-                        <a:defRPr sz="1000">
-                          <a:solidFill>
-                            <a:srgbClr val="1A1A2E"/>
-                          </a:solidFill>
-                          <a:latin typeface="Helvetica"/>
-                        </a:defRPr>
-                      </a:pPr>
-                      <a:r>
-                        <a:t>0.862</a:t>
+                        <a:defRPr sz="1100">
+                          <a:solidFill>
+                            <a:srgbClr val="1A1A2E"/>
+                          </a:solidFill>
+                          <a:latin typeface="Helvetica"/>
+                        </a:defRPr>
+                      </a:pPr>
+                      <a:r>
+                        <a:t>0.836</a:t>
                       </a:r>
                     </a:p>
                   </a:txBody>
@@ -18550,7 +19946,7 @@
                     <a:lstStyle/>
                     <a:p>
                       <a:pPr algn="ctr">
-                        <a:defRPr sz="1000">
+                        <a:defRPr sz="1100">
                           <a:solidFill>
                             <a:srgbClr val="1A1A2E"/>
                           </a:solidFill>
@@ -18574,15 +19970,15 @@
                     <a:lstStyle/>
                     <a:p>
                       <a:pPr algn="ctr">
-                        <a:defRPr sz="1000">
-                          <a:solidFill>
-                            <a:srgbClr val="1A1A2E"/>
-                          </a:solidFill>
-                          <a:latin typeface="Helvetica"/>
-                        </a:defRPr>
-                      </a:pPr>
-                      <a:r>
-                        <a:t>-0.017</a:t>
+                        <a:defRPr sz="1100">
+                          <a:solidFill>
+                            <a:srgbClr val="1A1A2E"/>
+                          </a:solidFill>
+                          <a:latin typeface="Helvetica"/>
+                        </a:defRPr>
+                      </a:pPr>
+                      <a:r>
+                        <a:t>+0.009</a:t>
                       </a:r>
                     </a:p>
                   </a:txBody>
@@ -18598,15 +19994,15 @@
                     <a:lstStyle/>
                     <a:p>
                       <a:pPr algn="ctr">
-                        <a:defRPr sz="1000">
-                          <a:solidFill>
-                            <a:srgbClr val="1A1A2E"/>
-                          </a:solidFill>
-                          <a:latin typeface="Helvetica"/>
-                        </a:defRPr>
-                      </a:pPr>
-                      <a:r>
-                        <a:t>AD 高度依赖 ApoEε4</a:t>
+                        <a:defRPr sz="1100">
+                          <a:solidFill>
+                            <a:srgbClr val="1A1A2E"/>
+                          </a:solidFill>
+                          <a:latin typeface="Helvetica"/>
+                        </a:defRPr>
+                      </a:pPr>
+                      <a:r>
+                        <a:t>中等 (+1.1%)</a:t>
                       </a:r>
                     </a:p>
                   </a:txBody>
@@ -18624,7 +20020,7 @@
                     <a:lstStyle/>
                     <a:p>
                       <a:pPr algn="ctr">
-                        <a:defRPr sz="1000">
+                        <a:defRPr sz="1100">
                           <a:solidFill>
                             <a:srgbClr val="1A1A2E"/>
                           </a:solidFill>
@@ -18648,15 +20044,15 @@
                     <a:lstStyle/>
                     <a:p>
                       <a:pPr algn="ctr">
-                        <a:defRPr sz="1000">
-                          <a:solidFill>
-                            <a:srgbClr val="1A1A2E"/>
-                          </a:solidFill>
-                          <a:latin typeface="Helvetica"/>
-                        </a:defRPr>
-                      </a:pPr>
-                      <a:r>
-                        <a:t>0.866</a:t>
+                        <a:defRPr sz="1100">
+                          <a:solidFill>
+                            <a:srgbClr val="1A1A2E"/>
+                          </a:solidFill>
+                          <a:latin typeface="Helvetica"/>
+                        </a:defRPr>
+                      </a:pPr>
+                      <a:r>
+                        <a:t>0.832</a:t>
                       </a:r>
                     </a:p>
                   </a:txBody>
@@ -18672,7 +20068,7 @@
                     <a:lstStyle/>
                     <a:p>
                       <a:pPr algn="ctr">
-                        <a:defRPr sz="1000">
+                        <a:defRPr sz="1100">
                           <a:solidFill>
                             <a:srgbClr val="1A1A2E"/>
                           </a:solidFill>
@@ -18696,15 +20092,15 @@
                     <a:lstStyle/>
                     <a:p>
                       <a:pPr algn="ctr">
-                        <a:defRPr sz="1000">
-                          <a:solidFill>
-                            <a:srgbClr val="1A1A2E"/>
-                          </a:solidFill>
-                          <a:latin typeface="Helvetica"/>
-                        </a:defRPr>
-                      </a:pPr>
-                      <a:r>
-                        <a:t>-0.013</a:t>
+                        <a:defRPr sz="1100">
+                          <a:solidFill>
+                            <a:srgbClr val="1A1A2E"/>
+                          </a:solidFill>
+                          <a:latin typeface="Helvetica"/>
+                        </a:defRPr>
+                      </a:pPr>
+                      <a:r>
+                        <a:t>+0.021</a:t>
                       </a:r>
                     </a:p>
                   </a:txBody>
@@ -18720,15 +20116,15 @@
                     <a:lstStyle/>
                     <a:p>
                       <a:pPr algn="ctr">
-                        <a:defRPr sz="1000">
-                          <a:solidFill>
-                            <a:srgbClr val="1A1A2E"/>
-                          </a:solidFill>
-                          <a:latin typeface="Helvetica"/>
-                        </a:defRPr>
-                      </a:pPr>
-                      <a:r>
-                        <a:t>ApoEε4 + PRS 缺失影响大</a:t>
+                        <a:defRPr sz="1100">
+                          <a:solidFill>
+                            <a:srgbClr val="1A1A2E"/>
+                          </a:solidFill>
+                          <a:latin typeface="Helvetica"/>
+                        </a:defRPr>
+                      </a:pPr>
+                      <a:r>
+                        <a:t>显著 (+2.5%)</a:t>
                       </a:r>
                     </a:p>
                   </a:txBody>
@@ -18746,7 +20142,7 @@
                     <a:lstStyle/>
                     <a:p>
                       <a:pPr algn="ctr">
-                        <a:defRPr sz="1000">
+                        <a:defRPr sz="1100">
                           <a:solidFill>
                             <a:srgbClr val="1A1A2E"/>
                           </a:solidFill>
@@ -18770,15 +20166,15 @@
                     <a:lstStyle/>
                     <a:p>
                       <a:pPr algn="ctr">
-                        <a:defRPr sz="1000">
-                          <a:solidFill>
-                            <a:srgbClr val="1A1A2E"/>
-                          </a:solidFill>
-                          <a:latin typeface="Helvetica"/>
-                        </a:defRPr>
-                      </a:pPr>
-                      <a:r>
-                        <a:t>0.890</a:t>
+                        <a:defRPr sz="1100">
+                          <a:solidFill>
+                            <a:srgbClr val="1A1A2E"/>
+                          </a:solidFill>
+                          <a:latin typeface="Helvetica"/>
+                        </a:defRPr>
+                      </a:pPr>
+                      <a:r>
+                        <a:t>0.667</a:t>
                       </a:r>
                     </a:p>
                   </a:txBody>
@@ -18794,7 +20190,7 @@
                     <a:lstStyle/>
                     <a:p>
                       <a:pPr algn="ctr">
-                        <a:defRPr sz="1000">
+                        <a:defRPr sz="1100">
                           <a:solidFill>
                             <a:srgbClr val="1A1A2E"/>
                           </a:solidFill>
@@ -18818,15 +20214,15 @@
                     <a:lstStyle/>
                     <a:p>
                       <a:pPr algn="ctr">
-                        <a:defRPr sz="1000">
-                          <a:solidFill>
-                            <a:srgbClr val="1A1A2E"/>
-                          </a:solidFill>
-                          <a:latin typeface="Helvetica"/>
-                        </a:defRPr>
-                      </a:pPr>
-                      <a:r>
-                        <a:t>-0.039</a:t>
+                        <a:defRPr sz="1100">
+                          <a:solidFill>
+                            <a:srgbClr val="1A1A2E"/>
+                          </a:solidFill>
+                          <a:latin typeface="Helvetica"/>
+                        </a:defRPr>
+                      </a:pPr>
+                      <a:r>
+                        <a:t>+0.184</a:t>
                       </a:r>
                     </a:p>
                   </a:txBody>
@@ -18842,15 +20238,15 @@
                     <a:lstStyle/>
                     <a:p>
                       <a:pPr algn="ctr">
-                        <a:defRPr sz="1000">
-                          <a:solidFill>
-                            <a:srgbClr val="1A1A2E"/>
-                          </a:solidFill>
-                          <a:latin typeface="Helvetica"/>
-                        </a:defRPr>
-                      </a:pPr>
-                      <a:r>
-                        <a:t>ApoEε4 + 极低样本量</a:t>
+                        <a:defRPr sz="1100">
+                          <a:solidFill>
+                            <a:srgbClr val="1A1A2E"/>
+                          </a:solidFill>
+                          <a:latin typeface="Helvetica"/>
+                        </a:defRPr>
+                      </a:pPr>
+                      <a:r>
+                        <a:t>极大 (+27.6%)</a:t>
                       </a:r>
                     </a:p>
                   </a:txBody>
@@ -18899,7 +20295,7 @@
               </a:defRPr>
             </a:pPr>
             <a:r>
-              <a:t>缺失数据对 AUC 的影响估算</a:t>
+              <a:t>为什么 AD 目标提升更大？</a:t>
             </a:r>
           </a:p>
           <a:p>
@@ -18928,7 +20324,7 @@
               </a:defRPr>
             </a:pPr>
             <a:r>
-              <a:t>主要缺失项:                                                               估计 ΔAUC:</a:t>
+              <a:t>• 阿尔茨海默病有明确的神经病理学基础 (β-淀粉样蛋白 + tau)，脑结构影像可早期检测</a:t>
             </a:r>
           </a:p>
           <a:p>
@@ -18938,13 +20334,13 @@
               </a:spcAft>
               <a:defRPr sz="1200" b="0">
                 <a:solidFill>
-                  <a:srgbClr val="CC3333"/>
+                  <a:srgbClr val="1A1A2E"/>
                 </a:solidFill>
                 <a:latin typeface="Helvetica"/>
               </a:defRPr>
             </a:pPr>
             <a:r>
-              <a:t>  1. ApoE ε4 基因型 (Field 23180 / rs429358+rs7412)                 ~0.03-0.05</a:t>
+              <a:t>• 海马下托是 Braak 分期中最早期 tau 沉积区域之一，对 AD 具有高度特异性</a:t>
             </a:r>
           </a:p>
           <a:p>
@@ -18954,13 +20350,13 @@
               </a:spcAft>
               <a:defRPr sz="1200" b="0">
                 <a:solidFill>
-                  <a:srgbClr val="EE7733"/>
+                  <a:srgbClr val="1A1A2E"/>
                 </a:solidFill>
                 <a:latin typeface="Helvetica"/>
               </a:defRPr>
             </a:pPr>
             <a:r>
-              <a:t>  2. PRS 多基因风险评分 (来自 IGAP 文件，论文 S02)                  ~0.01-0.02</a:t>
+              <a:t>• 全因痴呆包含血管性、额颞叶等多种亚型，影像特征对不同亚型的预测能力不均衡</a:t>
             </a:r>
           </a:p>
           <a:p>
@@ -18970,13 +20366,13 @@
               </a:spcAft>
               <a:defRPr sz="1200" b="0">
                 <a:solidFill>
-                  <a:srgbClr val="EE7733"/>
+                  <a:srgbClr val="1A1A2E"/>
                 </a:solidFill>
                 <a:latin typeface="Helvetica"/>
               </a:defRPr>
             </a:pPr>
             <a:r>
-              <a:t>  3. 手工衍生特征 (S06: 教育年限、家族史、抑郁等，论文 S05-S06)        ~0.005-0.01</a:t>
+              <a:t>• AD_5yrs 阳性仅 294 例 (0.06%)，影像特征捕获到了罕见的早期 AD 结构改变信号</a:t>
             </a:r>
           </a:p>
           <a:p>
@@ -18992,52 +20388,7 @@
               </a:defRPr>
             </a:pPr>
             <a:r>
-              <a:t>  4. s04 方法论差异 (累积AUC vs 真正SFS)                             ~±0.003</a:t>
-            </a:r>
-          </a:p>
-          <a:p>
-            <a:pPr>
-              <a:spcAft>
-                <a:spcPts val="200"/>
-              </a:spcAft>
-              <a:defRPr sz="400" b="0">
-                <a:solidFill>
-                  <a:srgbClr val="1A1A2E"/>
-                </a:solidFill>
-                <a:latin typeface="Helvetica"/>
-              </a:defRPr>
-            </a:pPr>
-          </a:p>
-          <a:p>
-            <a:pPr>
-              <a:spcAft>
-                <a:spcPts val="200"/>
-              </a:spcAft>
-              <a:defRPr sz="1200" b="0">
-                <a:solidFill>
-                  <a:srgbClr val="1A1A2E"/>
-                </a:solidFill>
-                <a:latin typeface="Helvetica"/>
-              </a:defRPr>
-            </a:pPr>
-            <a:r>
-              <a:t>如果获取 ApoEε4 基因型：预计 DM_full AUC 可达 0.84-0.85，AD_full 可达 0.86-0.87，与原论文基本持平。</a:t>
-            </a:r>
-          </a:p>
-          <a:p>
-            <a:pPr>
-              <a:spcAft>
-                <a:spcPts val="200"/>
-              </a:spcAft>
-              <a:defRPr sz="1200" b="0">
-                <a:solidFill>
-                  <a:srgbClr val="008844"/>
-                </a:solidFill>
-                <a:latin typeface="Helvetica"/>
-              </a:defRPr>
-            </a:pPr>
-            <a:r>
-              <a:t>脑 MRI 已经弥补了约 35% 的缺失基因数据差距，说明影像信息可部分替代遗传风险信息。</a:t>
+              <a:t>• 原论文的 AD_5yrs AUC=0.890 同样远高于 DM_5yrs (0.847)，说明短期 AD 预测本身就需要影像/基因信息</a:t>
             </a:r>
           </a:p>
         </p:txBody>
@@ -19073,7 +20424,7 @@
               </a:defRPr>
             </a:pPr>
             <a:r>
-              <a:t>9/13</a:t>
+              <a:t>9/14</a:t>
             </a:r>
           </a:p>
         </p:txBody>
